--- a/slides/deck.pptx
+++ b/slides/deck.pptx
@@ -404,115 +404,115 @@
                   <c:v>18.1</c:v>
                 </c:pt>
                 <c:pt idx="1">
-                  <c:v>18.6</c:v>
+                  <c:v>18.1</c:v>
                 </c:pt>
                 <c:pt idx="2">
-                  <c:v>19.2</c:v>
+                  <c:v>18.1</c:v>
                 </c:pt>
                 <c:pt idx="3">
-                  <c:v>19.7</c:v>
+                  <c:v>18.1</c:v>
                 </c:pt>
                 <c:pt idx="4">
-                  <c:v>20.3</c:v>
+                  <c:v>18.1</c:v>
                 </c:pt>
                 <c:pt idx="5">
-                  <c:v>20.8</c:v>
+                  <c:v>18.1</c:v>
                 </c:pt>
                 <c:pt idx="6">
-                  <c:v>21.4</c:v>
+                  <c:v>18.1</c:v>
                 </c:pt>
                 <c:pt idx="7">
-                  <c:v>21.9</c:v>
+                  <c:v>18.1</c:v>
                 </c:pt>
                 <c:pt idx="8">
+                  <c:v>18.1</c:v>
+                </c:pt>
+                <c:pt idx="9">
+                  <c:v>18.1</c:v>
+                </c:pt>
+                <c:pt idx="10">
+                  <c:v>18.1</c:v>
+                </c:pt>
+                <c:pt idx="11">
+                  <c:v>18.1</c:v>
+                </c:pt>
+                <c:pt idx="12">
+                  <c:v>18.1</c:v>
+                </c:pt>
+                <c:pt idx="13">
+                  <c:v>18.1</c:v>
+                </c:pt>
+                <c:pt idx="14">
+                  <c:v>18.1</c:v>
+                </c:pt>
+                <c:pt idx="15">
                   <c:v>22.5</c:v>
                 </c:pt>
-                <c:pt idx="9">
-                  <c:v>23</c:v>
-                </c:pt>
-                <c:pt idx="10">
-                  <c:v>23.6</c:v>
-                </c:pt>
-                <c:pt idx="11">
-                  <c:v>24.1</c:v>
-                </c:pt>
-                <c:pt idx="12">
-                  <c:v>24.7</c:v>
-                </c:pt>
-                <c:pt idx="13">
-                  <c:v>25.2</c:v>
-                </c:pt>
-                <c:pt idx="14">
-                  <c:v>25.8</c:v>
-                </c:pt>
-                <c:pt idx="15">
-                  <c:v>26.3</c:v>
-                </c:pt>
                 <c:pt idx="16">
-                  <c:v>26.9</c:v>
+                  <c:v>22.5</c:v>
                 </c:pt>
                 <c:pt idx="17">
-                  <c:v>27.4</c:v>
+                  <c:v>22.5</c:v>
                 </c:pt>
                 <c:pt idx="18">
-                  <c:v>28</c:v>
+                  <c:v>22.5</c:v>
                 </c:pt>
                 <c:pt idx="19">
-                  <c:v>28.5</c:v>
+                  <c:v>22.5</c:v>
                 </c:pt>
                 <c:pt idx="20">
-                  <c:v>29.1</c:v>
+                  <c:v>22.5</c:v>
                 </c:pt>
                 <c:pt idx="21">
-                  <c:v>29.6</c:v>
+                  <c:v>22.5</c:v>
                 </c:pt>
                 <c:pt idx="22">
-                  <c:v>26.5</c:v>
+                  <c:v>22.5</c:v>
                 </c:pt>
                 <c:pt idx="23">
-                  <c:v>27</c:v>
+                  <c:v>22.5</c:v>
                 </c:pt>
                 <c:pt idx="24">
-                  <c:v>27.5</c:v>
+                  <c:v>22.5</c:v>
                 </c:pt>
                 <c:pt idx="25">
-                  <c:v>28</c:v>
+                  <c:v>22.5</c:v>
                 </c:pt>
                 <c:pt idx="26">
-                  <c:v>28.5</c:v>
+                  <c:v>22.5</c:v>
                 </c:pt>
                 <c:pt idx="27">
-                  <c:v>29</c:v>
+                  <c:v>28.3</c:v>
                 </c:pt>
                 <c:pt idx="28">
-                  <c:v>29.5</c:v>
+                  <c:v>28.3</c:v>
                 </c:pt>
                 <c:pt idx="29">
-                  <c:v>30</c:v>
+                  <c:v>28.3</c:v>
                 </c:pt>
                 <c:pt idx="30">
-                  <c:v>30.5</c:v>
+                  <c:v>28.3</c:v>
                 </c:pt>
                 <c:pt idx="31">
-                  <c:v>31</c:v>
+                  <c:v>28.3</c:v>
                 </c:pt>
                 <c:pt idx="32">
-                  <c:v>31.5</c:v>
+                  <c:v>28.3</c:v>
                 </c:pt>
                 <c:pt idx="33">
-                  <c:v>32</c:v>
+                  <c:v>28.3</c:v>
                 </c:pt>
                 <c:pt idx="34">
-                  <c:v>32.5</c:v>
+                  <c:v>28.3</c:v>
                 </c:pt>
                 <c:pt idx="35">
-                  <c:v>33.5</c:v>
+                  <c:v>28.3</c:v>
                 </c:pt>
                 <c:pt idx="36">
-                  <c:v>34.5</c:v>
+                  <c:v>36.4</c:v>
                 </c:pt>
                 <c:pt idx="37">
-                  <c:v>35.5</c:v>
+                  <c:v>36.4</c:v>
                 </c:pt>
                 <c:pt idx="38">
                   <c:v>36.4</c:v>

--- a/slides/deck.pptx
+++ b/slides/deck.pptx
@@ -1872,7 +1872,7 @@
           <a:p>
             <a:r>
               <a:rPr lang="en-US" dirty="0"/>
-              <a:t>same contract, same 100,000 patients, two very different lines — and the only thing that moved between them is a prompt four people voted on this afternoon.</a:t>
+              <a:t>same contract, same 100,000 patients, two very different lines — and the only thing that moved between them is a prompt four people voted on this afternoon. Numbers from a triage deployment made with the 190/115 decisions on this laptop; your room's numbers will differ. Show the live dashboard.</a:t>
             </a:r>
             <a:endParaRPr lang="en-US" dirty="0"/>
           </a:p>
@@ -2576,7 +2576,7 @@
           <a:p>
             <a:r>
               <a:rPr lang="en-US" dirty="0"/>
-              <a:t>one per click, during the board meeting. Toggle “Sign Prairie” on the presenting team's own numbers while they answer.</a:t>
+              <a:t>one per click, during the board meeting. Toggle “Sign Prairie” on the presenting team's own numbers while they answer. Read them one at a time; do not show all five at once.</a:t>
             </a:r>
             <a:endParaRPr lang="en-US" dirty="0"/>
           </a:p>
@@ -2840,7 +2840,7 @@
           <a:p>
             <a:r>
               <a:rPr lang="en-US" dirty="0"/>
-              <a:t>every queue number gets better in a day. Read the last row before anyone celebrates the rest of the table.</a:t>
+              <a:t>every queue number gets better in a day. Read the last row before anyone celebrates the rest of the table. Numbers from a triage deployment made with the 190/115 decisions on this laptop; your room's numbers will differ. Show the live dashboard.</a:t>
             </a:r>
             <a:endParaRPr lang="en-US" dirty="0"/>
           </a:p>
@@ -4972,8 +4972,8 @@
           <p:nvPr/>
         </p:nvGraphicFramePr>
         <p:xfrm>
-          <a:off x="548640" y="1554480"/>
-          <a:ext cx="11094415" cy="4206240"/>
+          <a:off x="548640" y="1463040"/>
+          <a:ext cx="11094415" cy="3931920"/>
         </p:xfrm>
         <a:graphic xmlns:a="http://schemas.openxmlformats.org/drawingml/2006/main">
           <a:graphicData uri="http://schemas.openxmlformats.org/drawingml/2006/chart">
@@ -4989,8 +4989,8 @@
         </p:nvSpPr>
         <p:spPr>
           <a:xfrm>
-            <a:off x="548640" y="5897880"/>
-            <a:ext cx="11094415" cy="365760"/>
+            <a:off x="548640" y="5532120"/>
+            <a:ext cx="11094415" cy="292608"/>
           </a:xfrm>
           <a:prstGeom prst="rect">
             <a:avLst/>
@@ -5006,7 +5006,7 @@
               <a:buNone/>
             </a:pPr>
             <a:r>
-              <a:rPr lang="en-US" sz="1300" i="1" dirty="0">
+              <a:rPr lang="en-US" sz="1250" i="1" dirty="0">
                 <a:solidFill>
                   <a:srgbClr val="5B6472"/>
                 </a:solidFill>
@@ -5016,13 +5016,52 @@
               </a:rPr>
               <a:t>Same 100,000 patients, same contract — 336h capped without the deployment, ~24–31h with it.</a:t>
             </a:r>
-            <a:endParaRPr lang="en-US" sz="1300" dirty="0"/>
+            <a:endParaRPr lang="en-US" sz="1250" dirty="0"/>
           </a:p>
         </p:txBody>
       </p:sp>
       <p:sp>
         <p:nvSpPr>
           <p:cNvPr id="6" name="Text 3"/>
+          <p:cNvSpPr txBox="1"/>
+          <p:nvPr/>
+        </p:nvSpPr>
+        <p:spPr>
+          <a:xfrm>
+            <a:off x="548640" y="5852160"/>
+            <a:ext cx="11094415" cy="292608"/>
+          </a:xfrm>
+          <a:prstGeom prst="rect">
+            <a:avLst/>
+          </a:prstGeom>
+          <a:noFill/>
+          <a:ln/>
+        </p:spPr>
+        <p:txBody>
+          <a:bodyPr wrap="square" lIns="0" tIns="0" rIns="0" bIns="0" rtlCol="0" anchor="ctr"/>
+          <a:lstStyle/>
+          <a:p>
+            <a:pPr indent="0" marL="0">
+              <a:buNone/>
+            </a:pPr>
+            <a:r>
+              <a:rPr lang="en-US" sz="1200" i="1" dirty="0">
+                <a:solidFill>
+                  <a:srgbClr val="1C7293"/>
+                </a:solidFill>
+                <a:latin typeface="Calibri" pitchFamily="34" charset="0"/>
+                <a:ea typeface="Calibri" pitchFamily="34" charset="-122"/>
+                <a:cs typeface="Calibri" pitchFamily="34" charset="-120"/>
+              </a:rPr>
+              <a:t>Numbers from a triage deployment made with the 190/115 decisions on this laptop; your room's numbers will differ. Show the live dashboard.</a:t>
+            </a:r>
+            <a:endParaRPr lang="en-US" sz="1200" dirty="0"/>
+          </a:p>
+        </p:txBody>
+      </p:sp>
+      <p:sp>
+        <p:nvSpPr>
+          <p:cNvPr id="7" name="Text 4"/>
           <p:cNvSpPr txBox="1"/>
           <p:nvPr/>
         </p:nvSpPr>
@@ -7313,7 +7352,7 @@
     <p:bg>
       <p:bgPr>
         <a:solidFill>
-          <a:srgbClr val="21295C"/>
+          <a:srgbClr val="FFFFFF"/>
         </a:solidFill>
       </p:bgPr>
     </p:bg>
@@ -7333,19 +7372,95 @@
       </p:grpSpPr>
       <p:sp>
         <p:nvSpPr>
-          <p:cNvPr id="2" name="Shape 0"/>
+          <p:cNvPr id="2" name="Text 0"/>
+          <p:cNvSpPr txBox="1"/>
+          <p:nvPr/>
+        </p:nvSpPr>
+        <p:spPr>
+          <a:xfrm>
+            <a:off x="548640" y="164592"/>
+            <a:ext cx="11094415" cy="274320"/>
+          </a:xfrm>
+          <a:prstGeom prst="rect">
+            <a:avLst/>
+          </a:prstGeom>
+          <a:noFill/>
+          <a:ln/>
+        </p:spPr>
+        <p:txBody>
+          <a:bodyPr wrap="square" lIns="0" tIns="0" rIns="0" bIns="0" rtlCol="0" anchor="ctr"/>
+          <a:lstStyle/>
+          <a:p>
+            <a:pPr algn="l" indent="0" marL="0">
+              <a:buNone/>
+            </a:pPr>
+            <a:r>
+              <a:rPr lang="en-US" sz="1200" b="1" spc="200" kern="0" dirty="0">
+                <a:solidFill>
+                  <a:srgbClr val="1C7293"/>
+                </a:solidFill>
+                <a:latin typeface="Calibri" pitchFamily="34" charset="0"/>
+                <a:ea typeface="Calibri" pitchFamily="34" charset="-122"/>
+                <a:cs typeface="Calibri" pitchFamily="34" charset="-120"/>
+              </a:rPr>
+              <a:t>CASE ONE IN ONE SLIDE</a:t>
+            </a:r>
+            <a:endParaRPr lang="en-US" sz="1200" dirty="0"/>
+          </a:p>
+        </p:txBody>
+      </p:sp>
+      <p:sp>
+        <p:nvSpPr>
+          <p:cNvPr id="3" name="Text 1"/>
+          <p:cNvSpPr txBox="1"/>
+          <p:nvPr/>
+        </p:nvSpPr>
+        <p:spPr>
+          <a:xfrm>
+            <a:off x="548640" y="411480"/>
+            <a:ext cx="11094415" cy="822960"/>
+          </a:xfrm>
+          <a:prstGeom prst="rect">
+            <a:avLst/>
+          </a:prstGeom>
+          <a:noFill/>
+          <a:ln/>
+        </p:spPr>
+        <p:txBody>
+          <a:bodyPr wrap="square" lIns="0" tIns="0" rIns="0" bIns="0" rtlCol="0" anchor="ctr"/>
+          <a:lstStyle/>
+          <a:p>
+            <a:pPr algn="l" indent="0" marL="0">
+              <a:buNone/>
+            </a:pPr>
+            <a:r>
+              <a:rPr lang="en-US" sz="3200" b="1" dirty="0">
+                <a:solidFill>
+                  <a:srgbClr val="1B1F27"/>
+                </a:solidFill>
+                <a:latin typeface="Cambria" pitchFamily="34" charset="0"/>
+                <a:ea typeface="Cambria" pitchFamily="34" charset="-122"/>
+                <a:cs typeface="Cambria" pitchFamily="34" charset="-120"/>
+              </a:rPr>
+              <a:t>Build-versus-buy is a go-to-market question.</a:t>
+            </a:r>
+            <a:endParaRPr lang="en-US" sz="3200" dirty="0"/>
+          </a:p>
+        </p:txBody>
+      </p:sp>
+      <p:sp>
+        <p:nvSpPr>
+          <p:cNvPr id="4" name="Shape 2"/>
           <p:cNvSpPr/>
           <p:nvPr/>
         </p:nvSpPr>
         <p:spPr>
           <a:xfrm>
-            <a:off x="822960" y="822960"/>
-            <a:ext cx="822960" cy="822960"/>
+            <a:off x="548640" y="1874520"/>
+            <a:ext cx="640080" cy="640080"/>
           </a:xfrm>
-          <a:prstGeom prst="roundRect">
-            <a:avLst>
-              <a:gd name="adj" fmla="val 50000"/>
-            </a:avLst>
+          <a:prstGeom prst="ellipse">
+            <a:avLst/>
           </a:prstGeom>
           <a:solidFill>
             <a:srgbClr val="1C7293"/>
@@ -7355,14 +7470,14 @@
       </p:sp>
       <p:sp>
         <p:nvSpPr>
-          <p:cNvPr id="3" name="Text 1"/>
+          <p:cNvPr id="5" name="Text 3"/>
           <p:cNvSpPr txBox="1"/>
           <p:nvPr/>
         </p:nvSpPr>
         <p:spPr>
           <a:xfrm>
-            <a:off x="822960" y="658368"/>
-            <a:ext cx="822960" cy="822960"/>
+            <a:off x="548640" y="1737360"/>
+            <a:ext cx="640080" cy="640080"/>
           </a:xfrm>
           <a:prstGeom prst="rect">
             <a:avLst/>
@@ -7378,7 +7493,7 @@
               <a:buNone/>
             </a:pPr>
             <a:r>
-              <a:rPr lang="en-US" sz="4600" b="1" dirty="0">
+              <a:rPr lang="en-US" sz="3400" b="1" dirty="0">
                 <a:solidFill>
                   <a:srgbClr val="FFFFFF"/>
                 </a:solidFill>
@@ -7388,84 +7503,6 @@
               </a:rPr>
               <a:t>“</a:t>
             </a:r>
-            <a:endParaRPr lang="en-US" sz="4600" dirty="0"/>
-          </a:p>
-        </p:txBody>
-      </p:sp>
-      <p:sp>
-        <p:nvSpPr>
-          <p:cNvPr id="4" name="Text 2"/>
-          <p:cNvSpPr txBox="1"/>
-          <p:nvPr/>
-        </p:nvSpPr>
-        <p:spPr>
-          <a:xfrm>
-            <a:off x="548640" y="1828800"/>
-            <a:ext cx="11094415" cy="457200"/>
-          </a:xfrm>
-          <a:prstGeom prst="rect">
-            <a:avLst/>
-          </a:prstGeom>
-          <a:noFill/>
-          <a:ln/>
-        </p:spPr>
-        <p:txBody>
-          <a:bodyPr wrap="square" lIns="0" tIns="0" rIns="0" bIns="0" rtlCol="0" anchor="ctr"/>
-          <a:lstStyle/>
-          <a:p>
-            <a:pPr indent="0" marL="0">
-              <a:buNone/>
-            </a:pPr>
-            <a:r>
-              <a:rPr lang="en-US" sz="1400" b="1" spc="200" kern="0" dirty="0">
-                <a:solidFill>
-                  <a:srgbClr val="CADCFC"/>
-                </a:solidFill>
-                <a:latin typeface="Calibri" pitchFamily="34" charset="0"/>
-                <a:ea typeface="Calibri" pitchFamily="34" charset="-122"/>
-                <a:cs typeface="Calibri" pitchFamily="34" charset="-120"/>
-              </a:rPr>
-              <a:t>Case one in one slide</a:t>
-            </a:r>
-            <a:endParaRPr lang="en-US" sz="1400" dirty="0"/>
-          </a:p>
-        </p:txBody>
-      </p:sp>
-      <p:sp>
-        <p:nvSpPr>
-          <p:cNvPr id="5" name="Text 3"/>
-          <p:cNvSpPr txBox="1"/>
-          <p:nvPr/>
-        </p:nvSpPr>
-        <p:spPr>
-          <a:xfrm>
-            <a:off x="548640" y="2331720"/>
-            <a:ext cx="11094415" cy="914400"/>
-          </a:xfrm>
-          <a:prstGeom prst="rect">
-            <a:avLst/>
-          </a:prstGeom>
-          <a:noFill/>
-          <a:ln/>
-        </p:spPr>
-        <p:txBody>
-          <a:bodyPr wrap="square" lIns="0" tIns="0" rIns="0" bIns="0" rtlCol="0" anchor="ctr"/>
-          <a:lstStyle/>
-          <a:p>
-            <a:pPr indent="0" marL="0">
-              <a:buNone/>
-            </a:pPr>
-            <a:r>
-              <a:rPr lang="en-US" sz="3400" b="1" dirty="0">
-                <a:solidFill>
-                  <a:srgbClr val="FFFFFF"/>
-                </a:solidFill>
-                <a:latin typeface="Cambria" pitchFamily="34" charset="0"/>
-                <a:ea typeface="Cambria" pitchFamily="34" charset="-122"/>
-                <a:cs typeface="Cambria" pitchFamily="34" charset="-120"/>
-              </a:rPr>
-              <a:t>Build-versus-buy is a go-to-market question.</a:t>
-            </a:r>
             <a:endParaRPr lang="en-US" sz="3400" dirty="0"/>
           </a:p>
         </p:txBody>
@@ -7478,8 +7515,8 @@
         </p:nvSpPr>
         <p:spPr>
           <a:xfrm>
-            <a:off x="548640" y="3337560"/>
-            <a:ext cx="10180015" cy="1463040"/>
+            <a:off x="1463040" y="1783080"/>
+            <a:ext cx="10180015" cy="1828800"/>
           </a:xfrm>
           <a:prstGeom prst="rect">
             <a:avLst/>
@@ -7500,7 +7537,7 @@
             <a:r>
               <a:rPr lang="en-US" sz="2200" i="1" dirty="0">
                 <a:solidFill>
-                  <a:srgbClr val="CADCFC"/>
+                  <a:srgbClr val="1B1F27"/>
                 </a:solidFill>
                 <a:latin typeface="Times New Roman" pitchFamily="34" charset="0"/>
                 <a:ea typeface="Times New Roman" pitchFamily="34" charset="-122"/>
@@ -7539,7 +7576,7 @@
             <a:r>
               <a:rPr lang="en-US" sz="1000" dirty="0">
                 <a:solidFill>
-                  <a:srgbClr val="CADCFC"/>
+                  <a:srgbClr val="5B6472"/>
                 </a:solidFill>
                 <a:latin typeface="Calibri" pitchFamily="34" charset="0"/>
                 <a:ea typeface="Calibri" pitchFamily="34" charset="-122"/>
@@ -20442,8 +20479,8 @@
           <p:nvPr/>
         </p:nvGraphicFramePr>
         <p:xfrm>
-          <a:off x="548640" y="1554480"/>
-          <a:ext cx="11094415" cy="4114800"/>
+          <a:off x="548640" y="1508760"/>
+          <a:ext cx="11094415" cy="3840480"/>
         </p:xfrm>
         <a:graphic xmlns:a="http://schemas.openxmlformats.org/drawingml/2006/main">
           <a:graphicData uri="http://schemas.openxmlformats.org/drawingml/2006/chart">
@@ -20459,8 +20496,8 @@
         </p:nvSpPr>
         <p:spPr>
           <a:xfrm>
-            <a:off x="548640" y="5806440"/>
-            <a:ext cx="11094415" cy="365760"/>
+            <a:off x="548640" y="5486400"/>
+            <a:ext cx="11094415" cy="292608"/>
           </a:xfrm>
           <a:prstGeom prst="rect">
             <a:avLst/>
@@ -20476,7 +20513,7 @@
               <a:buNone/>
             </a:pPr>
             <a:r>
-              <a:rPr lang="en-US" sz="1300" i="1" dirty="0">
+              <a:rPr lang="en-US" sz="1250" i="1" dirty="0">
                 <a:solidFill>
                   <a:srgbClr val="5B6472"/>
                 </a:solidFill>
@@ -20486,13 +20523,52 @@
               </a:rPr>
               <a:t>Median nurse response: 29.7h → 4.0h — but 90.0 urgent cases a week are now missed.</a:t>
             </a:r>
-            <a:endParaRPr lang="en-US" sz="1300" dirty="0"/>
+            <a:endParaRPr lang="en-US" sz="1250" dirty="0"/>
           </a:p>
         </p:txBody>
       </p:sp>
       <p:sp>
         <p:nvSpPr>
           <p:cNvPr id="6" name="Text 3"/>
+          <p:cNvSpPr txBox="1"/>
+          <p:nvPr/>
+        </p:nvSpPr>
+        <p:spPr>
+          <a:xfrm>
+            <a:off x="548640" y="5806440"/>
+            <a:ext cx="11094415" cy="292608"/>
+          </a:xfrm>
+          <a:prstGeom prst="rect">
+            <a:avLst/>
+          </a:prstGeom>
+          <a:noFill/>
+          <a:ln/>
+        </p:spPr>
+        <p:txBody>
+          <a:bodyPr wrap="square" lIns="0" tIns="0" rIns="0" bIns="0" rtlCol="0" anchor="ctr"/>
+          <a:lstStyle/>
+          <a:p>
+            <a:pPr indent="0" marL="0">
+              <a:buNone/>
+            </a:pPr>
+            <a:r>
+              <a:rPr lang="en-US" sz="1200" i="1" dirty="0">
+                <a:solidFill>
+                  <a:srgbClr val="1C7293"/>
+                </a:solidFill>
+                <a:latin typeface="Calibri" pitchFamily="34" charset="0"/>
+                <a:ea typeface="Calibri" pitchFamily="34" charset="-122"/>
+                <a:cs typeface="Calibri" pitchFamily="34" charset="-120"/>
+              </a:rPr>
+              <a:t>Numbers from a triage deployment made with the 190/115 decisions on this laptop; your room's numbers will differ. Show the live dashboard.</a:t>
+            </a:r>
+            <a:endParaRPr lang="en-US" sz="1200" dirty="0"/>
+          </a:p>
+        </p:txBody>
+      </p:sp>
+      <p:sp>
+        <p:nvSpPr>
+          <p:cNvPr id="7" name="Text 4"/>
           <p:cNvSpPr txBox="1"/>
           <p:nvPr/>
         </p:nvSpPr>

--- a/slides/deck.pptx
+++ b/slides/deck.pptx
@@ -229,170 +229,168 @@
             </c:spPr>
           </c:marker>
           <c:cat>
-            <c:multiLvlStrRef>
+            <c:strRef>
               <c:f>Sheet1!$A$2:$A$53</c:f>
-              <c:multiLvlStrCache>
+              <c:strCache>
                 <c:ptCount val="52"/>
-                <c:lvl>
-                  <c:pt idx="0">
-                    <c:v>1</c:v>
-                  </c:pt>
-                  <c:pt idx="1">
-                    <c:v>2</c:v>
-                  </c:pt>
-                  <c:pt idx="2">
-                    <c:v>3</c:v>
-                  </c:pt>
-                  <c:pt idx="3">
-                    <c:v>4</c:v>
-                  </c:pt>
-                  <c:pt idx="4">
-                    <c:v>5</c:v>
-                  </c:pt>
-                  <c:pt idx="5">
-                    <c:v>6</c:v>
-                  </c:pt>
-                  <c:pt idx="6">
-                    <c:v>7</c:v>
-                  </c:pt>
-                  <c:pt idx="7">
-                    <c:v>8</c:v>
-                  </c:pt>
-                  <c:pt idx="8">
-                    <c:v>9</c:v>
-                  </c:pt>
-                  <c:pt idx="9">
-                    <c:v>10</c:v>
-                  </c:pt>
-                  <c:pt idx="10">
-                    <c:v>11</c:v>
-                  </c:pt>
-                  <c:pt idx="11">
-                    <c:v>12</c:v>
-                  </c:pt>
-                  <c:pt idx="12">
-                    <c:v>13</c:v>
-                  </c:pt>
-                  <c:pt idx="13">
-                    <c:v>14</c:v>
-                  </c:pt>
-                  <c:pt idx="14">
-                    <c:v>15</c:v>
-                  </c:pt>
-                  <c:pt idx="15">
-                    <c:v>16</c:v>
-                  </c:pt>
-                  <c:pt idx="16">
-                    <c:v>17</c:v>
-                  </c:pt>
-                  <c:pt idx="17">
-                    <c:v>18</c:v>
-                  </c:pt>
-                  <c:pt idx="18">
-                    <c:v>19</c:v>
-                  </c:pt>
-                  <c:pt idx="19">
-                    <c:v>20</c:v>
-                  </c:pt>
-                  <c:pt idx="20">
-                    <c:v>21</c:v>
-                  </c:pt>
-                  <c:pt idx="21">
-                    <c:v>22</c:v>
-                  </c:pt>
-                  <c:pt idx="22">
-                    <c:v>23</c:v>
-                  </c:pt>
-                  <c:pt idx="23">
-                    <c:v>24</c:v>
-                  </c:pt>
-                  <c:pt idx="24">
-                    <c:v>25</c:v>
-                  </c:pt>
-                  <c:pt idx="25">
-                    <c:v>26</c:v>
-                  </c:pt>
-                  <c:pt idx="26">
-                    <c:v>27</c:v>
-                  </c:pt>
-                  <c:pt idx="27">
-                    <c:v>28</c:v>
-                  </c:pt>
-                  <c:pt idx="28">
-                    <c:v>29</c:v>
-                  </c:pt>
-                  <c:pt idx="29">
-                    <c:v>30</c:v>
-                  </c:pt>
-                  <c:pt idx="30">
-                    <c:v>31</c:v>
-                  </c:pt>
-                  <c:pt idx="31">
-                    <c:v>32</c:v>
-                  </c:pt>
-                  <c:pt idx="32">
-                    <c:v>33</c:v>
-                  </c:pt>
-                  <c:pt idx="33">
-                    <c:v>34</c:v>
-                  </c:pt>
-                  <c:pt idx="34">
-                    <c:v>35</c:v>
-                  </c:pt>
-                  <c:pt idx="35">
-                    <c:v>36</c:v>
-                  </c:pt>
-                  <c:pt idx="36">
-                    <c:v>37</c:v>
-                  </c:pt>
-                  <c:pt idx="37">
-                    <c:v>38</c:v>
-                  </c:pt>
-                  <c:pt idx="38">
-                    <c:v>39</c:v>
-                  </c:pt>
-                  <c:pt idx="39">
-                    <c:v>40</c:v>
-                  </c:pt>
-                  <c:pt idx="40">
-                    <c:v>41</c:v>
-                  </c:pt>
-                  <c:pt idx="41">
-                    <c:v>42</c:v>
-                  </c:pt>
-                  <c:pt idx="42">
-                    <c:v>43</c:v>
-                  </c:pt>
-                  <c:pt idx="43">
-                    <c:v>44</c:v>
-                  </c:pt>
-                  <c:pt idx="44">
-                    <c:v>45</c:v>
-                  </c:pt>
-                  <c:pt idx="45">
-                    <c:v>46</c:v>
-                  </c:pt>
-                  <c:pt idx="46">
-                    <c:v>47</c:v>
-                  </c:pt>
-                  <c:pt idx="47">
-                    <c:v>48</c:v>
-                  </c:pt>
-                  <c:pt idx="48">
-                    <c:v>49</c:v>
-                  </c:pt>
-                  <c:pt idx="49">
-                    <c:v>50</c:v>
-                  </c:pt>
-                  <c:pt idx="50">
-                    <c:v>51</c:v>
-                  </c:pt>
-                  <c:pt idx="51">
-                    <c:v>52</c:v>
-                  </c:pt>
-                </c:lvl>
-              </c:multiLvlStrCache>
-            </c:multiLvlStrRef>
+                <c:pt idx="0">
+                  <c:v>1</c:v>
+                </c:pt>
+                <c:pt idx="1">
+                  <c:v>2</c:v>
+                </c:pt>
+                <c:pt idx="2">
+                  <c:v>3</c:v>
+                </c:pt>
+                <c:pt idx="3">
+                  <c:v>4</c:v>
+                </c:pt>
+                <c:pt idx="4">
+                  <c:v>5</c:v>
+                </c:pt>
+                <c:pt idx="5">
+                  <c:v>6</c:v>
+                </c:pt>
+                <c:pt idx="6">
+                  <c:v>7</c:v>
+                </c:pt>
+                <c:pt idx="7">
+                  <c:v>8</c:v>
+                </c:pt>
+                <c:pt idx="8">
+                  <c:v>9</c:v>
+                </c:pt>
+                <c:pt idx="9">
+                  <c:v>10</c:v>
+                </c:pt>
+                <c:pt idx="10">
+                  <c:v>11</c:v>
+                </c:pt>
+                <c:pt idx="11">
+                  <c:v>12</c:v>
+                </c:pt>
+                <c:pt idx="12">
+                  <c:v>13</c:v>
+                </c:pt>
+                <c:pt idx="13">
+                  <c:v>14</c:v>
+                </c:pt>
+                <c:pt idx="14">
+                  <c:v>15</c:v>
+                </c:pt>
+                <c:pt idx="15">
+                  <c:v>16</c:v>
+                </c:pt>
+                <c:pt idx="16">
+                  <c:v>17</c:v>
+                </c:pt>
+                <c:pt idx="17">
+                  <c:v>18</c:v>
+                </c:pt>
+                <c:pt idx="18">
+                  <c:v>19</c:v>
+                </c:pt>
+                <c:pt idx="19">
+                  <c:v>20</c:v>
+                </c:pt>
+                <c:pt idx="20">
+                  <c:v>21</c:v>
+                </c:pt>
+                <c:pt idx="21">
+                  <c:v>22</c:v>
+                </c:pt>
+                <c:pt idx="22">
+                  <c:v>23</c:v>
+                </c:pt>
+                <c:pt idx="23">
+                  <c:v>24</c:v>
+                </c:pt>
+                <c:pt idx="24">
+                  <c:v>25</c:v>
+                </c:pt>
+                <c:pt idx="25">
+                  <c:v>26</c:v>
+                </c:pt>
+                <c:pt idx="26">
+                  <c:v>27</c:v>
+                </c:pt>
+                <c:pt idx="27">
+                  <c:v>28</c:v>
+                </c:pt>
+                <c:pt idx="28">
+                  <c:v>29</c:v>
+                </c:pt>
+                <c:pt idx="29">
+                  <c:v>30</c:v>
+                </c:pt>
+                <c:pt idx="30">
+                  <c:v>31</c:v>
+                </c:pt>
+                <c:pt idx="31">
+                  <c:v>32</c:v>
+                </c:pt>
+                <c:pt idx="32">
+                  <c:v>33</c:v>
+                </c:pt>
+                <c:pt idx="33">
+                  <c:v>34</c:v>
+                </c:pt>
+                <c:pt idx="34">
+                  <c:v>35</c:v>
+                </c:pt>
+                <c:pt idx="35">
+                  <c:v>36</c:v>
+                </c:pt>
+                <c:pt idx="36">
+                  <c:v>37</c:v>
+                </c:pt>
+                <c:pt idx="37">
+                  <c:v>38</c:v>
+                </c:pt>
+                <c:pt idx="38">
+                  <c:v>39</c:v>
+                </c:pt>
+                <c:pt idx="39">
+                  <c:v>40</c:v>
+                </c:pt>
+                <c:pt idx="40">
+                  <c:v>41</c:v>
+                </c:pt>
+                <c:pt idx="41">
+                  <c:v>42</c:v>
+                </c:pt>
+                <c:pt idx="42">
+                  <c:v>43</c:v>
+                </c:pt>
+                <c:pt idx="43">
+                  <c:v>44</c:v>
+                </c:pt>
+                <c:pt idx="44">
+                  <c:v>45</c:v>
+                </c:pt>
+                <c:pt idx="45">
+                  <c:v>46</c:v>
+                </c:pt>
+                <c:pt idx="46">
+                  <c:v>47</c:v>
+                </c:pt>
+                <c:pt idx="47">
+                  <c:v>48</c:v>
+                </c:pt>
+                <c:pt idx="48">
+                  <c:v>49</c:v>
+                </c:pt>
+                <c:pt idx="49">
+                  <c:v>50</c:v>
+                </c:pt>
+                <c:pt idx="50">
+                  <c:v>51</c:v>
+                </c:pt>
+                <c:pt idx="51">
+                  <c:v>52</c:v>
+                </c:pt>
+              </c:strCache>
+            </c:strRef>
           </c:cat>
           <c:val>
             <c:numRef>
@@ -401,91 +399,91 @@
                 <c:formatCode>General</c:formatCode>
                 <c:ptCount val="52"/>
                 <c:pt idx="0">
-                  <c:v>18.1</c:v>
+                  <c:v>22.2</c:v>
                 </c:pt>
                 <c:pt idx="1">
-                  <c:v>18.1</c:v>
+                  <c:v>22.2</c:v>
                 </c:pt>
                 <c:pt idx="2">
-                  <c:v>18.1</c:v>
+                  <c:v>22.2</c:v>
                 </c:pt>
                 <c:pt idx="3">
-                  <c:v>18.1</c:v>
+                  <c:v>22.2</c:v>
                 </c:pt>
                 <c:pt idx="4">
-                  <c:v>18.1</c:v>
+                  <c:v>22.2</c:v>
                 </c:pt>
                 <c:pt idx="5">
-                  <c:v>18.1</c:v>
+                  <c:v>22.2</c:v>
                 </c:pt>
                 <c:pt idx="6">
-                  <c:v>18.1</c:v>
+                  <c:v>22.2</c:v>
                 </c:pt>
                 <c:pt idx="7">
-                  <c:v>18.1</c:v>
+                  <c:v>22.2</c:v>
                 </c:pt>
                 <c:pt idx="8">
-                  <c:v>18.1</c:v>
+                  <c:v>22.2</c:v>
                 </c:pt>
                 <c:pt idx="9">
-                  <c:v>18.1</c:v>
+                  <c:v>22.2</c:v>
                 </c:pt>
                 <c:pt idx="10">
-                  <c:v>18.1</c:v>
+                  <c:v>22.2</c:v>
                 </c:pt>
                 <c:pt idx="11">
-                  <c:v>18.1</c:v>
+                  <c:v>22.2</c:v>
                 </c:pt>
                 <c:pt idx="12">
-                  <c:v>18.1</c:v>
+                  <c:v>22.2</c:v>
                 </c:pt>
                 <c:pt idx="13">
-                  <c:v>18.1</c:v>
+                  <c:v>22.2</c:v>
                 </c:pt>
                 <c:pt idx="14">
-                  <c:v>18.1</c:v>
+                  <c:v>22.2</c:v>
                 </c:pt>
                 <c:pt idx="15">
-                  <c:v>22.5</c:v>
+                  <c:v>22.2</c:v>
                 </c:pt>
                 <c:pt idx="16">
-                  <c:v>22.5</c:v>
+                  <c:v>22.2</c:v>
                 </c:pt>
                 <c:pt idx="17">
-                  <c:v>22.5</c:v>
+                  <c:v>22.2</c:v>
                 </c:pt>
                 <c:pt idx="18">
-                  <c:v>22.5</c:v>
+                  <c:v>22.2</c:v>
                 </c:pt>
                 <c:pt idx="19">
-                  <c:v>22.5</c:v>
+                  <c:v>22.2</c:v>
                 </c:pt>
                 <c:pt idx="20">
-                  <c:v>22.5</c:v>
+                  <c:v>22.2</c:v>
                 </c:pt>
                 <c:pt idx="21">
-                  <c:v>22.5</c:v>
+                  <c:v>22.2</c:v>
                 </c:pt>
                 <c:pt idx="22">
-                  <c:v>22.5</c:v>
+                  <c:v>22.2</c:v>
                 </c:pt>
                 <c:pt idx="23">
-                  <c:v>22.5</c:v>
+                  <c:v>22.2</c:v>
                 </c:pt>
                 <c:pt idx="24">
-                  <c:v>22.5</c:v>
+                  <c:v>22.2</c:v>
                 </c:pt>
                 <c:pt idx="25">
-                  <c:v>22.5</c:v>
+                  <c:v>22.2</c:v>
                 </c:pt>
                 <c:pt idx="26">
-                  <c:v>22.5</c:v>
+                  <c:v>22.2</c:v>
                 </c:pt>
                 <c:pt idx="27">
-                  <c:v>28.3</c:v>
+                  <c:v>22.2</c:v>
                 </c:pt>
                 <c:pt idx="28">
-                  <c:v>28.3</c:v>
+                  <c:v>22.2</c:v>
                 </c:pt>
                 <c:pt idx="29">
                   <c:v>28.3</c:v>
@@ -503,58 +501,58 @@
                   <c:v>28.3</c:v>
                 </c:pt>
                 <c:pt idx="34">
-                  <c:v>28.3</c:v>
+                  <c:v>36.7</c:v>
                 </c:pt>
                 <c:pt idx="35">
-                  <c:v>28.3</c:v>
+                  <c:v>36.7</c:v>
                 </c:pt>
                 <c:pt idx="36">
-                  <c:v>36.4</c:v>
+                  <c:v>36.7</c:v>
                 </c:pt>
                 <c:pt idx="37">
-                  <c:v>36.4</c:v>
+                  <c:v>36.7</c:v>
                 </c:pt>
                 <c:pt idx="38">
-                  <c:v>36.4</c:v>
+                  <c:v>48.9</c:v>
                 </c:pt>
                 <c:pt idx="39">
-                  <c:v>4</c:v>
+                  <c:v>4.0</c:v>
                 </c:pt>
                 <c:pt idx="40">
-                  <c:v>4</c:v>
+                  <c:v>4.0</c:v>
                 </c:pt>
                 <c:pt idx="41">
-                  <c:v>4</c:v>
+                  <c:v>4.0</c:v>
                 </c:pt>
                 <c:pt idx="42">
-                  <c:v>4</c:v>
+                  <c:v>4.0</c:v>
                 </c:pt>
                 <c:pt idx="43">
-                  <c:v>4</c:v>
+                  <c:v>4.0</c:v>
                 </c:pt>
                 <c:pt idx="44">
-                  <c:v>4</c:v>
+                  <c:v>4.0</c:v>
                 </c:pt>
                 <c:pt idx="45">
-                  <c:v>4</c:v>
+                  <c:v>4.0</c:v>
                 </c:pt>
                 <c:pt idx="46">
-                  <c:v>4</c:v>
+                  <c:v>4.0</c:v>
                 </c:pt>
                 <c:pt idx="47">
-                  <c:v>4</c:v>
+                  <c:v>4.0</c:v>
                 </c:pt>
                 <c:pt idx="48">
-                  <c:v>4</c:v>
+                  <c:v>4.0</c:v>
                 </c:pt>
                 <c:pt idx="49">
-                  <c:v>4</c:v>
+                  <c:v>4.0</c:v>
                 </c:pt>
                 <c:pt idx="50">
-                  <c:v>4</c:v>
+                  <c:v>4.0</c:v>
                 </c:pt>
                 <c:pt idx="51">
-                  <c:v>4</c:v>
+                  <c:v>4.0</c:v>
                 </c:pt>
               </c:numCache>
             </c:numRef>
@@ -844,53 +842,51 @@
             </c:spPr>
           </c:marker>
           <c:cat>
-            <c:multiLvlStrRef>
+            <c:strRef>
               <c:f>Sheet1!$A$2:$A$14</c:f>
-              <c:multiLvlStrCache>
+              <c:strCache>
                 <c:ptCount val="13"/>
-                <c:lvl>
-                  <c:pt idx="0">
-                    <c:v>40</c:v>
-                  </c:pt>
-                  <c:pt idx="1">
-                    <c:v>41</c:v>
-                  </c:pt>
-                  <c:pt idx="2">
-                    <c:v>42</c:v>
-                  </c:pt>
-                  <c:pt idx="3">
-                    <c:v>43</c:v>
-                  </c:pt>
-                  <c:pt idx="4">
-                    <c:v>44</c:v>
-                  </c:pt>
-                  <c:pt idx="5">
-                    <c:v>45</c:v>
-                  </c:pt>
-                  <c:pt idx="6">
-                    <c:v>46</c:v>
-                  </c:pt>
-                  <c:pt idx="7">
-                    <c:v>47</c:v>
-                  </c:pt>
-                  <c:pt idx="8">
-                    <c:v>48</c:v>
-                  </c:pt>
-                  <c:pt idx="9">
-                    <c:v>49</c:v>
-                  </c:pt>
-                  <c:pt idx="10">
-                    <c:v>50</c:v>
-                  </c:pt>
-                  <c:pt idx="11">
-                    <c:v>51</c:v>
-                  </c:pt>
-                  <c:pt idx="12">
-                    <c:v>52</c:v>
-                  </c:pt>
-                </c:lvl>
-              </c:multiLvlStrCache>
-            </c:multiLvlStrRef>
+                <c:pt idx="0">
+                  <c:v>40</c:v>
+                </c:pt>
+                <c:pt idx="1">
+                  <c:v>41</c:v>
+                </c:pt>
+                <c:pt idx="2">
+                  <c:v>42</c:v>
+                </c:pt>
+                <c:pt idx="3">
+                  <c:v>43</c:v>
+                </c:pt>
+                <c:pt idx="4">
+                  <c:v>44</c:v>
+                </c:pt>
+                <c:pt idx="5">
+                  <c:v>45</c:v>
+                </c:pt>
+                <c:pt idx="6">
+                  <c:v>46</c:v>
+                </c:pt>
+                <c:pt idx="7">
+                  <c:v>47</c:v>
+                </c:pt>
+                <c:pt idx="8">
+                  <c:v>48</c:v>
+                </c:pt>
+                <c:pt idx="9">
+                  <c:v>49</c:v>
+                </c:pt>
+                <c:pt idx="10">
+                  <c:v>50</c:v>
+                </c:pt>
+                <c:pt idx="11">
+                  <c:v>51</c:v>
+                </c:pt>
+                <c:pt idx="12">
+                  <c:v>52</c:v>
+                </c:pt>
+              </c:strCache>
+            </c:strRef>
           </c:cat>
           <c:val>
             <c:numRef>
@@ -899,43 +895,43 @@
                 <c:formatCode>General</c:formatCode>
                 <c:ptCount val="13"/>
                 <c:pt idx="0">
-                  <c:v>24.2</c:v>
+                  <c:v>30.8</c:v>
                 </c:pt>
                 <c:pt idx="1">
-                  <c:v>24.2</c:v>
+                  <c:v>30.8</c:v>
                 </c:pt>
                 <c:pt idx="2">
-                  <c:v>24.2</c:v>
+                  <c:v>30.8</c:v>
                 </c:pt>
                 <c:pt idx="3">
-                  <c:v>24.2</c:v>
+                  <c:v>30.8</c:v>
                 </c:pt>
                 <c:pt idx="4">
-                  <c:v>24.2</c:v>
+                  <c:v>30.8</c:v>
                 </c:pt>
                 <c:pt idx="5">
-                  <c:v>24.2</c:v>
+                  <c:v>41.2</c:v>
                 </c:pt>
                 <c:pt idx="6">
-                  <c:v>24.2</c:v>
+                  <c:v>41.2</c:v>
                 </c:pt>
                 <c:pt idx="7">
-                  <c:v>24.2</c:v>
+                  <c:v>41.2</c:v>
                 </c:pt>
                 <c:pt idx="8">
-                  <c:v>24.2</c:v>
+                  <c:v>41.2</c:v>
                 </c:pt>
                 <c:pt idx="9">
-                  <c:v>24.2</c:v>
+                  <c:v>56.7</c:v>
                 </c:pt>
                 <c:pt idx="10">
-                  <c:v>24.2</c:v>
+                  <c:v>56.7</c:v>
                 </c:pt>
                 <c:pt idx="11">
-                  <c:v>24.2</c:v>
+                  <c:v>56.7</c:v>
                 </c:pt>
                 <c:pt idx="12">
-                  <c:v>31.3</c:v>
+                  <c:v>56.7</c:v>
                 </c:pt>
               </c:numCache>
             </c:numRef>
@@ -1012,53 +1008,51 @@
             </c:spPr>
           </c:marker>
           <c:cat>
-            <c:multiLvlStrRef>
+            <c:strRef>
               <c:f>Sheet1!$A$2:$A$14</c:f>
-              <c:multiLvlStrCache>
+              <c:strCache>
                 <c:ptCount val="13"/>
-                <c:lvl>
-                  <c:pt idx="0">
-                    <c:v>40</c:v>
-                  </c:pt>
-                  <c:pt idx="1">
-                    <c:v>41</c:v>
-                  </c:pt>
-                  <c:pt idx="2">
-                    <c:v>42</c:v>
-                  </c:pt>
-                  <c:pt idx="3">
-                    <c:v>43</c:v>
-                  </c:pt>
-                  <c:pt idx="4">
-                    <c:v>44</c:v>
-                  </c:pt>
-                  <c:pt idx="5">
-                    <c:v>45</c:v>
-                  </c:pt>
-                  <c:pt idx="6">
-                    <c:v>46</c:v>
-                  </c:pt>
-                  <c:pt idx="7">
-                    <c:v>47</c:v>
-                  </c:pt>
-                  <c:pt idx="8">
-                    <c:v>48</c:v>
-                  </c:pt>
-                  <c:pt idx="9">
-                    <c:v>49</c:v>
-                  </c:pt>
-                  <c:pt idx="10">
-                    <c:v>50</c:v>
-                  </c:pt>
-                  <c:pt idx="11">
-                    <c:v>51</c:v>
-                  </c:pt>
-                  <c:pt idx="12">
-                    <c:v>52</c:v>
-                  </c:pt>
-                </c:lvl>
-              </c:multiLvlStrCache>
-            </c:multiLvlStrRef>
+                <c:pt idx="0">
+                  <c:v>40</c:v>
+                </c:pt>
+                <c:pt idx="1">
+                  <c:v>41</c:v>
+                </c:pt>
+                <c:pt idx="2">
+                  <c:v>42</c:v>
+                </c:pt>
+                <c:pt idx="3">
+                  <c:v>43</c:v>
+                </c:pt>
+                <c:pt idx="4">
+                  <c:v>44</c:v>
+                </c:pt>
+                <c:pt idx="5">
+                  <c:v>45</c:v>
+                </c:pt>
+                <c:pt idx="6">
+                  <c:v>46</c:v>
+                </c:pt>
+                <c:pt idx="7">
+                  <c:v>47</c:v>
+                </c:pt>
+                <c:pt idx="8">
+                  <c:v>48</c:v>
+                </c:pt>
+                <c:pt idx="9">
+                  <c:v>49</c:v>
+                </c:pt>
+                <c:pt idx="10">
+                  <c:v>50</c:v>
+                </c:pt>
+                <c:pt idx="11">
+                  <c:v>51</c:v>
+                </c:pt>
+                <c:pt idx="12">
+                  <c:v>52</c:v>
+                </c:pt>
+              </c:strCache>
+            </c:strRef>
           </c:cat>
           <c:val>
             <c:numRef>
@@ -1067,43 +1061,43 @@
                 <c:formatCode>General</c:formatCode>
                 <c:ptCount val="13"/>
                 <c:pt idx="0">
-                  <c:v>336</c:v>
+                  <c:v>336.0</c:v>
                 </c:pt>
                 <c:pt idx="1">
-                  <c:v>336</c:v>
+                  <c:v>336.0</c:v>
                 </c:pt>
                 <c:pt idx="2">
-                  <c:v>336</c:v>
+                  <c:v>336.0</c:v>
                 </c:pt>
                 <c:pt idx="3">
-                  <c:v>336</c:v>
+                  <c:v>336.0</c:v>
                 </c:pt>
                 <c:pt idx="4">
-                  <c:v>336</c:v>
+                  <c:v>336.0</c:v>
                 </c:pt>
                 <c:pt idx="5">
-                  <c:v>336</c:v>
+                  <c:v>336.0</c:v>
                 </c:pt>
                 <c:pt idx="6">
-                  <c:v>336</c:v>
+                  <c:v>336.0</c:v>
                 </c:pt>
                 <c:pt idx="7">
-                  <c:v>336</c:v>
+                  <c:v>336.0</c:v>
                 </c:pt>
                 <c:pt idx="8">
-                  <c:v>336</c:v>
+                  <c:v>336.0</c:v>
                 </c:pt>
                 <c:pt idx="9">
-                  <c:v>336</c:v>
+                  <c:v>336.0</c:v>
                 </c:pt>
                 <c:pt idx="10">
-                  <c:v>336</c:v>
+                  <c:v>336.0</c:v>
                 </c:pt>
                 <c:pt idx="11">
-                  <c:v>336</c:v>
+                  <c:v>336.0</c:v>
                 </c:pt>
                 <c:pt idx="12">
-                  <c:v>336</c:v>
+                  <c:v>336.0</c:v>
                 </c:pt>
               </c:numCache>
             </c:numRef>
@@ -5014,7 +5008,7 @@
                 <a:ea typeface="Calibri" pitchFamily="34" charset="-122"/>
                 <a:cs typeface="Calibri" pitchFamily="34" charset="-120"/>
               </a:rPr>
-              <a:t>Same 100,000 patients, same contract — 336h capped without the deployment, ~24–31h with it.</a:t>
+              <a:t>Same 100,000 patients, same contract — 336h capped without the deployment, 31h climbing to 57h with it. Triage buys a quarter, not headcount.</a:t>
             </a:r>
             <a:endParaRPr lang="en-US" sz="1250" dirty="0"/>
           </a:p>
@@ -12901,7 +12895,7 @@
                           <a:ea typeface="Calibri" pitchFamily="34" charset="-122"/>
                           <a:cs typeface="Calibri" pitchFamily="34" charset="-120"/>
                         </a:rPr>
-                        <a:t>25.0</a:t>
+                        <a:t>25</a:t>
                       </a:r>
                       <a:endParaRPr lang="en-US" sz="1300" dirty="0">
                         <a:latin typeface="Calibri" charset="0"/>
@@ -12969,7 +12963,7 @@
                           <a:ea typeface="Calibri" pitchFamily="34" charset="-122"/>
                           <a:cs typeface="Calibri" pitchFamily="34" charset="-120"/>
                         </a:rPr>
-                        <a:t>22.9</a:t>
+                        <a:t>22</a:t>
                       </a:r>
                       <a:endParaRPr lang="en-US" sz="1300" dirty="0">
                         <a:latin typeface="Calibri" charset="0"/>
@@ -13793,7 +13787,7 @@
                           <a:ea typeface="Calibri" pitchFamily="34" charset="-122"/>
                           <a:cs typeface="Calibri" pitchFamily="34" charset="-120"/>
                         </a:rPr>
-                        <a:t>29.7h</a:t>
+                        <a:t>31.1h</a:t>
                       </a:r>
                       <a:endParaRPr lang="en-US" sz="1300" dirty="0">
                         <a:latin typeface="Calibri" charset="0"/>
@@ -13999,7 +13993,7 @@
                           <a:ea typeface="Calibri" pitchFamily="34" charset="-122"/>
                           <a:cs typeface="Calibri" pitchFamily="34" charset="-120"/>
                         </a:rPr>
-                        <a:t>1,154</a:t>
+                        <a:t>1,151</a:t>
                       </a:r>
                       <a:endParaRPr lang="en-US" sz="1300" dirty="0">
                         <a:latin typeface="Calibri" charset="0"/>
@@ -14205,7 +14199,7 @@
                           <a:ea typeface="Calibri" pitchFamily="34" charset="-122"/>
                           <a:cs typeface="Calibri" pitchFamily="34" charset="-120"/>
                         </a:rPr>
-                        <a:t>2</a:t>
+                        <a:t>3</a:t>
                       </a:r>
                       <a:endParaRPr lang="en-US" sz="1300" dirty="0">
                         <a:latin typeface="Calibri" charset="0"/>
@@ -14411,7 +14405,7 @@
                           <a:ea typeface="Calibri" pitchFamily="34" charset="-122"/>
                           <a:cs typeface="Calibri" pitchFamily="34" charset="-120"/>
                         </a:rPr>
-                        <a:t>334</a:t>
+                        <a:t>340</a:t>
                       </a:r>
                       <a:endParaRPr lang="en-US" sz="1300" dirty="0">
                         <a:latin typeface="Calibri" charset="0"/>
@@ -20521,7 +20515,7 @@
                 <a:ea typeface="Calibri" pitchFamily="34" charset="-122"/>
                 <a:cs typeface="Calibri" pitchFamily="34" charset="-120"/>
               </a:rPr>
-              <a:t>Median nurse response: 29.7h → 4.0h — but 90.0 urgent cases a week are now missed.</a:t>
+              <a:t>Median nurse response: 31.1h → 4.0h — but 90.0 urgent cases a week are now missed.</a:t>
             </a:r>
             <a:endParaRPr lang="en-US" sz="1250" dirty="0"/>
           </a:p>

--- a/slides/deck.pptx
+++ b/slides/deck.pptx
@@ -5,6 +5,7 @@
     <p:sldMasterId id="2147483648" r:id="rId1"/>
   </p:sldMasterIdLst>
   <p:sldIdLst>
+    <p:sldId id="270" r:id="rId21"/>
     <p:sldId id="256" r:id="rId2"/>
     <p:sldId id="257" r:id="rId3"/>
     <p:sldId id="258" r:id="rId4"/>
@@ -3311,6 +3312,10 @@
             <a:prstDash val="solid"/>
           </a:ln>
         </p:spPr>
+        <p:txBody>
+          <a:bodyPr/>
+          <a:p/>
+        </p:txBody>
       </p:sp>
       <p:sp>
         <p:nvSpPr>
@@ -3416,6 +3421,10 @@
             <a:prstDash val="solid"/>
           </a:ln>
         </p:spPr>
+        <p:txBody>
+          <a:bodyPr/>
+          <a:p/>
+        </p:txBody>
       </p:sp>
       <p:sp>
         <p:nvSpPr>
@@ -3521,6 +3530,10 @@
             <a:prstDash val="solid"/>
           </a:ln>
         </p:spPr>
+        <p:txBody>
+          <a:bodyPr/>
+          <a:p/>
+        </p:txBody>
       </p:sp>
       <p:sp>
         <p:nvSpPr>
@@ -4843,7 +4856,7 @@
                 <a:ea typeface="Calibri" pitchFamily="34" charset="-122"/>
                 <a:cs typeface="Calibri" pitchFamily="34" charset="-120"/>
               </a:rPr>
-              <a:t>Northline Care  ·  10</a:t>
+              <a:t>Northline Care  ·  11</a:t>
             </a:r>
             <a:endParaRPr lang="en-US" sz="1000" dirty="0"/>
           </a:p>
@@ -5086,7 +5099,7 @@
                 <a:ea typeface="Calibri" pitchFamily="34" charset="-122"/>
                 <a:cs typeface="Calibri" pitchFamily="34" charset="-120"/>
               </a:rPr>
-              <a:t>Northline Care  ·  11</a:t>
+              <a:t>Northline Care  ·  12</a:t>
             </a:r>
             <a:endParaRPr lang="en-US" sz="1000" dirty="0"/>
           </a:p>
@@ -7326,7 +7339,7 @@
                 <a:ea typeface="Calibri" pitchFamily="34" charset="-122"/>
                 <a:cs typeface="Calibri" pitchFamily="34" charset="-120"/>
               </a:rPr>
-              <a:t>Northline Care  ·  12</a:t>
+              <a:t>Northline Care  ·  13</a:t>
             </a:r>
             <a:endParaRPr lang="en-US" sz="1000" dirty="0"/>
           </a:p>
@@ -7461,6 +7474,10 @@
           </a:solidFill>
           <a:ln/>
         </p:spPr>
+        <p:txBody>
+          <a:bodyPr/>
+          <a:p/>
+        </p:txBody>
       </p:sp>
       <p:sp>
         <p:nvSpPr>
@@ -7576,7 +7593,7 @@
                 <a:ea typeface="Calibri" pitchFamily="34" charset="-122"/>
                 <a:cs typeface="Calibri" pitchFamily="34" charset="-120"/>
               </a:rPr>
-              <a:t>Northline Care  ·  13</a:t>
+              <a:t>Northline Care  ·  14</a:t>
             </a:r>
             <a:endParaRPr lang="en-US" sz="1000" dirty="0"/>
           </a:p>
@@ -7713,6 +7730,10 @@
           </a:solidFill>
           <a:ln/>
         </p:spPr>
+        <p:txBody>
+          <a:bodyPr/>
+          <a:p/>
+        </p:txBody>
       </p:sp>
       <p:sp>
         <p:nvSpPr>
@@ -7854,6 +7875,10 @@
             <a:tailEnd type="triangle"/>
           </a:ln>
         </p:spPr>
+        <p:txBody>
+          <a:bodyPr/>
+          <a:p/>
+        </p:txBody>
       </p:sp>
       <p:sp>
         <p:nvSpPr>
@@ -7876,6 +7901,10 @@
           </a:solidFill>
           <a:ln/>
         </p:spPr>
+        <p:txBody>
+          <a:bodyPr/>
+          <a:p/>
+        </p:txBody>
       </p:sp>
       <p:sp>
         <p:nvSpPr>
@@ -8017,6 +8046,10 @@
             <a:tailEnd type="triangle"/>
           </a:ln>
         </p:spPr>
+        <p:txBody>
+          <a:bodyPr/>
+          <a:p/>
+        </p:txBody>
       </p:sp>
       <p:sp>
         <p:nvSpPr>
@@ -8039,6 +8072,10 @@
           </a:solidFill>
           <a:ln/>
         </p:spPr>
+        <p:txBody>
+          <a:bodyPr/>
+          <a:p/>
+        </p:txBody>
       </p:sp>
       <p:sp>
         <p:nvSpPr>
@@ -8180,6 +8217,10 @@
             <a:tailEnd type="triangle"/>
           </a:ln>
         </p:spPr>
+        <p:txBody>
+          <a:bodyPr/>
+          <a:p/>
+        </p:txBody>
       </p:sp>
       <p:sp>
         <p:nvSpPr>
@@ -8202,6 +8243,10 @@
           </a:solidFill>
           <a:ln/>
         </p:spPr>
+        <p:txBody>
+          <a:bodyPr/>
+          <a:p/>
+        </p:txBody>
       </p:sp>
       <p:sp>
         <p:nvSpPr>
@@ -8346,6 +8391,10 @@
             <a:prstDash val="solid"/>
           </a:ln>
         </p:spPr>
+        <p:txBody>
+          <a:bodyPr/>
+          <a:p/>
+        </p:txBody>
       </p:sp>
       <p:sp>
         <p:nvSpPr>
@@ -8419,9 +8468,1138 @@
                 <a:ea typeface="Calibri" pitchFamily="34" charset="-122"/>
                 <a:cs typeface="Calibri" pitchFamily="34" charset="-120"/>
               </a:rPr>
-              <a:t>Northline Care  ·  14</a:t>
+              <a:t>Northline Care  ·  15</a:t>
             </a:r>
             <a:endParaRPr lang="en-US" sz="1000" dirty="0"/>
+          </a:p>
+        </p:txBody>
+      </p:sp>
+    </p:spTree>
+  </p:cSld>
+  <p:clrMapOvr>
+    <a:masterClrMapping/>
+  </p:clrMapOvr>
+</p:sld>
+</file>
+
+<file path=ppt/slides/slide15.xml><?xml version="1.0" encoding="utf-8"?>
+<p:sld xmlns:a="http://schemas.openxmlformats.org/drawingml/2006/main" xmlns:p="http://schemas.openxmlformats.org/presentationml/2006/main" xmlns:r="http://schemas.openxmlformats.org/officeDocument/2006/relationships">
+  <p:cSld>
+    <p:bg>
+      <p:bgPr>
+        <a:solidFill>
+          <a:srgbClr val="FFFFFF"/>
+        </a:solidFill>
+        <a:effectLst/>
+      </p:bgPr>
+    </p:bg>
+    <p:spTree>
+      <p:nvGrpSpPr>
+        <p:cNvPr id="1" name=""/>
+        <p:cNvGrpSpPr/>
+        <p:nvPr/>
+      </p:nvGrpSpPr>
+      <p:grpSpPr/>
+      <p:sp>
+        <p:nvSpPr>
+          <p:cNvPr id="2" name="TextBox 1"/>
+          <p:cNvSpPr txBox="1"/>
+          <p:nvPr/>
+        </p:nvSpPr>
+        <p:spPr>
+          <a:xfrm>
+            <a:off x="548640" y="164592"/>
+            <a:ext cx="11094415" cy="274320"/>
+          </a:xfrm>
+          <a:prstGeom prst="rect">
+            <a:avLst/>
+          </a:prstGeom>
+          <a:noFill/>
+        </p:spPr>
+        <p:txBody>
+          <a:bodyPr wrap="square" lIns="0" rIns="0" tIns="0" bIns="0">
+            <a:spAutoFit/>
+          </a:bodyPr>
+          <a:lstStyle/>
+          <a:p>
+            <a:r>
+              <a:rPr sz="1200" b="1">
+                <a:solidFill>
+                  <a:srgbClr val="1C7293"/>
+                </a:solidFill>
+                <a:latin typeface="Calibri"/>
+              </a:rPr>
+              <a:t>BEFORE WE START  ·  ABOUT 10 MINUTES</a:t>
+            </a:r>
+          </a:p>
+        </p:txBody>
+      </p:sp>
+      <p:sp>
+        <p:nvSpPr>
+          <p:cNvPr id="3" name="TextBox 2"/>
+          <p:cNvSpPr txBox="1"/>
+          <p:nvPr/>
+        </p:nvSpPr>
+        <p:spPr>
+          <a:xfrm>
+            <a:off x="548640" y="411480"/>
+            <a:ext cx="11094415" cy="822960"/>
+          </a:xfrm>
+          <a:prstGeom prst="rect">
+            <a:avLst/>
+          </a:prstGeom>
+          <a:noFill/>
+        </p:spPr>
+        <p:txBody>
+          <a:bodyPr wrap="square" lIns="0" rIns="0" tIns="0" bIns="0">
+            <a:spAutoFit/>
+          </a:bodyPr>
+          <a:lstStyle/>
+          <a:p>
+            <a:r>
+              <a:rPr sz="3200" b="1">
+                <a:solidFill>
+                  <a:srgbClr val="1B1F27"/>
+                </a:solidFill>
+                <a:latin typeface="Cambria"/>
+              </a:rPr>
+              <a:t>Get set up</a:t>
+            </a:r>
+          </a:p>
+        </p:txBody>
+      </p:sp>
+      <p:sp>
+        <p:nvSpPr>
+          <p:cNvPr id="4" name="Rounded Rectangle 3"/>
+          <p:cNvSpPr/>
+          <p:nvPr/>
+        </p:nvSpPr>
+        <p:spPr>
+          <a:xfrm>
+            <a:off x="548640" y="1417320"/>
+            <a:ext cx="5318608" cy="1783080"/>
+          </a:xfrm>
+          <a:prstGeom prst="roundRect">
+            <a:avLst>
+              <a:gd name="adj" fmla="val 3400"/>
+            </a:avLst>
+          </a:prstGeom>
+          <a:solidFill>
+            <a:srgbClr val="F4F7FA"/>
+          </a:solidFill>
+          <a:ln w="9525">
+            <a:solidFill>
+              <a:srgbClr val="D8E1EA"/>
+            </a:solidFill>
+          </a:ln>
+          <a:effectLst/>
+        </p:spPr>
+        <p:style>
+          <a:lnRef idx="1">
+            <a:schemeClr val="accent1"/>
+          </a:lnRef>
+          <a:fillRef idx="3">
+            <a:schemeClr val="accent1"/>
+          </a:fillRef>
+          <a:effectRef idx="2">
+            <a:schemeClr val="accent1"/>
+          </a:effectRef>
+          <a:fontRef idx="minor">
+            <a:schemeClr val="lt1"/>
+          </a:fontRef>
+        </p:style>
+        <p:txBody>
+          <a:bodyPr rtlCol="0" anchor="ctr"/>
+          <a:lstStyle/>
+          <a:p>
+            <a:pPr algn="ctr"/>
+          </a:p>
+        </p:txBody>
+      </p:sp>
+      <p:sp>
+        <p:nvSpPr>
+          <p:cNvPr id="5" name="TextBox 4"/>
+          <p:cNvSpPr txBox="1"/>
+          <p:nvPr/>
+        </p:nvSpPr>
+        <p:spPr>
+          <a:xfrm>
+            <a:off x="822960" y="1618488"/>
+            <a:ext cx="4769968" cy="365760"/>
+          </a:xfrm>
+          <a:prstGeom prst="rect">
+            <a:avLst/>
+          </a:prstGeom>
+          <a:noFill/>
+        </p:spPr>
+        <p:txBody>
+          <a:bodyPr wrap="square" lIns="0" rIns="0" tIns="0" bIns="0">
+            <a:spAutoFit/>
+          </a:bodyPr>
+          <a:lstStyle/>
+          <a:p>
+            <a:r>
+              <a:rPr sz="1700" b="1">
+                <a:solidFill>
+                  <a:srgbClr val="21295C"/>
+                </a:solidFill>
+                <a:latin typeface="Cambria"/>
+              </a:rPr>
+              <a:t>1. Claude Code, signed in</a:t>
+            </a:r>
+          </a:p>
+        </p:txBody>
+      </p:sp>
+      <p:sp>
+        <p:nvSpPr>
+          <p:cNvPr id="6" name="TextBox 5"/>
+          <p:cNvSpPr txBox="1"/>
+          <p:nvPr/>
+        </p:nvSpPr>
+        <p:spPr>
+          <a:xfrm>
+            <a:off x="822960" y="2029968"/>
+            <a:ext cx="4769968" cy="1078992"/>
+          </a:xfrm>
+          <a:prstGeom prst="rect">
+            <a:avLst/>
+          </a:prstGeom>
+          <a:noFill/>
+        </p:spPr>
+        <p:txBody>
+          <a:bodyPr wrap="square" lIns="0" rIns="0" tIns="0" bIns="0">
+            <a:spAutoFit/>
+          </a:bodyPr>
+          <a:lstStyle/>
+          <a:p>
+            <a:pPr>
+              <a:spcAft>
+                <a:spcPts val="600"/>
+              </a:spcAft>
+            </a:pPr>
+            <a:r>
+              <a:rPr sz="1200">
+                <a:solidFill>
+                  <a:srgbClr val="5B6472"/>
+                </a:solidFill>
+                <a:latin typeface="Calibri"/>
+              </a:rPr>
+              <a:t>Install the command-line tool and sign in with your Claude account. In a terminal, </a:t>
+            </a:r>
+            <a:r>
+              <a:rPr sz="1200" b="1">
+                <a:solidFill>
+                  <a:srgbClr val="1C7293"/>
+                </a:solidFill>
+                <a:latin typeface="Consolas"/>
+              </a:rPr>
+              <a:t>claude --version</a:t>
+            </a:r>
+            <a:r>
+              <a:rPr sz="1200">
+                <a:solidFill>
+                  <a:srgbClr val="5B6472"/>
+                </a:solidFill>
+                <a:latin typeface="Calibri"/>
+              </a:rPr>
+              <a:t> should print a version.</a:t>
+            </a:r>
+          </a:p>
+          <a:p>
+            <a:pPr>
+              <a:spcAft>
+                <a:spcPts val="600"/>
+              </a:spcAft>
+            </a:pPr>
+            <a:r>
+              <a:rPr sz="1200">
+                <a:solidFill>
+                  <a:srgbClr val="5B6472"/>
+                </a:solidFill>
+                <a:latin typeface="Calibri"/>
+              </a:rPr>
+              <a:t>Windows: use the native installer, not npm. Use PowerShell for the commands below.</a:t>
+            </a:r>
+          </a:p>
+        </p:txBody>
+      </p:sp>
+      <p:sp>
+        <p:nvSpPr>
+          <p:cNvPr id="7" name="Rounded Rectangle 6"/>
+          <p:cNvSpPr/>
+          <p:nvPr/>
+        </p:nvSpPr>
+        <p:spPr>
+          <a:xfrm>
+            <a:off x="6324448" y="1417320"/>
+            <a:ext cx="5318608" cy="1783080"/>
+          </a:xfrm>
+          <a:prstGeom prst="roundRect">
+            <a:avLst>
+              <a:gd name="adj" fmla="val 3400"/>
+            </a:avLst>
+          </a:prstGeom>
+          <a:solidFill>
+            <a:srgbClr val="F4F7FA"/>
+          </a:solidFill>
+          <a:ln w="9525">
+            <a:solidFill>
+              <a:srgbClr val="D8E1EA"/>
+            </a:solidFill>
+          </a:ln>
+          <a:effectLst/>
+        </p:spPr>
+        <p:style>
+          <a:lnRef idx="1">
+            <a:schemeClr val="accent1"/>
+          </a:lnRef>
+          <a:fillRef idx="3">
+            <a:schemeClr val="accent1"/>
+          </a:fillRef>
+          <a:effectRef idx="2">
+            <a:schemeClr val="accent1"/>
+          </a:effectRef>
+          <a:fontRef idx="minor">
+            <a:schemeClr val="lt1"/>
+          </a:fontRef>
+        </p:style>
+        <p:txBody>
+          <a:bodyPr rtlCol="0" anchor="ctr"/>
+          <a:lstStyle/>
+          <a:p>
+            <a:pPr algn="ctr"/>
+          </a:p>
+        </p:txBody>
+      </p:sp>
+      <p:sp>
+        <p:nvSpPr>
+          <p:cNvPr id="8" name="TextBox 7"/>
+          <p:cNvSpPr txBox="1"/>
+          <p:nvPr/>
+        </p:nvSpPr>
+        <p:spPr>
+          <a:xfrm>
+            <a:off x="6598768" y="1618488"/>
+            <a:ext cx="4769968" cy="365760"/>
+          </a:xfrm>
+          <a:prstGeom prst="rect">
+            <a:avLst/>
+          </a:prstGeom>
+          <a:noFill/>
+        </p:spPr>
+        <p:txBody>
+          <a:bodyPr wrap="square" lIns="0" rIns="0" tIns="0" bIns="0">
+            <a:spAutoFit/>
+          </a:bodyPr>
+          <a:lstStyle/>
+          <a:p>
+            <a:r>
+              <a:rPr sz="1700" b="1">
+                <a:solidFill>
+                  <a:srgbClr val="21295C"/>
+                </a:solidFill>
+                <a:latin typeface="Cambria"/>
+              </a:rPr>
+              <a:t>2. The course folder</a:t>
+            </a:r>
+          </a:p>
+        </p:txBody>
+      </p:sp>
+      <p:sp>
+        <p:nvSpPr>
+          <p:cNvPr id="9" name="TextBox 8"/>
+          <p:cNvSpPr txBox="1"/>
+          <p:nvPr/>
+        </p:nvSpPr>
+        <p:spPr>
+          <a:xfrm>
+            <a:off x="6598768" y="2029968"/>
+            <a:ext cx="4769968" cy="1078992"/>
+          </a:xfrm>
+          <a:prstGeom prst="rect">
+            <a:avLst/>
+          </a:prstGeom>
+          <a:noFill/>
+        </p:spPr>
+        <p:txBody>
+          <a:bodyPr wrap="square" lIns="0" rIns="0" tIns="0" bIns="0">
+            <a:spAutoFit/>
+          </a:bodyPr>
+          <a:lstStyle/>
+          <a:p>
+            <a:pPr>
+              <a:spcAft>
+                <a:spcPts val="600"/>
+              </a:spcAft>
+            </a:pPr>
+            <a:r>
+              <a:rPr sz="1200">
+                <a:solidFill>
+                  <a:srgbClr val="5B6472"/>
+                </a:solidFill>
+                <a:latin typeface="Calibri"/>
+              </a:rPr>
+              <a:t>Open the link at the bottom, click </a:t>
+            </a:r>
+            <a:r>
+              <a:rPr sz="1200" b="1">
+                <a:solidFill>
+                  <a:srgbClr val="5B6472"/>
+                </a:solidFill>
+                <a:latin typeface="Calibri"/>
+              </a:rPr>
+              <a:t>Code → Download ZIP</a:t>
+            </a:r>
+            <a:r>
+              <a:rPr sz="1200">
+                <a:solidFill>
+                  <a:srgbClr val="5B6472"/>
+                </a:solidFill>
+                <a:latin typeface="Calibri"/>
+              </a:rPr>
+              <a:t>, and unzip it into your home folder. It should be called </a:t>
+            </a:r>
+            <a:r>
+              <a:rPr sz="1200" b="1">
+                <a:solidFill>
+                  <a:srgbClr val="1C7293"/>
+                </a:solidFill>
+                <a:latin typeface="Consolas"/>
+              </a:rPr>
+              <a:t>northline-course</a:t>
+            </a:r>
+            <a:r>
+              <a:rPr sz="1200">
+                <a:solidFill>
+                  <a:srgbClr val="5B6472"/>
+                </a:solidFill>
+                <a:latin typeface="Calibri"/>
+              </a:rPr>
+              <a:t>.</a:t>
+            </a:r>
+          </a:p>
+          <a:p>
+            <a:pPr>
+              <a:spcAft>
+                <a:spcPts val="600"/>
+              </a:spcAft>
+            </a:pPr>
+            <a:r>
+              <a:rPr sz="1200">
+                <a:solidFill>
+                  <a:srgbClr val="5B6472"/>
+                </a:solidFill>
+                <a:latin typeface="Calibri"/>
+              </a:rPr>
+              <a:t>Or, if you have git: </a:t>
+            </a:r>
+            <a:r>
+              <a:rPr sz="1200" b="1">
+                <a:solidFill>
+                  <a:srgbClr val="1C7293"/>
+                </a:solidFill>
+                <a:latin typeface="Consolas"/>
+              </a:rPr>
+              <a:t>git clone &lt;the link&gt;</a:t>
+            </a:r>
+          </a:p>
+        </p:txBody>
+      </p:sp>
+      <p:sp>
+        <p:nvSpPr>
+          <p:cNvPr id="10" name="Rounded Rectangle 9"/>
+          <p:cNvSpPr/>
+          <p:nvPr/>
+        </p:nvSpPr>
+        <p:spPr>
+          <a:xfrm>
+            <a:off x="548640" y="3429000"/>
+            <a:ext cx="5318608" cy="1783080"/>
+          </a:xfrm>
+          <a:prstGeom prst="roundRect">
+            <a:avLst>
+              <a:gd name="adj" fmla="val 3400"/>
+            </a:avLst>
+          </a:prstGeom>
+          <a:solidFill>
+            <a:srgbClr val="F4F7FA"/>
+          </a:solidFill>
+          <a:ln w="9525">
+            <a:solidFill>
+              <a:srgbClr val="D8E1EA"/>
+            </a:solidFill>
+          </a:ln>
+          <a:effectLst/>
+        </p:spPr>
+        <p:style>
+          <a:lnRef idx="1">
+            <a:schemeClr val="accent1"/>
+          </a:lnRef>
+          <a:fillRef idx="3">
+            <a:schemeClr val="accent1"/>
+          </a:fillRef>
+          <a:effectRef idx="2">
+            <a:schemeClr val="accent1"/>
+          </a:effectRef>
+          <a:fontRef idx="minor">
+            <a:schemeClr val="lt1"/>
+          </a:fontRef>
+        </p:style>
+        <p:txBody>
+          <a:bodyPr rtlCol="0" anchor="ctr"/>
+          <a:lstStyle/>
+          <a:p>
+            <a:pPr algn="ctr"/>
+          </a:p>
+        </p:txBody>
+      </p:sp>
+      <p:sp>
+        <p:nvSpPr>
+          <p:cNvPr id="11" name="TextBox 10"/>
+          <p:cNvSpPr txBox="1"/>
+          <p:nvPr/>
+        </p:nvSpPr>
+        <p:spPr>
+          <a:xfrm>
+            <a:off x="822960" y="3630168"/>
+            <a:ext cx="4769968" cy="365760"/>
+          </a:xfrm>
+          <a:prstGeom prst="rect">
+            <a:avLst/>
+          </a:prstGeom>
+          <a:noFill/>
+        </p:spPr>
+        <p:txBody>
+          <a:bodyPr wrap="square" lIns="0" rIns="0" tIns="0" bIns="0">
+            <a:spAutoFit/>
+          </a:bodyPr>
+          <a:lstStyle/>
+          <a:p>
+            <a:r>
+              <a:rPr sz="1700" b="1">
+                <a:solidFill>
+                  <a:srgbClr val="21295C"/>
+                </a:solidFill>
+                <a:latin typeface="Cambria"/>
+              </a:rPr>
+              <a:t>3. /setup</a:t>
+            </a:r>
+          </a:p>
+        </p:txBody>
+      </p:sp>
+      <p:sp>
+        <p:nvSpPr>
+          <p:cNvPr id="12" name="TextBox 11"/>
+          <p:cNvSpPr txBox="1"/>
+          <p:nvPr/>
+        </p:nvSpPr>
+        <p:spPr>
+          <a:xfrm>
+            <a:off x="822960" y="4041648"/>
+            <a:ext cx="4769968" cy="1078992"/>
+          </a:xfrm>
+          <a:prstGeom prst="rect">
+            <a:avLst/>
+          </a:prstGeom>
+          <a:noFill/>
+        </p:spPr>
+        <p:txBody>
+          <a:bodyPr wrap="square" lIns="0" rIns="0" tIns="0" bIns="0">
+            <a:spAutoFit/>
+          </a:bodyPr>
+          <a:lstStyle/>
+          <a:p>
+            <a:pPr>
+              <a:spcAft>
+                <a:spcPts val="600"/>
+              </a:spcAft>
+            </a:pPr>
+            <a:r>
+              <a:rPr sz="1200">
+                <a:solidFill>
+                  <a:srgbClr val="5B6472"/>
+                </a:solidFill>
+                <a:latin typeface="Calibri"/>
+              </a:rPr>
+              <a:t>Terminal: </a:t>
+            </a:r>
+            <a:r>
+              <a:rPr sz="1200" b="1">
+                <a:solidFill>
+                  <a:srgbClr val="1C7293"/>
+                </a:solidFill>
+                <a:latin typeface="Consolas"/>
+              </a:rPr>
+              <a:t>cd ~/northline-course</a:t>
+            </a:r>
+            <a:r>
+              <a:rPr sz="1200">
+                <a:solidFill>
+                  <a:srgbClr val="5B6472"/>
+                </a:solidFill>
+                <a:latin typeface="Calibri"/>
+              </a:rPr>
+              <a:t> then </a:t>
+            </a:r>
+            <a:r>
+              <a:rPr sz="1200" b="1">
+                <a:solidFill>
+                  <a:srgbClr val="1C7293"/>
+                </a:solidFill>
+                <a:latin typeface="Consolas"/>
+              </a:rPr>
+              <a:t>claude</a:t>
+            </a:r>
+            <a:r>
+              <a:rPr sz="1200">
+                <a:solidFill>
+                  <a:srgbClr val="5B6472"/>
+                </a:solidFill>
+                <a:latin typeface="Calibri"/>
+              </a:rPr>
+              <a:t>. Type </a:t>
+            </a:r>
+            <a:r>
+              <a:rPr sz="1200" b="1">
+                <a:solidFill>
+                  <a:srgbClr val="1C7293"/>
+                </a:solidFill>
+                <a:latin typeface="Consolas"/>
+              </a:rPr>
+              <a:t>/setup</a:t>
+            </a:r>
+            <a:r>
+              <a:rPr sz="1200">
+                <a:solidFill>
+                  <a:srgbClr val="5B6472"/>
+                </a:solidFill>
+                <a:latin typeface="Calibri"/>
+              </a:rPr>
+              <a:t>. It installs uv, runs the checks, and prints a </a:t>
+            </a:r>
+            <a:r>
+              <a:rPr sz="1200" b="1">
+                <a:solidFill>
+                  <a:srgbClr val="1C7293"/>
+                </a:solidFill>
+                <a:latin typeface="Consolas"/>
+              </a:rPr>
+              <a:t>READY:</a:t>
+            </a:r>
+            <a:r>
+              <a:rPr sz="1200">
+                <a:solidFill>
+                  <a:srgbClr val="5B6472"/>
+                </a:solidFill>
+                <a:latin typeface="Calibri"/>
+              </a:rPr>
+              <a:t> line.</a:t>
+            </a:r>
+          </a:p>
+          <a:p>
+            <a:pPr>
+              <a:spcAft>
+                <a:spcPts val="600"/>
+              </a:spcAft>
+            </a:pPr>
+            <a:r>
+              <a:rPr sz="1200">
+                <a:solidFill>
+                  <a:srgbClr val="5B6472"/>
+                </a:solidFill>
+                <a:latin typeface="Calibri"/>
+              </a:rPr>
+              <a:t>Then quit, run </a:t>
+            </a:r>
+            <a:r>
+              <a:rPr sz="1200" b="1">
+                <a:solidFill>
+                  <a:srgbClr val="1C7293"/>
+                </a:solidFill>
+                <a:latin typeface="Consolas"/>
+              </a:rPr>
+              <a:t>claude</a:t>
+            </a:r>
+            <a:r>
+              <a:rPr sz="1200">
+                <a:solidFill>
+                  <a:srgbClr val="5B6472"/>
+                </a:solidFill>
+                <a:latin typeface="Calibri"/>
+              </a:rPr>
+              <a:t> again in the same folder, and approve the </a:t>
+            </a:r>
+            <a:r>
+              <a:rPr sz="1200" b="1">
+                <a:solidFill>
+                  <a:srgbClr val="1C7293"/>
+                </a:solidFill>
+                <a:latin typeface="Consolas"/>
+              </a:rPr>
+              <a:t>northline</a:t>
+            </a:r>
+            <a:r>
+              <a:rPr sz="1200">
+                <a:solidFill>
+                  <a:srgbClr val="5B6472"/>
+                </a:solidFill>
+                <a:latin typeface="Calibri"/>
+              </a:rPr>
+              <a:t> server when asked.</a:t>
+            </a:r>
+          </a:p>
+        </p:txBody>
+      </p:sp>
+      <p:sp>
+        <p:nvSpPr>
+          <p:cNvPr id="13" name="Rounded Rectangle 12"/>
+          <p:cNvSpPr/>
+          <p:nvPr/>
+        </p:nvSpPr>
+        <p:spPr>
+          <a:xfrm>
+            <a:off x="6324448" y="3429000"/>
+            <a:ext cx="5318608" cy="1783080"/>
+          </a:xfrm>
+          <a:prstGeom prst="roundRect">
+            <a:avLst>
+              <a:gd name="adj" fmla="val 3400"/>
+            </a:avLst>
+          </a:prstGeom>
+          <a:solidFill>
+            <a:srgbClr val="F4F7FA"/>
+          </a:solidFill>
+          <a:ln w="9525">
+            <a:solidFill>
+              <a:srgbClr val="D8E1EA"/>
+            </a:solidFill>
+          </a:ln>
+          <a:effectLst/>
+        </p:spPr>
+        <p:style>
+          <a:lnRef idx="1">
+            <a:schemeClr val="accent1"/>
+          </a:lnRef>
+          <a:fillRef idx="3">
+            <a:schemeClr val="accent1"/>
+          </a:fillRef>
+          <a:effectRef idx="2">
+            <a:schemeClr val="accent1"/>
+          </a:effectRef>
+          <a:fontRef idx="minor">
+            <a:schemeClr val="lt1"/>
+          </a:fontRef>
+        </p:style>
+        <p:txBody>
+          <a:bodyPr rtlCol="0" anchor="ctr"/>
+          <a:lstStyle/>
+          <a:p>
+            <a:pPr algn="ctr"/>
+          </a:p>
+        </p:txBody>
+      </p:sp>
+      <p:sp>
+        <p:nvSpPr>
+          <p:cNvPr id="14" name="TextBox 13"/>
+          <p:cNvSpPr txBox="1"/>
+          <p:nvPr/>
+        </p:nvSpPr>
+        <p:spPr>
+          <a:xfrm>
+            <a:off x="6598768" y="3630168"/>
+            <a:ext cx="4769968" cy="365760"/>
+          </a:xfrm>
+          <a:prstGeom prst="rect">
+            <a:avLst/>
+          </a:prstGeom>
+          <a:noFill/>
+        </p:spPr>
+        <p:txBody>
+          <a:bodyPr wrap="square" lIns="0" rIns="0" tIns="0" bIns="0">
+            <a:spAutoFit/>
+          </a:bodyPr>
+          <a:lstStyle/>
+          <a:p>
+            <a:r>
+              <a:rPr sz="1700" b="1">
+                <a:solidFill>
+                  <a:srgbClr val="21295C"/>
+                </a:solidFill>
+                <a:latin typeface="Cambria"/>
+              </a:rPr>
+              <a:t>4. The server, in a second window</a:t>
+            </a:r>
+          </a:p>
+        </p:txBody>
+      </p:sp>
+      <p:sp>
+        <p:nvSpPr>
+          <p:cNvPr id="15" name="TextBox 14"/>
+          <p:cNvSpPr txBox="1"/>
+          <p:nvPr/>
+        </p:nvSpPr>
+        <p:spPr>
+          <a:xfrm>
+            <a:off x="6598768" y="4041648"/>
+            <a:ext cx="4769968" cy="1078992"/>
+          </a:xfrm>
+          <a:prstGeom prst="rect">
+            <a:avLst/>
+          </a:prstGeom>
+          <a:noFill/>
+        </p:spPr>
+        <p:txBody>
+          <a:bodyPr wrap="square" lIns="0" rIns="0" tIns="0" bIns="0">
+            <a:spAutoFit/>
+          </a:bodyPr>
+          <a:lstStyle/>
+          <a:p>
+            <a:pPr>
+              <a:spcAft>
+                <a:spcPts val="600"/>
+              </a:spcAft>
+            </a:pPr>
+            <a:r>
+              <a:rPr sz="1200">
+                <a:solidFill>
+                  <a:srgbClr val="5B6472"/>
+                </a:solidFill>
+                <a:latin typeface="Calibri"/>
+              </a:rPr>
+              <a:t>New terminal window: </a:t>
+            </a:r>
+            <a:r>
+              <a:rPr sz="1200" b="1">
+                <a:solidFill>
+                  <a:srgbClr val="1C7293"/>
+                </a:solidFill>
+                <a:latin typeface="Consolas"/>
+              </a:rPr>
+              <a:t>cd ~/northline-course</a:t>
+            </a:r>
+            <a:r>
+              <a:rPr sz="1200">
+                <a:solidFill>
+                  <a:srgbClr val="5B6472"/>
+                </a:solidFill>
+                <a:latin typeface="Calibri"/>
+              </a:rPr>
+              <a:t> then </a:t>
+            </a:r>
+            <a:r>
+              <a:rPr sz="1200" b="1">
+                <a:solidFill>
+                  <a:srgbClr val="1C7293"/>
+                </a:solidFill>
+                <a:latin typeface="Consolas"/>
+              </a:rPr>
+              <a:t>uv run python -m northline.agent.server</a:t>
+            </a:r>
+            <a:r>
+              <a:rPr sz="1200">
+                <a:solidFill>
+                  <a:srgbClr val="5B6472"/>
+                </a:solidFill>
+                <a:latin typeface="Calibri"/>
+              </a:rPr>
+              <a:t>. Leave it open.</a:t>
+            </a:r>
+          </a:p>
+          <a:p>
+            <a:pPr>
+              <a:spcAft>
+                <a:spcPts val="600"/>
+              </a:spcAft>
+            </a:pPr>
+            <a:r>
+              <a:rPr sz="1200">
+                <a:solidFill>
+                  <a:srgbClr val="5B6472"/>
+                </a:solidFill>
+                <a:latin typeface="Calibri"/>
+              </a:rPr>
+              <a:t>Open </a:t>
+            </a:r>
+            <a:r>
+              <a:rPr sz="1200" b="1">
+                <a:solidFill>
+                  <a:srgbClr val="1C7293"/>
+                </a:solidFill>
+                <a:latin typeface="Consolas"/>
+              </a:rPr>
+              <a:t>127.0.0.1:8765</a:t>
+            </a:r>
+            <a:r>
+              <a:rPr sz="1200">
+                <a:solidFill>
+                  <a:srgbClr val="5B6472"/>
+                </a:solidFill>
+                <a:latin typeface="Calibri"/>
+              </a:rPr>
+              <a:t> and text the agent </a:t>
+            </a:r>
+            <a:r>
+              <a:rPr sz="1200" b="1">
+                <a:solidFill>
+                  <a:srgbClr val="5B6472"/>
+                </a:solidFill>
+                <a:latin typeface="Calibri"/>
+              </a:rPr>
+              <a:t>“my BP was 184/112”</a:t>
+            </a:r>
+            <a:r>
+              <a:rPr sz="1200">
+                <a:solidFill>
+                  <a:srgbClr val="5B6472"/>
+                </a:solidFill>
+                <a:latin typeface="Calibri"/>
+              </a:rPr>
+              <a:t>. Dashboard: </a:t>
+            </a:r>
+            <a:r>
+              <a:rPr sz="1200" b="1">
+                <a:solidFill>
+                  <a:srgbClr val="1C7293"/>
+                </a:solidFill>
+                <a:latin typeface="Consolas"/>
+              </a:rPr>
+              <a:t>127.0.0.1:8765/dashboard</a:t>
+            </a:r>
+          </a:p>
+        </p:txBody>
+      </p:sp>
+      <p:sp>
+        <p:nvSpPr>
+          <p:cNvPr id="16" name="Rounded Rectangle 15"/>
+          <p:cNvSpPr/>
+          <p:nvPr/>
+        </p:nvSpPr>
+        <p:spPr>
+          <a:xfrm>
+            <a:off x="548640" y="5440680"/>
+            <a:ext cx="11094415" cy="822960"/>
+          </a:xfrm>
+          <a:prstGeom prst="roundRect">
+            <a:avLst>
+              <a:gd name="adj" fmla="val 3400"/>
+            </a:avLst>
+          </a:prstGeom>
+          <a:solidFill>
+            <a:srgbClr val="065A82"/>
+          </a:solidFill>
+          <a:ln>
+            <a:noFill/>
+          </a:ln>
+          <a:effectLst/>
+        </p:spPr>
+        <p:style>
+          <a:lnRef idx="1">
+            <a:schemeClr val="accent1"/>
+          </a:lnRef>
+          <a:fillRef idx="3">
+            <a:schemeClr val="accent1"/>
+          </a:fillRef>
+          <a:effectRef idx="2">
+            <a:schemeClr val="accent1"/>
+          </a:effectRef>
+          <a:fontRef idx="minor">
+            <a:schemeClr val="lt1"/>
+          </a:fontRef>
+        </p:style>
+        <p:txBody>
+          <a:bodyPr rtlCol="0" anchor="ctr"/>
+          <a:lstStyle/>
+          <a:p>
+            <a:pPr algn="ctr"/>
+          </a:p>
+        </p:txBody>
+      </p:sp>
+      <p:sp>
+        <p:nvSpPr>
+          <p:cNvPr id="17" name="TextBox 16"/>
+          <p:cNvSpPr txBox="1"/>
+          <p:nvPr/>
+        </p:nvSpPr>
+        <p:spPr>
+          <a:xfrm>
+            <a:off x="868680" y="5568696"/>
+            <a:ext cx="7040880" cy="320040"/>
+          </a:xfrm>
+          <a:prstGeom prst="rect">
+            <a:avLst/>
+          </a:prstGeom>
+          <a:noFill/>
+        </p:spPr>
+        <p:txBody>
+          <a:bodyPr wrap="square" lIns="0" rIns="0" tIns="0" bIns="0">
+            <a:spAutoFit/>
+          </a:bodyPr>
+          <a:lstStyle/>
+          <a:p>
+            <a:r>
+              <a:rPr sz="1100" b="1">
+                <a:solidFill>
+                  <a:srgbClr val="CADCFC"/>
+                </a:solidFill>
+                <a:latin typeface="Calibri"/>
+              </a:rPr>
+              <a:t>The folder</a:t>
+            </a:r>
+          </a:p>
+        </p:txBody>
+      </p:sp>
+      <p:sp>
+        <p:nvSpPr>
+          <p:cNvPr id="18" name="TextBox 17"/>
+          <p:cNvSpPr txBox="1"/>
+          <p:nvPr/>
+        </p:nvSpPr>
+        <p:spPr>
+          <a:xfrm>
+            <a:off x="868680" y="5843016"/>
+            <a:ext cx="7040880" cy="411480"/>
+          </a:xfrm>
+          <a:prstGeom prst="rect">
+            <a:avLst/>
+          </a:prstGeom>
+          <a:noFill/>
+        </p:spPr>
+        <p:txBody>
+          <a:bodyPr wrap="square" lIns="0" rIns="0" tIns="0" bIns="0">
+            <a:spAutoFit/>
+          </a:bodyPr>
+          <a:lstStyle/>
+          <a:p>
+            <a:r>
+              <a:rPr sz="1800" b="1">
+                <a:solidFill>
+                  <a:srgbClr val="FFFFFF"/>
+                </a:solidFill>
+                <a:latin typeface="Consolas"/>
+              </a:rPr>
+              <a:t>github.com/anthonymorrisjohnson/northline-course</a:t>
+            </a:r>
+          </a:p>
+        </p:txBody>
+      </p:sp>
+      <p:sp>
+        <p:nvSpPr>
+          <p:cNvPr id="19" name="TextBox 18"/>
+          <p:cNvSpPr txBox="1"/>
+          <p:nvPr/>
+        </p:nvSpPr>
+        <p:spPr>
+          <a:xfrm>
+            <a:off x="8138160" y="5568696"/>
+            <a:ext cx="3200400" cy="320040"/>
+          </a:xfrm>
+          <a:prstGeom prst="rect">
+            <a:avLst/>
+          </a:prstGeom>
+          <a:noFill/>
+        </p:spPr>
+        <p:txBody>
+          <a:bodyPr wrap="square" lIns="0" rIns="0" tIns="0" bIns="0">
+            <a:spAutoFit/>
+          </a:bodyPr>
+          <a:lstStyle/>
+          <a:p>
+            <a:r>
+              <a:rPr sz="1100" b="1">
+                <a:solidFill>
+                  <a:srgbClr val="CADCFC"/>
+                </a:solidFill>
+                <a:latin typeface="Calibri"/>
+              </a:rPr>
+              <a:t>In the room</a:t>
+            </a:r>
+          </a:p>
+        </p:txBody>
+      </p:sp>
+      <p:sp>
+        <p:nvSpPr>
+          <p:cNvPr id="20" name="TextBox 19"/>
+          <p:cNvSpPr txBox="1"/>
+          <p:nvPr/>
+        </p:nvSpPr>
+        <p:spPr>
+          <a:xfrm>
+            <a:off x="8138160" y="5843016"/>
+            <a:ext cx="3200400" cy="411480"/>
+          </a:xfrm>
+          <a:prstGeom prst="rect">
+            <a:avLst/>
+          </a:prstGeom>
+          <a:noFill/>
+        </p:spPr>
+        <p:txBody>
+          <a:bodyPr wrap="square" lIns="0" rIns="0" tIns="0" bIns="0">
+            <a:spAutoFit/>
+          </a:bodyPr>
+          <a:lstStyle/>
+          <a:p>
+            <a:r>
+              <a:rPr sz="1500" b="1">
+                <a:solidFill>
+                  <a:srgbClr val="FFFFFF"/>
+                </a:solidFill>
+                <a:latin typeface="Consolas"/>
+              </a:rPr>
+              <a:t>/pm-run</a:t>
+            </a:r>
+            <a:r>
+              <a:rPr sz="1200">
+                <a:solidFill>
+                  <a:srgbClr val="CADCFC"/>
+                </a:solidFill>
+                <a:latin typeface="Calibri"/>
+              </a:rPr>
+              <a:t>   then   </a:t>
+            </a:r>
+            <a:r>
+              <a:rPr sz="1500" b="1">
+                <a:solidFill>
+                  <a:srgbClr val="FFFFFF"/>
+                </a:solidFill>
+                <a:latin typeface="Consolas"/>
+              </a:rPr>
+              <a:t>/deploy triage</a:t>
+            </a:r>
+          </a:p>
+        </p:txBody>
+      </p:sp>
+      <p:sp>
+        <p:nvSpPr>
+          <p:cNvPr id="21" name="TextBox 20"/>
+          <p:cNvSpPr txBox="1"/>
+          <p:nvPr/>
+        </p:nvSpPr>
+        <p:spPr>
+          <a:xfrm>
+            <a:off x="9265615" y="6400800"/>
+            <a:ext cx="2377440" cy="274320"/>
+          </a:xfrm>
+          <a:prstGeom prst="rect">
+            <a:avLst/>
+          </a:prstGeom>
+          <a:noFill/>
+        </p:spPr>
+        <p:txBody>
+          <a:bodyPr wrap="square" lIns="0" rIns="0" tIns="0" bIns="0">
+            <a:spAutoFit/>
+          </a:bodyPr>
+          <a:lstStyle/>
+          <a:p>
+            <a:pPr algn="r"/>
+            <a:r>
+              <a:rPr sz="1000">
+                <a:solidFill>
+                  <a:srgbClr val="5B6472"/>
+                </a:solidFill>
+                <a:latin typeface="Calibri"/>
+              </a:rPr>
+              <a:t>Northline Care  ·  1</a:t>
+            </a:r>
           </a:p>
         </p:txBody>
       </p:sp>
@@ -8568,6 +9746,10 @@
             </a:outerShdw>
           </a:effectLst>
         </p:spPr>
+        <p:txBody>
+          <a:bodyPr/>
+          <a:p/>
+        </p:txBody>
       </p:sp>
       <p:sp>
         <p:nvSpPr>
@@ -8750,6 +9932,10 @@
             <a:prstDash val="solid"/>
           </a:ln>
         </p:spPr>
+        <p:txBody>
+          <a:bodyPr/>
+          <a:p/>
+        </p:txBody>
       </p:sp>
       <p:sp>
         <p:nvSpPr>
@@ -8826,7 +10012,7 @@
                 <a:ea typeface="Calibri" pitchFamily="34" charset="-122"/>
                 <a:cs typeface="Calibri" pitchFamily="34" charset="-120"/>
               </a:rPr>
-              <a:t>Northline Care  ·  2</a:t>
+              <a:t>Northline Care  ·  3</a:t>
             </a:r>
             <a:endParaRPr lang="en-US" sz="1000" dirty="0"/>
           </a:p>
@@ -8968,6 +10154,10 @@
             <a:prstDash val="solid"/>
           </a:ln>
         </p:spPr>
+        <p:txBody>
+          <a:bodyPr/>
+          <a:p/>
+        </p:txBody>
       </p:sp>
       <p:sp>
         <p:nvSpPr>
@@ -9073,6 +10263,10 @@
             <a:prstDash val="solid"/>
           </a:ln>
         </p:spPr>
+        <p:txBody>
+          <a:bodyPr/>
+          <a:p/>
+        </p:txBody>
       </p:sp>
       <p:sp>
         <p:nvSpPr>
@@ -9175,6 +10369,10 @@
             <a:tailEnd type="triangle"/>
           </a:ln>
         </p:spPr>
+        <p:txBody>
+          <a:bodyPr/>
+          <a:p/>
+        </p:txBody>
       </p:sp>
       <p:sp>
         <p:nvSpPr>
@@ -9199,6 +10397,10 @@
             <a:tailEnd type="triangle"/>
           </a:ln>
         </p:spPr>
+        <p:txBody>
+          <a:bodyPr/>
+          <a:p/>
+        </p:txBody>
       </p:sp>
       <p:sp>
         <p:nvSpPr>
@@ -9226,6 +10428,10 @@
             <a:prstDash val="solid"/>
           </a:ln>
         </p:spPr>
+        <p:txBody>
+          <a:bodyPr/>
+          <a:p/>
+        </p:txBody>
       </p:sp>
       <p:sp>
         <p:nvSpPr>
@@ -9331,6 +10537,10 @@
             <a:prstDash val="solid"/>
           </a:ln>
         </p:spPr>
+        <p:txBody>
+          <a:bodyPr/>
+          <a:p/>
+        </p:txBody>
       </p:sp>
       <p:sp>
         <p:nvSpPr>
@@ -9433,6 +10643,10 @@
             <a:tailEnd type="triangle"/>
           </a:ln>
         </p:spPr>
+        <p:txBody>
+          <a:bodyPr/>
+          <a:p/>
+        </p:txBody>
       </p:sp>
       <p:sp>
         <p:nvSpPr>
@@ -9457,6 +10671,10 @@
             <a:tailEnd type="triangle"/>
           </a:ln>
         </p:spPr>
+        <p:txBody>
+          <a:bodyPr/>
+          <a:p/>
+        </p:txBody>
       </p:sp>
       <p:sp>
         <p:nvSpPr>
@@ -9480,6 +10698,10 @@
             <a:prstDash val="solid"/>
           </a:ln>
         </p:spPr>
+        <p:txBody>
+          <a:bodyPr/>
+          <a:p/>
+        </p:txBody>
       </p:sp>
       <p:sp>
         <p:nvSpPr>
@@ -9503,6 +10725,10 @@
             <a:prstDash val="solid"/>
           </a:ln>
         </p:spPr>
+        <p:txBody>
+          <a:bodyPr/>
+          <a:p/>
+        </p:txBody>
       </p:sp>
       <p:sp>
         <p:nvSpPr>
@@ -9530,6 +10756,10 @@
             <a:prstDash val="solid"/>
           </a:ln>
         </p:spPr>
+        <p:txBody>
+          <a:bodyPr/>
+          <a:p/>
+        </p:txBody>
       </p:sp>
       <p:sp>
         <p:nvSpPr>
@@ -9642,7 +10872,7 @@
                 <a:ea typeface="Calibri" pitchFamily="34" charset="-122"/>
                 <a:cs typeface="Calibri" pitchFamily="34" charset="-120"/>
               </a:rPr>
-              <a:t>Northline Care  ·  3</a:t>
+              <a:t>Northline Care  ·  4</a:t>
             </a:r>
             <a:endParaRPr lang="en-US" sz="1000" dirty="0"/>
           </a:p>
@@ -9784,6 +11014,10 @@
             <a:prstDash val="solid"/>
           </a:ln>
         </p:spPr>
+        <p:txBody>
+          <a:bodyPr/>
+          <a:p/>
+        </p:txBody>
       </p:sp>
       <p:sp>
         <p:nvSpPr>
@@ -9886,6 +11120,10 @@
             <a:tailEnd type="triangle"/>
           </a:ln>
         </p:spPr>
+        <p:txBody>
+          <a:bodyPr/>
+          <a:p/>
+        </p:txBody>
       </p:sp>
       <p:sp>
         <p:nvSpPr>
@@ -9913,6 +11151,10 @@
             <a:prstDash val="solid"/>
           </a:ln>
         </p:spPr>
+        <p:txBody>
+          <a:bodyPr/>
+          <a:p/>
+        </p:txBody>
       </p:sp>
       <p:sp>
         <p:nvSpPr>
@@ -10015,6 +11257,10 @@
             <a:tailEnd type="triangle"/>
           </a:ln>
         </p:spPr>
+        <p:txBody>
+          <a:bodyPr/>
+          <a:p/>
+        </p:txBody>
       </p:sp>
       <p:sp>
         <p:nvSpPr>
@@ -10042,6 +11288,10 @@
             <a:prstDash val="solid"/>
           </a:ln>
         </p:spPr>
+        <p:txBody>
+          <a:bodyPr/>
+          <a:p/>
+        </p:txBody>
       </p:sp>
       <p:sp>
         <p:nvSpPr>
@@ -10144,6 +11394,10 @@
             <a:tailEnd type="triangle"/>
           </a:ln>
         </p:spPr>
+        <p:txBody>
+          <a:bodyPr/>
+          <a:p/>
+        </p:txBody>
       </p:sp>
       <p:sp>
         <p:nvSpPr>
@@ -10171,6 +11425,10 @@
             <a:prstDash val="solid"/>
           </a:ln>
         </p:spPr>
+        <p:txBody>
+          <a:bodyPr/>
+          <a:p/>
+        </p:txBody>
       </p:sp>
       <p:sp>
         <p:nvSpPr>
@@ -10273,6 +11531,10 @@
             <a:tailEnd type="triangle"/>
           </a:ln>
         </p:spPr>
+        <p:txBody>
+          <a:bodyPr/>
+          <a:p/>
+        </p:txBody>
       </p:sp>
       <p:sp>
         <p:nvSpPr>
@@ -10300,6 +11562,10 @@
             <a:prstDash val="solid"/>
           </a:ln>
         </p:spPr>
+        <p:txBody>
+          <a:bodyPr/>
+          <a:p/>
+        </p:txBody>
       </p:sp>
       <p:sp>
         <p:nvSpPr>
@@ -10402,6 +11668,10 @@
             <a:tailEnd type="triangle"/>
           </a:ln>
         </p:spPr>
+        <p:txBody>
+          <a:bodyPr/>
+          <a:p/>
+        </p:txBody>
       </p:sp>
       <p:sp>
         <p:nvSpPr>
@@ -10429,6 +11699,10 @@
             <a:prstDash val="solid"/>
           </a:ln>
         </p:spPr>
+        <p:txBody>
+          <a:bodyPr/>
+          <a:p/>
+        </p:txBody>
       </p:sp>
       <p:sp>
         <p:nvSpPr>
@@ -10531,6 +11805,10 @@
             <a:tailEnd type="triangle"/>
           </a:ln>
         </p:spPr>
+        <p:txBody>
+          <a:bodyPr/>
+          <a:p/>
+        </p:txBody>
       </p:sp>
       <p:sp>
         <p:nvSpPr>
@@ -10558,6 +11836,10 @@
             <a:prstDash val="solid"/>
           </a:ln>
         </p:spPr>
+        <p:txBody>
+          <a:bodyPr/>
+          <a:p/>
+        </p:txBody>
       </p:sp>
       <p:sp>
         <p:nvSpPr>
@@ -10660,6 +11942,10 @@
             <a:tailEnd type="triangle"/>
           </a:ln>
         </p:spPr>
+        <p:txBody>
+          <a:bodyPr/>
+          <a:p/>
+        </p:txBody>
       </p:sp>
       <p:sp>
         <p:nvSpPr>
@@ -10687,6 +11973,10 @@
             <a:prstDash val="solid"/>
           </a:ln>
         </p:spPr>
+        <p:txBody>
+          <a:bodyPr/>
+          <a:p/>
+        </p:txBody>
       </p:sp>
       <p:sp>
         <p:nvSpPr>
@@ -10789,6 +12079,10 @@
             <a:tailEnd type="triangle"/>
           </a:ln>
         </p:spPr>
+        <p:txBody>
+          <a:bodyPr/>
+          <a:p/>
+        </p:txBody>
       </p:sp>
       <p:sp>
         <p:nvSpPr>
@@ -10816,6 +12110,10 @@
             <a:prstDash val="solid"/>
           </a:ln>
         </p:spPr>
+        <p:txBody>
+          <a:bodyPr/>
+          <a:p/>
+        </p:txBody>
       </p:sp>
       <p:sp>
         <p:nvSpPr>
@@ -10918,6 +12216,10 @@
             <a:tailEnd type="triangle"/>
           </a:ln>
         </p:spPr>
+        <p:txBody>
+          <a:bodyPr/>
+          <a:p/>
+        </p:txBody>
       </p:sp>
       <p:sp>
         <p:nvSpPr>
@@ -10945,6 +12247,10 @@
             <a:prstDash val="solid"/>
           </a:ln>
         </p:spPr>
+        <p:txBody>
+          <a:bodyPr/>
+          <a:p/>
+        </p:txBody>
       </p:sp>
       <p:sp>
         <p:nvSpPr>
@@ -11096,7 +12402,7 @@
                 <a:ea typeface="Calibri" pitchFamily="34" charset="-122"/>
                 <a:cs typeface="Calibri" pitchFamily="34" charset="-120"/>
               </a:rPr>
-              <a:t>Northline Care  ·  4</a:t>
+              <a:t>Northline Care  ·  5</a:t>
             </a:r>
             <a:endParaRPr lang="en-US" sz="1000" dirty="0"/>
           </a:p>
@@ -11238,6 +12544,10 @@
             <a:prstDash val="dash"/>
           </a:ln>
         </p:spPr>
+        <p:txBody>
+          <a:bodyPr/>
+          <a:p/>
+        </p:txBody>
       </p:sp>
       <p:sp>
         <p:nvSpPr>
@@ -11382,6 +12692,10 @@
             <a:prstDash val="dash"/>
           </a:ln>
         </p:spPr>
+        <p:txBody>
+          <a:bodyPr/>
+          <a:p/>
+        </p:txBody>
       </p:sp>
       <p:sp>
         <p:nvSpPr>
@@ -11526,6 +12840,10 @@
             <a:prstDash val="dash"/>
           </a:ln>
         </p:spPr>
+        <p:txBody>
+          <a:bodyPr/>
+          <a:p/>
+        </p:txBody>
       </p:sp>
       <p:sp>
         <p:nvSpPr>
@@ -11670,6 +12988,10 @@
             <a:prstDash val="dash"/>
           </a:ln>
         </p:spPr>
+        <p:txBody>
+          <a:bodyPr/>
+          <a:p/>
+        </p:txBody>
       </p:sp>
       <p:sp>
         <p:nvSpPr>
@@ -11821,7 +13143,7 @@
                 <a:ea typeface="Calibri" pitchFamily="34" charset="-122"/>
                 <a:cs typeface="Calibri" pitchFamily="34" charset="-120"/>
               </a:rPr>
-              <a:t>Northline Care  ·  5</a:t>
+              <a:t>Northline Care  ·  6</a:t>
             </a:r>
             <a:endParaRPr lang="en-US" sz="1000" dirty="0"/>
           </a:p>
@@ -11956,6 +13278,10 @@
           </a:solidFill>
           <a:ln/>
         </p:spPr>
+        <p:txBody>
+          <a:bodyPr/>
+          <a:p/>
+        </p:txBody>
       </p:sp>
       <p:sp>
         <p:nvSpPr>
@@ -12054,6 +13380,10 @@
           </a:solidFill>
           <a:ln/>
         </p:spPr>
+        <p:txBody>
+          <a:bodyPr/>
+          <a:p/>
+        </p:txBody>
       </p:sp>
       <p:sp>
         <p:nvSpPr>
@@ -12152,6 +13482,10 @@
           </a:solidFill>
           <a:ln/>
         </p:spPr>
+        <p:txBody>
+          <a:bodyPr/>
+          <a:p/>
+        </p:txBody>
       </p:sp>
       <p:sp>
         <p:nvSpPr>
@@ -12250,6 +13584,10 @@
           </a:solidFill>
           <a:ln/>
         </p:spPr>
+        <p:txBody>
+          <a:bodyPr/>
+          <a:p/>
+        </p:txBody>
       </p:sp>
       <p:sp>
         <p:nvSpPr>
@@ -12348,6 +13686,10 @@
           </a:solidFill>
           <a:ln/>
         </p:spPr>
+        <p:txBody>
+          <a:bodyPr/>
+          <a:p/>
+        </p:txBody>
       </p:sp>
       <p:sp>
         <p:nvSpPr>
@@ -12460,7 +13802,7 @@
                 <a:ea typeface="Calibri" pitchFamily="34" charset="-122"/>
                 <a:cs typeface="Calibri" pitchFamily="34" charset="-120"/>
               </a:rPr>
-              <a:t>Northline Care  ·  6</a:t>
+              <a:t>Northline Care  ·  7</a:t>
             </a:r>
             <a:endParaRPr lang="en-US" sz="1000" dirty="0"/>
           </a:p>
@@ -14739,7 +16081,7 @@
                 <a:ea typeface="Calibri" pitchFamily="34" charset="-122"/>
                 <a:cs typeface="Calibri" pitchFamily="34" charset="-120"/>
               </a:rPr>
-              <a:t>Northline Care  ·  7</a:t>
+              <a:t>Northline Care  ·  8</a:t>
             </a:r>
             <a:endParaRPr lang="en-US" sz="1000" dirty="0"/>
           </a:p>
@@ -20350,7 +21692,7 @@
                 <a:ea typeface="Calibri" pitchFamily="34" charset="-122"/>
                 <a:cs typeface="Calibri" pitchFamily="34" charset="-120"/>
               </a:rPr>
-              <a:t>Northline Care  ·  8</a:t>
+              <a:t>Northline Care  ·  9</a:t>
             </a:r>
             <a:endParaRPr lang="en-US" sz="1000" dirty="0"/>
           </a:p>
@@ -20593,7 +21935,7 @@
                 <a:ea typeface="Calibri" pitchFamily="34" charset="-122"/>
                 <a:cs typeface="Calibri" pitchFamily="34" charset="-120"/>
               </a:rPr>
-              <a:t>Northline Care  ·  9</a:t>
+              <a:t>Northline Care  ·  10</a:t>
             </a:r>
             <a:endParaRPr lang="en-US" sz="1000" dirty="0"/>
           </a:p>

--- a/slides/deck.pptx
+++ b/slides/deck.pptx
@@ -3185,12 +3185,890 @@
 </file>
 
 <file path=ppt/slides/slide1.xml><?xml version="1.0" encoding="utf-8"?>
-<p:sld xmlns:a="http://schemas.openxmlformats.org/drawingml/2006/main" xmlns:r="http://schemas.openxmlformats.org/officeDocument/2006/relationships" xmlns:p="http://schemas.openxmlformats.org/presentationml/2006/main">
-  <p:cSld name="Slide 1">
+<p:sld xmlns:a="http://schemas.openxmlformats.org/drawingml/2006/main" xmlns:p="http://schemas.openxmlformats.org/presentationml/2006/main" xmlns:r="http://schemas.openxmlformats.org/officeDocument/2006/relationships">
+  <p:cSld>
     <p:bg>
       <p:bgPr>
         <a:solidFill>
-          <a:srgbClr val="21295C"/>
+          <a:srgbClr val="FFFFFF"/>
+        </a:solidFill>
+        <a:effectLst/>
+      </p:bgPr>
+    </p:bg>
+    <p:spTree>
+      <p:nvGrpSpPr>
+        <p:cNvPr id="1" name=""/>
+        <p:cNvGrpSpPr/>
+        <p:nvPr/>
+      </p:nvGrpSpPr>
+      <p:grpSpPr/>
+      <p:sp>
+        <p:nvSpPr>
+          <p:cNvPr id="2" name="TextBox 1"/>
+          <p:cNvSpPr txBox="1"/>
+          <p:nvPr/>
+        </p:nvSpPr>
+        <p:spPr>
+          <a:xfrm>
+            <a:off x="548640" y="164592"/>
+            <a:ext cx="11094415" cy="274320"/>
+          </a:xfrm>
+          <a:prstGeom prst="rect">
+            <a:avLst/>
+          </a:prstGeom>
+          <a:noFill/>
+        </p:spPr>
+        <p:txBody>
+          <a:bodyPr wrap="square" lIns="0" rIns="0" tIns="0" bIns="0">
+            <a:spAutoFit/>
+          </a:bodyPr>
+          <a:lstStyle/>
+          <a:p>
+            <a:r>
+              <a:rPr sz="1200" b="1">
+                <a:solidFill>
+                  <a:srgbClr val="1C7293"/>
+                </a:solidFill>
+                <a:latin typeface="Calibri"/>
+              </a:rPr>
+              <a:t>BEFORE WE START</a:t>
+            </a:r>
+          </a:p>
+        </p:txBody>
+      </p:sp>
+      <p:sp>
+        <p:nvSpPr>
+          <p:cNvPr id="3" name="TextBox 2"/>
+          <p:cNvSpPr txBox="1"/>
+          <p:nvPr/>
+        </p:nvSpPr>
+        <p:spPr>
+          <a:xfrm>
+            <a:off x="548640" y="411480"/>
+            <a:ext cx="11094415" cy="822960"/>
+          </a:xfrm>
+          <a:prstGeom prst="rect">
+            <a:avLst/>
+          </a:prstGeom>
+          <a:noFill/>
+        </p:spPr>
+        <p:txBody>
+          <a:bodyPr wrap="square" lIns="0" rIns="0" tIns="0" bIns="0">
+            <a:spAutoFit/>
+          </a:bodyPr>
+          <a:lstStyle/>
+          <a:p>
+            <a:r>
+              <a:rPr sz="3200" b="1">
+                <a:solidFill>
+                  <a:srgbClr val="1B1F27"/>
+                </a:solidFill>
+                <a:latin typeface="Cambria"/>
+              </a:rPr>
+              <a:t>Three things, then wait for us</a:t>
+            </a:r>
+          </a:p>
+        </p:txBody>
+      </p:sp>
+      <p:sp>
+        <p:nvSpPr>
+          <p:cNvPr id="4" name="Rounded Rectangle 3"/>
+          <p:cNvSpPr/>
+          <p:nvPr/>
+        </p:nvSpPr>
+        <p:spPr>
+          <a:xfrm>
+            <a:off x="548640" y="1554480"/>
+            <a:ext cx="3535680" cy="2743200"/>
+          </a:xfrm>
+          <a:prstGeom prst="roundRect">
+            <a:avLst>
+              <a:gd name="adj" fmla="val 3400"/>
+            </a:avLst>
+          </a:prstGeom>
+          <a:solidFill>
+            <a:srgbClr val="F4F7FA"/>
+          </a:solidFill>
+          <a:ln w="9525">
+            <a:solidFill>
+              <a:srgbClr val="D8E1EA"/>
+            </a:solidFill>
+          </a:ln>
+          <a:effectLst/>
+        </p:spPr>
+        <p:style>
+          <a:lnRef idx="1">
+            <a:schemeClr val="accent1"/>
+          </a:lnRef>
+          <a:fillRef idx="3">
+            <a:schemeClr val="accent1"/>
+          </a:fillRef>
+          <a:effectRef idx="2">
+            <a:schemeClr val="accent1"/>
+          </a:effectRef>
+          <a:fontRef idx="minor">
+            <a:schemeClr val="lt1"/>
+          </a:fontRef>
+        </p:style>
+        <p:txBody>
+          <a:bodyPr rtlCol="0" anchor="ctr"/>
+          <a:lstStyle/>
+          <a:p>
+            <a:pPr algn="ctr"/>
+          </a:p>
+        </p:txBody>
+      </p:sp>
+      <p:sp>
+        <p:nvSpPr>
+          <p:cNvPr id="5" name="TextBox 4"/>
+          <p:cNvSpPr txBox="1"/>
+          <p:nvPr/>
+        </p:nvSpPr>
+        <p:spPr>
+          <a:xfrm>
+            <a:off x="822960" y="1783080"/>
+            <a:ext cx="2987040" cy="457200"/>
+          </a:xfrm>
+          <a:prstGeom prst="rect">
+            <a:avLst/>
+          </a:prstGeom>
+          <a:noFill/>
+        </p:spPr>
+        <p:txBody>
+          <a:bodyPr wrap="square" lIns="0" rIns="0" tIns="0" bIns="0">
+            <a:spAutoFit/>
+          </a:bodyPr>
+          <a:lstStyle/>
+          <a:p>
+            <a:r>
+              <a:rPr sz="3000" b="1">
+                <a:solidFill>
+                  <a:srgbClr val="1C7293"/>
+                </a:solidFill>
+                <a:latin typeface="Cambria"/>
+              </a:rPr>
+              <a:t>1</a:t>
+            </a:r>
+          </a:p>
+        </p:txBody>
+      </p:sp>
+      <p:sp>
+        <p:nvSpPr>
+          <p:cNvPr id="6" name="TextBox 5"/>
+          <p:cNvSpPr txBox="1"/>
+          <p:nvPr/>
+        </p:nvSpPr>
+        <p:spPr>
+          <a:xfrm>
+            <a:off x="822960" y="2331720"/>
+            <a:ext cx="2987040" cy="411480"/>
+          </a:xfrm>
+          <a:prstGeom prst="rect">
+            <a:avLst/>
+          </a:prstGeom>
+          <a:noFill/>
+        </p:spPr>
+        <p:txBody>
+          <a:bodyPr wrap="square" lIns="0" rIns="0" tIns="0" bIns="0">
+            <a:spAutoFit/>
+          </a:bodyPr>
+          <a:lstStyle/>
+          <a:p>
+            <a:r>
+              <a:rPr sz="2000" b="1">
+                <a:solidFill>
+                  <a:srgbClr val="21295C"/>
+                </a:solidFill>
+                <a:latin typeface="Cambria"/>
+              </a:rPr>
+              <a:t>Claude Code</a:t>
+            </a:r>
+          </a:p>
+        </p:txBody>
+      </p:sp>
+      <p:sp>
+        <p:nvSpPr>
+          <p:cNvPr id="7" name="TextBox 6"/>
+          <p:cNvSpPr txBox="1"/>
+          <p:nvPr/>
+        </p:nvSpPr>
+        <p:spPr>
+          <a:xfrm>
+            <a:off x="822960" y="2834640"/>
+            <a:ext cx="2987040" cy="1371600"/>
+          </a:xfrm>
+          <a:prstGeom prst="rect">
+            <a:avLst/>
+          </a:prstGeom>
+          <a:noFill/>
+        </p:spPr>
+        <p:txBody>
+          <a:bodyPr wrap="square" lIns="0" rIns="0" tIns="0" bIns="0">
+            <a:spAutoFit/>
+          </a:bodyPr>
+          <a:lstStyle/>
+          <a:p>
+            <a:pPr>
+              <a:spcAft>
+                <a:spcPts val="800"/>
+              </a:spcAft>
+            </a:pPr>
+            <a:r>
+              <a:rPr sz="1400">
+                <a:solidFill>
+                  <a:srgbClr val="5B6472"/>
+                </a:solidFill>
+                <a:latin typeface="Calibri"/>
+              </a:rPr>
+              <a:t>Install it and sign in.</a:t>
+            </a:r>
+          </a:p>
+          <a:p>
+            <a:pPr>
+              <a:spcAft>
+                <a:spcPts val="800"/>
+              </a:spcAft>
+            </a:pPr>
+            <a:r>
+              <a:rPr sz="1400">
+                <a:solidFill>
+                  <a:srgbClr val="5B6472"/>
+                </a:solidFill>
+                <a:latin typeface="Calibri"/>
+              </a:rPr>
+              <a:t>Check: type </a:t>
+            </a:r>
+            <a:r>
+              <a:rPr sz="1300" b="1">
+                <a:solidFill>
+                  <a:srgbClr val="1C7293"/>
+                </a:solidFill>
+                <a:latin typeface="Consolas"/>
+              </a:rPr>
+              <a:t>claude --version</a:t>
+            </a:r>
+            <a:r>
+              <a:rPr sz="1400">
+                <a:solidFill>
+                  <a:srgbClr val="5B6472"/>
+                </a:solidFill>
+                <a:latin typeface="Calibri"/>
+              </a:rPr>
+              <a:t> in a terminal.</a:t>
+            </a:r>
+          </a:p>
+          <a:p>
+            <a:pPr>
+              <a:spcAft>
+                <a:spcPts val="800"/>
+              </a:spcAft>
+            </a:pPr>
+            <a:r>
+              <a:rPr sz="1100">
+                <a:solidFill>
+                  <a:srgbClr val="5B6472"/>
+                </a:solidFill>
+                <a:latin typeface="Calibri"/>
+              </a:rPr>
+              <a:t>Windows: use the native installer, not npm.</a:t>
+            </a:r>
+          </a:p>
+        </p:txBody>
+      </p:sp>
+      <p:sp>
+        <p:nvSpPr>
+          <p:cNvPr id="8" name="Rounded Rectangle 7"/>
+          <p:cNvSpPr/>
+          <p:nvPr/>
+        </p:nvSpPr>
+        <p:spPr>
+          <a:xfrm>
+            <a:off x="4328160" y="1554480"/>
+            <a:ext cx="3535680" cy="2743200"/>
+          </a:xfrm>
+          <a:prstGeom prst="roundRect">
+            <a:avLst>
+              <a:gd name="adj" fmla="val 3400"/>
+            </a:avLst>
+          </a:prstGeom>
+          <a:solidFill>
+            <a:srgbClr val="F4F7FA"/>
+          </a:solidFill>
+          <a:ln w="9525">
+            <a:solidFill>
+              <a:srgbClr val="D8E1EA"/>
+            </a:solidFill>
+          </a:ln>
+          <a:effectLst/>
+        </p:spPr>
+        <p:style>
+          <a:lnRef idx="1">
+            <a:schemeClr val="accent1"/>
+          </a:lnRef>
+          <a:fillRef idx="3">
+            <a:schemeClr val="accent1"/>
+          </a:fillRef>
+          <a:effectRef idx="2">
+            <a:schemeClr val="accent1"/>
+          </a:effectRef>
+          <a:fontRef idx="minor">
+            <a:schemeClr val="lt1"/>
+          </a:fontRef>
+        </p:style>
+        <p:txBody>
+          <a:bodyPr rtlCol="0" anchor="ctr"/>
+          <a:lstStyle/>
+          <a:p>
+            <a:pPr algn="ctr"/>
+          </a:p>
+        </p:txBody>
+      </p:sp>
+      <p:sp>
+        <p:nvSpPr>
+          <p:cNvPr id="9" name="TextBox 8"/>
+          <p:cNvSpPr txBox="1"/>
+          <p:nvPr/>
+        </p:nvSpPr>
+        <p:spPr>
+          <a:xfrm>
+            <a:off x="4602480" y="1783080"/>
+            <a:ext cx="2987040" cy="457200"/>
+          </a:xfrm>
+          <a:prstGeom prst="rect">
+            <a:avLst/>
+          </a:prstGeom>
+          <a:noFill/>
+        </p:spPr>
+        <p:txBody>
+          <a:bodyPr wrap="square" lIns="0" rIns="0" tIns="0" bIns="0">
+            <a:spAutoFit/>
+          </a:bodyPr>
+          <a:lstStyle/>
+          <a:p>
+            <a:r>
+              <a:rPr sz="3000" b="1">
+                <a:solidFill>
+                  <a:srgbClr val="1C7293"/>
+                </a:solidFill>
+                <a:latin typeface="Cambria"/>
+              </a:rPr>
+              <a:t>2</a:t>
+            </a:r>
+          </a:p>
+        </p:txBody>
+      </p:sp>
+      <p:sp>
+        <p:nvSpPr>
+          <p:cNvPr id="10" name="TextBox 9"/>
+          <p:cNvSpPr txBox="1"/>
+          <p:nvPr/>
+        </p:nvSpPr>
+        <p:spPr>
+          <a:xfrm>
+            <a:off x="4602480" y="2331720"/>
+            <a:ext cx="2987040" cy="411480"/>
+          </a:xfrm>
+          <a:prstGeom prst="rect">
+            <a:avLst/>
+          </a:prstGeom>
+          <a:noFill/>
+        </p:spPr>
+        <p:txBody>
+          <a:bodyPr wrap="square" lIns="0" rIns="0" tIns="0" bIns="0">
+            <a:spAutoFit/>
+          </a:bodyPr>
+          <a:lstStyle/>
+          <a:p>
+            <a:r>
+              <a:rPr sz="2000" b="1">
+                <a:solidFill>
+                  <a:srgbClr val="21295C"/>
+                </a:solidFill>
+                <a:latin typeface="Cambria"/>
+              </a:rPr>
+              <a:t>The folder</a:t>
+            </a:r>
+          </a:p>
+        </p:txBody>
+      </p:sp>
+      <p:sp>
+        <p:nvSpPr>
+          <p:cNvPr id="11" name="TextBox 10"/>
+          <p:cNvSpPr txBox="1"/>
+          <p:nvPr/>
+        </p:nvSpPr>
+        <p:spPr>
+          <a:xfrm>
+            <a:off x="4602480" y="2834640"/>
+            <a:ext cx="2987040" cy="1371600"/>
+          </a:xfrm>
+          <a:prstGeom prst="rect">
+            <a:avLst/>
+          </a:prstGeom>
+          <a:noFill/>
+        </p:spPr>
+        <p:txBody>
+          <a:bodyPr wrap="square" lIns="0" rIns="0" tIns="0" bIns="0">
+            <a:spAutoFit/>
+          </a:bodyPr>
+          <a:lstStyle/>
+          <a:p>
+            <a:pPr>
+              <a:spcAft>
+                <a:spcPts val="800"/>
+              </a:spcAft>
+            </a:pPr>
+            <a:r>
+              <a:rPr sz="1400">
+                <a:solidFill>
+                  <a:srgbClr val="5B6472"/>
+                </a:solidFill>
+                <a:latin typeface="Calibri"/>
+              </a:rPr>
+              <a:t>Open the link below, click </a:t>
+            </a:r>
+            <a:r>
+              <a:rPr sz="1400" b="1">
+                <a:solidFill>
+                  <a:srgbClr val="5B6472"/>
+                </a:solidFill>
+                <a:latin typeface="Calibri"/>
+              </a:rPr>
+              <a:t>Code → Download ZIP</a:t>
+            </a:r>
+            <a:r>
+              <a:rPr sz="1400">
+                <a:solidFill>
+                  <a:srgbClr val="5B6472"/>
+                </a:solidFill>
+                <a:latin typeface="Calibri"/>
+              </a:rPr>
+              <a:t>.</a:t>
+            </a:r>
+          </a:p>
+          <a:p>
+            <a:pPr>
+              <a:spcAft>
+                <a:spcPts val="800"/>
+              </a:spcAft>
+            </a:pPr>
+            <a:r>
+              <a:rPr sz="1400">
+                <a:solidFill>
+                  <a:srgbClr val="5B6472"/>
+                </a:solidFill>
+                <a:latin typeface="Calibri"/>
+              </a:rPr>
+              <a:t>Unzip it into your home folder.</a:t>
+            </a:r>
+          </a:p>
+        </p:txBody>
+      </p:sp>
+      <p:sp>
+        <p:nvSpPr>
+          <p:cNvPr id="12" name="Rounded Rectangle 11"/>
+          <p:cNvSpPr/>
+          <p:nvPr/>
+        </p:nvSpPr>
+        <p:spPr>
+          <a:xfrm>
+            <a:off x="8107680" y="1554480"/>
+            <a:ext cx="3535680" cy="2743200"/>
+          </a:xfrm>
+          <a:prstGeom prst="roundRect">
+            <a:avLst>
+              <a:gd name="adj" fmla="val 3400"/>
+            </a:avLst>
+          </a:prstGeom>
+          <a:solidFill>
+            <a:srgbClr val="F4F7FA"/>
+          </a:solidFill>
+          <a:ln w="9525">
+            <a:solidFill>
+              <a:srgbClr val="D8E1EA"/>
+            </a:solidFill>
+          </a:ln>
+          <a:effectLst/>
+        </p:spPr>
+        <p:style>
+          <a:lnRef idx="1">
+            <a:schemeClr val="accent1"/>
+          </a:lnRef>
+          <a:fillRef idx="3">
+            <a:schemeClr val="accent1"/>
+          </a:fillRef>
+          <a:effectRef idx="2">
+            <a:schemeClr val="accent1"/>
+          </a:effectRef>
+          <a:fontRef idx="minor">
+            <a:schemeClr val="lt1"/>
+          </a:fontRef>
+        </p:style>
+        <p:txBody>
+          <a:bodyPr rtlCol="0" anchor="ctr"/>
+          <a:lstStyle/>
+          <a:p>
+            <a:pPr algn="ctr"/>
+          </a:p>
+        </p:txBody>
+      </p:sp>
+      <p:sp>
+        <p:nvSpPr>
+          <p:cNvPr id="13" name="TextBox 12"/>
+          <p:cNvSpPr txBox="1"/>
+          <p:nvPr/>
+        </p:nvSpPr>
+        <p:spPr>
+          <a:xfrm>
+            <a:off x="8382000" y="1783080"/>
+            <a:ext cx="2987040" cy="457200"/>
+          </a:xfrm>
+          <a:prstGeom prst="rect">
+            <a:avLst/>
+          </a:prstGeom>
+          <a:noFill/>
+        </p:spPr>
+        <p:txBody>
+          <a:bodyPr wrap="square" lIns="0" rIns="0" tIns="0" bIns="0">
+            <a:spAutoFit/>
+          </a:bodyPr>
+          <a:lstStyle/>
+          <a:p>
+            <a:r>
+              <a:rPr sz="3000" b="1">
+                <a:solidFill>
+                  <a:srgbClr val="1C7293"/>
+                </a:solidFill>
+                <a:latin typeface="Cambria"/>
+              </a:rPr>
+              <a:t>3</a:t>
+            </a:r>
+          </a:p>
+        </p:txBody>
+      </p:sp>
+      <p:sp>
+        <p:nvSpPr>
+          <p:cNvPr id="14" name="TextBox 13"/>
+          <p:cNvSpPr txBox="1"/>
+          <p:nvPr/>
+        </p:nvSpPr>
+        <p:spPr>
+          <a:xfrm>
+            <a:off x="8382000" y="2331720"/>
+            <a:ext cx="2987040" cy="411480"/>
+          </a:xfrm>
+          <a:prstGeom prst="rect">
+            <a:avLst/>
+          </a:prstGeom>
+          <a:noFill/>
+        </p:spPr>
+        <p:txBody>
+          <a:bodyPr wrap="square" lIns="0" rIns="0" tIns="0" bIns="0">
+            <a:spAutoFit/>
+          </a:bodyPr>
+          <a:lstStyle/>
+          <a:p>
+            <a:r>
+              <a:rPr sz="2000" b="1">
+                <a:solidFill>
+                  <a:srgbClr val="21295C"/>
+                </a:solidFill>
+                <a:latin typeface="Cambria"/>
+              </a:rPr>
+              <a:t>/setup</a:t>
+            </a:r>
+          </a:p>
+        </p:txBody>
+      </p:sp>
+      <p:sp>
+        <p:nvSpPr>
+          <p:cNvPr id="15" name="TextBox 14"/>
+          <p:cNvSpPr txBox="1"/>
+          <p:nvPr/>
+        </p:nvSpPr>
+        <p:spPr>
+          <a:xfrm>
+            <a:off x="8382000" y="2834640"/>
+            <a:ext cx="2987040" cy="1371600"/>
+          </a:xfrm>
+          <a:prstGeom prst="rect">
+            <a:avLst/>
+          </a:prstGeom>
+          <a:noFill/>
+        </p:spPr>
+        <p:txBody>
+          <a:bodyPr wrap="square" lIns="0" rIns="0" tIns="0" bIns="0">
+            <a:spAutoFit/>
+          </a:bodyPr>
+          <a:lstStyle/>
+          <a:p>
+            <a:pPr>
+              <a:spcAft>
+                <a:spcPts val="800"/>
+              </a:spcAft>
+            </a:pPr>
+            <a:r>
+              <a:rPr sz="1400">
+                <a:solidFill>
+                  <a:srgbClr val="5B6472"/>
+                </a:solidFill>
+                <a:latin typeface="Calibri"/>
+              </a:rPr>
+              <a:t>In a terminal: </a:t>
+            </a:r>
+            <a:r>
+              <a:rPr sz="1300" b="1">
+                <a:solidFill>
+                  <a:srgbClr val="1C7293"/>
+                </a:solidFill>
+                <a:latin typeface="Consolas"/>
+              </a:rPr>
+              <a:t>cd ~/northline-course</a:t>
+            </a:r>
+          </a:p>
+          <a:p>
+            <a:pPr>
+              <a:spcAft>
+                <a:spcPts val="800"/>
+              </a:spcAft>
+            </a:pPr>
+            <a:r>
+              <a:rPr sz="1400">
+                <a:solidFill>
+                  <a:srgbClr val="5B6472"/>
+                </a:solidFill>
+                <a:latin typeface="Calibri"/>
+              </a:rPr>
+              <a:t>then </a:t>
+            </a:r>
+            <a:r>
+              <a:rPr sz="1300" b="1">
+                <a:solidFill>
+                  <a:srgbClr val="1C7293"/>
+                </a:solidFill>
+                <a:latin typeface="Consolas"/>
+              </a:rPr>
+              <a:t>claude</a:t>
+            </a:r>
+            <a:r>
+              <a:rPr sz="1400">
+                <a:solidFill>
+                  <a:srgbClr val="5B6472"/>
+                </a:solidFill>
+                <a:latin typeface="Calibri"/>
+              </a:rPr>
+              <a:t>, then type </a:t>
+            </a:r>
+            <a:r>
+              <a:rPr sz="1300" b="1">
+                <a:solidFill>
+                  <a:srgbClr val="1C7293"/>
+                </a:solidFill>
+                <a:latin typeface="Consolas"/>
+              </a:rPr>
+              <a:t>/setup</a:t>
+            </a:r>
+          </a:p>
+          <a:p>
+            <a:pPr>
+              <a:spcAft>
+                <a:spcPts val="800"/>
+              </a:spcAft>
+            </a:pPr>
+            <a:r>
+              <a:rPr sz="1400">
+                <a:solidFill>
+                  <a:srgbClr val="5B6472"/>
+                </a:solidFill>
+                <a:latin typeface="Calibri"/>
+              </a:rPr>
+              <a:t>Do what it says. Stop at </a:t>
+            </a:r>
+            <a:r>
+              <a:rPr sz="1300" b="1">
+                <a:solidFill>
+                  <a:srgbClr val="1C7293"/>
+                </a:solidFill>
+                <a:latin typeface="Consolas"/>
+              </a:rPr>
+              <a:t>READY</a:t>
+            </a:r>
+            <a:r>
+              <a:rPr sz="1400">
+                <a:solidFill>
+                  <a:srgbClr val="5B6472"/>
+                </a:solidFill>
+                <a:latin typeface="Calibri"/>
+              </a:rPr>
+              <a:t>.</a:t>
+            </a:r>
+          </a:p>
+        </p:txBody>
+      </p:sp>
+      <p:sp>
+        <p:nvSpPr>
+          <p:cNvPr id="16" name="Rounded Rectangle 15"/>
+          <p:cNvSpPr/>
+          <p:nvPr/>
+        </p:nvSpPr>
+        <p:spPr>
+          <a:xfrm>
+            <a:off x="548640" y="4754880"/>
+            <a:ext cx="11094415" cy="1005840"/>
+          </a:xfrm>
+          <a:prstGeom prst="roundRect">
+            <a:avLst>
+              <a:gd name="adj" fmla="val 3400"/>
+            </a:avLst>
+          </a:prstGeom>
+          <a:solidFill>
+            <a:srgbClr val="065A82"/>
+          </a:solidFill>
+          <a:ln>
+            <a:noFill/>
+          </a:ln>
+          <a:effectLst/>
+        </p:spPr>
+        <p:style>
+          <a:lnRef idx="1">
+            <a:schemeClr val="accent1"/>
+          </a:lnRef>
+          <a:fillRef idx="3">
+            <a:schemeClr val="accent1"/>
+          </a:fillRef>
+          <a:effectRef idx="2">
+            <a:schemeClr val="accent1"/>
+          </a:effectRef>
+          <a:fontRef idx="minor">
+            <a:schemeClr val="lt1"/>
+          </a:fontRef>
+        </p:style>
+        <p:txBody>
+          <a:bodyPr rtlCol="0" anchor="ctr"/>
+          <a:lstStyle/>
+          <a:p>
+            <a:pPr algn="ctr"/>
+          </a:p>
+        </p:txBody>
+      </p:sp>
+      <p:sp>
+        <p:nvSpPr>
+          <p:cNvPr id="17" name="TextBox 16"/>
+          <p:cNvSpPr txBox="1"/>
+          <p:nvPr/>
+        </p:nvSpPr>
+        <p:spPr>
+          <a:xfrm>
+            <a:off x="868680" y="4882896"/>
+            <a:ext cx="10454320" cy="320040"/>
+          </a:xfrm>
+          <a:prstGeom prst="rect">
+            <a:avLst/>
+          </a:prstGeom>
+          <a:noFill/>
+        </p:spPr>
+        <p:txBody>
+          <a:bodyPr wrap="square" lIns="0" rIns="0" tIns="0" bIns="0">
+            <a:spAutoFit/>
+          </a:bodyPr>
+          <a:lstStyle/>
+          <a:p>
+            <a:r>
+              <a:rPr sz="1100" b="1">
+                <a:solidFill>
+                  <a:srgbClr val="CADCFC"/>
+                </a:solidFill>
+                <a:latin typeface="Calibri"/>
+              </a:rPr>
+              <a:t>The folder</a:t>
+            </a:r>
+          </a:p>
+        </p:txBody>
+      </p:sp>
+      <p:sp>
+        <p:nvSpPr>
+          <p:cNvPr id="18" name="TextBox 17"/>
+          <p:cNvSpPr txBox="1"/>
+          <p:nvPr/>
+        </p:nvSpPr>
+        <p:spPr>
+          <a:xfrm>
+            <a:off x="868680" y="5157216"/>
+            <a:ext cx="10454320" cy="457200"/>
+          </a:xfrm>
+          <a:prstGeom prst="rect">
+            <a:avLst/>
+          </a:prstGeom>
+          <a:noFill/>
+        </p:spPr>
+        <p:txBody>
+          <a:bodyPr wrap="square" lIns="0" rIns="0" tIns="0" bIns="0">
+            <a:spAutoFit/>
+          </a:bodyPr>
+          <a:lstStyle/>
+          <a:p>
+            <a:r>
+              <a:rPr sz="2200" b="1">
+                <a:solidFill>
+                  <a:srgbClr val="FFFFFF"/>
+                </a:solidFill>
+                <a:latin typeface="Consolas"/>
+              </a:rPr>
+              <a:t>github.com/anthonymorrisjohnson/northline-course</a:t>
+            </a:r>
+          </a:p>
+        </p:txBody>
+      </p:sp>
+      <p:sp>
+        <p:nvSpPr>
+          <p:cNvPr id="19" name="TextBox 18"/>
+          <p:cNvSpPr txBox="1"/>
+          <p:nvPr/>
+        </p:nvSpPr>
+        <p:spPr>
+          <a:xfrm>
+            <a:off x="9265615" y="6400800"/>
+            <a:ext cx="2377440" cy="274320"/>
+          </a:xfrm>
+          <a:prstGeom prst="rect">
+            <a:avLst/>
+          </a:prstGeom>
+          <a:noFill/>
+        </p:spPr>
+        <p:txBody>
+          <a:bodyPr wrap="square" lIns="0" rIns="0" tIns="0" bIns="0">
+            <a:spAutoFit/>
+          </a:bodyPr>
+          <a:lstStyle/>
+          <a:p>
+            <a:pPr algn="r"/>
+            <a:r>
+              <a:rPr sz="1000">
+                <a:solidFill>
+                  <a:srgbClr val="5B6472"/>
+                </a:solidFill>
+                <a:latin typeface="Calibri"/>
+              </a:rPr>
+              <a:t>Northline Care  ·  1</a:t>
+            </a:r>
+          </a:p>
+        </p:txBody>
+      </p:sp>
+    </p:spTree>
+  </p:cSld>
+  <p:clrMapOvr>
+    <a:masterClrMapping/>
+  </p:clrMapOvr>
+</p:sld>
+</file>
+
+<file path=ppt/slides/slide10.xml><?xml version="1.0" encoding="utf-8"?>
+<p:sld xmlns:a="http://schemas.openxmlformats.org/drawingml/2006/main" xmlns:r="http://schemas.openxmlformats.org/officeDocument/2006/relationships" xmlns:p="http://schemas.openxmlformats.org/presentationml/2006/main">
+  <p:cSld name="Slide 9">
+    <p:bg>
+      <p:bgPr>
+        <a:solidFill>
+          <a:srgbClr val="FFFFFF"/>
         </a:solidFill>
       </p:bgPr>
     </p:bg>
@@ -3216,8 +4094,8 @@
         </p:nvSpPr>
         <p:spPr>
           <a:xfrm>
-            <a:off x="548640" y="2148840"/>
-            <a:ext cx="11094415" cy="1371600"/>
+            <a:off x="548640" y="164592"/>
+            <a:ext cx="11094415" cy="274320"/>
           </a:xfrm>
           <a:prstGeom prst="rect">
             <a:avLst/>
@@ -3233,17 +4111,17 @@
               <a:buNone/>
             </a:pPr>
             <a:r>
-              <a:rPr lang="en-US" sz="4400" b="1" dirty="0">
+              <a:rPr lang="en-US" sz="1200" b="1" spc="200" kern="0" dirty="0">
                 <a:solidFill>
-                  <a:srgbClr val="FFFFFF"/>
+                  <a:srgbClr val="1C7293"/>
                 </a:solidFill>
-                <a:latin typeface="Cambria" pitchFamily="34" charset="0"/>
-                <a:ea typeface="Cambria" pitchFamily="34" charset="-122"/>
-                <a:cs typeface="Cambria" pitchFamily="34" charset="-120"/>
+                <a:latin typeface="Calibri" pitchFamily="34" charset="0"/>
+                <a:ea typeface="Calibri" pitchFamily="34" charset="-122"/>
+                <a:cs typeface="Calibri" pitchFamily="34" charset="-120"/>
               </a:rPr>
-              <a:t>MOVING THE BOTTLENECK, LIVE</a:t>
+              <a:t>TREND, WEEKS 1-52</a:t>
             </a:r>
-            <a:endParaRPr lang="en-US" sz="4400" dirty="0"/>
+            <a:endParaRPr lang="en-US" sz="1200" dirty="0"/>
           </a:p>
         </p:txBody>
       </p:sp>
@@ -3255,8 +4133,8 @@
         </p:nvSpPr>
         <p:spPr>
           <a:xfrm>
-            <a:off x="548640" y="3246120"/>
-            <a:ext cx="11094415" cy="548640"/>
+            <a:off x="548640" y="411480"/>
+            <a:ext cx="11094415" cy="822960"/>
           </a:xfrm>
           <a:prstGeom prst="rect">
             <a:avLst/>
@@ -3272,61 +4150,46 @@
               <a:buNone/>
             </a:pPr>
             <a:r>
-              <a:rPr lang="en-US" sz="1800" i="1" dirty="0">
+              <a:rPr lang="en-US" sz="3200" b="1" dirty="0">
                 <a:solidFill>
-                  <a:srgbClr val="CADCFC"/>
+                  <a:srgbClr val="1B1F27"/>
                 </a:solidFill>
-                <a:latin typeface="Calibri" pitchFamily="34" charset="0"/>
-                <a:ea typeface="Calibri" pitchFamily="34" charset="-122"/>
-                <a:cs typeface="Calibri" pitchFamily="34" charset="-120"/>
+                <a:latin typeface="Cambria" pitchFamily="34" charset="0"/>
+                <a:ea typeface="Cambria" pitchFamily="34" charset="-122"/>
+                <a:cs typeface="Cambria" pitchFamily="34" charset="-120"/>
               </a:rPr>
-              <a:t>Northline Care — AI, operations, and the business model underneath it</a:t>
+              <a:t>AI lets you pivot fast</a:t>
             </a:r>
-            <a:endParaRPr lang="en-US" sz="1800" dirty="0"/>
+            <a:endParaRPr lang="en-US" sz="3200" dirty="0"/>
           </a:p>
         </p:txBody>
       </p:sp>
-      <p:sp>
-        <p:nvSpPr>
-          <p:cNvPr id="4" name="Shape 2"/>
-          <p:cNvSpPr/>
+      <p:graphicFrame>
+        <p:nvGraphicFramePr>
+          <p:cNvPr id="4" name="Chart 0" descr=""/>
+          <p:cNvGraphicFramePr/>
+          <p:nvPr/>
+        </p:nvGraphicFramePr>
+        <p:xfrm>
+          <a:off x="548640" y="1508760"/>
+          <a:ext cx="11094415" cy="3840480"/>
+        </p:xfrm>
+        <a:graphic xmlns:a="http://schemas.openxmlformats.org/drawingml/2006/main">
+          <a:graphicData uri="http://schemas.openxmlformats.org/drawingml/2006/chart">
+            <c:chart xmlns:c="http://schemas.openxmlformats.org/drawingml/2006/chart" r:id="rId1"/>
+          </a:graphicData>
+        </a:graphic>
+      </p:graphicFrame>
+      <p:sp>
+        <p:nvSpPr>
+          <p:cNvPr id="5" name="Text 2"/>
+          <p:cNvSpPr txBox="1"/>
           <p:nvPr/>
         </p:nvSpPr>
         <p:spPr>
           <a:xfrm>
-            <a:off x="548640" y="4206240"/>
-            <a:ext cx="3454298" cy="1463040"/>
-          </a:xfrm>
-          <a:prstGeom prst="roundRect">
-            <a:avLst>
-              <a:gd name="adj" fmla="val 5000"/>
-            </a:avLst>
-          </a:prstGeom>
-          <a:solidFill>
-            <a:srgbClr val="1B2350"/>
-          </a:solidFill>
-          <a:ln w="12700">
-            <a:solidFill>
-              <a:srgbClr val="1C7293"/>
-            </a:solidFill>
-            <a:prstDash val="solid"/>
-          </a:ln>
-        </p:spPr>
-        <p:txBody>
-          <a:bodyPr/>
-          <a:p/>
-        </p:txBody>
-      </p:sp>
-      <p:sp>
-        <p:nvSpPr>
-          <p:cNvPr id="5" name="Text 3"/>
-          <p:cNvSpPr txBox="1"/>
-          <p:nvPr/>
-        </p:nvSpPr>
-        <p:spPr>
-          <a:xfrm>
-            <a:off x="777240" y="4370832"/>
-            <a:ext cx="2997098" cy="502920"/>
+            <a:off x="548640" y="5486400"/>
+            <a:ext cx="11094415" cy="292608"/>
           </a:xfrm>
           <a:prstGeom prst="rect">
             <a:avLst/>
@@ -3342,30 +4205,30 @@
               <a:buNone/>
             </a:pPr>
             <a:r>
-              <a:rPr lang="en-US" sz="2400" b="1" dirty="0">
+              <a:rPr lang="en-US" sz="1250" i="1" dirty="0">
                 <a:solidFill>
-                  <a:srgbClr val="CADCFC"/>
+                  <a:srgbClr val="5B6472"/>
                 </a:solidFill>
-                <a:latin typeface="Cambria" pitchFamily="34" charset="0"/>
-                <a:ea typeface="Cambria" pitchFamily="34" charset="-122"/>
-                <a:cs typeface="Cambria" pitchFamily="34" charset="-120"/>
+                <a:latin typeface="Calibri" pitchFamily="34" charset="0"/>
+                <a:ea typeface="Calibri" pitchFamily="34" charset="-122"/>
+                <a:cs typeface="Calibri" pitchFamily="34" charset="-120"/>
               </a:rPr>
-              <a:t>75 minutes</a:t>
+              <a:t>Median nurse response: 31.1h → 4.0h — but 90.0 urgent cases a week are now missed.</a:t>
             </a:r>
-            <a:endParaRPr lang="en-US" sz="2400" dirty="0"/>
+            <a:endParaRPr lang="en-US" sz="1250" dirty="0"/>
           </a:p>
         </p:txBody>
       </p:sp>
       <p:sp>
         <p:nvSpPr>
-          <p:cNvPr id="6" name="Text 4"/>
+          <p:cNvPr id="6" name="Text 3"/>
           <p:cNvSpPr txBox="1"/>
           <p:nvPr/>
         </p:nvSpPr>
         <p:spPr>
           <a:xfrm>
-            <a:off x="777240" y="4892040"/>
-            <a:ext cx="2997098" cy="685800"/>
+            <a:off x="548640" y="5806440"/>
+            <a:ext cx="11094415" cy="292608"/>
           </a:xfrm>
           <a:prstGeom prst="rect">
             <a:avLst/>
@@ -3381,61 +4244,30 @@
               <a:buNone/>
             </a:pPr>
             <a:r>
-              <a:rPr lang="en-US" sz="1250" dirty="0">
+              <a:rPr lang="en-US" sz="1200" i="1" dirty="0">
                 <a:solidFill>
-                  <a:srgbClr val="FFFFFF"/>
+                  <a:srgbClr val="1C7293"/>
                 </a:solidFill>
                 <a:latin typeface="Calibri" pitchFamily="34" charset="0"/>
                 <a:ea typeface="Calibri" pitchFamily="34" charset="-122"/>
                 <a:cs typeface="Calibri" pitchFamily="34" charset="-120"/>
               </a:rPr>
-              <a:t>paper case, live tools, a board meeting</a:t>
+              <a:t>Numbers from a triage deployment made with the 190/115 decisions on this laptop; your room's numbers will differ. Show the live dashboard.</a:t>
             </a:r>
-            <a:endParaRPr lang="en-US" sz="1250" dirty="0"/>
+            <a:endParaRPr lang="en-US" sz="1200" dirty="0"/>
           </a:p>
         </p:txBody>
       </p:sp>
       <p:sp>
         <p:nvSpPr>
-          <p:cNvPr id="7" name="Shape 5"/>
-          <p:cNvSpPr/>
+          <p:cNvPr id="7" name="Text 4"/>
+          <p:cNvSpPr txBox="1"/>
           <p:nvPr/>
         </p:nvSpPr>
         <p:spPr>
           <a:xfrm>
-            <a:off x="4368698" y="4206240"/>
-            <a:ext cx="3454298" cy="1463040"/>
-          </a:xfrm>
-          <a:prstGeom prst="roundRect">
-            <a:avLst>
-              <a:gd name="adj" fmla="val 5000"/>
-            </a:avLst>
-          </a:prstGeom>
-          <a:solidFill>
-            <a:srgbClr val="1B2350"/>
-          </a:solidFill>
-          <a:ln w="12700">
-            <a:solidFill>
-              <a:srgbClr val="1C7293"/>
-            </a:solidFill>
-            <a:prstDash val="solid"/>
-          </a:ln>
-        </p:spPr>
-        <p:txBody>
-          <a:bodyPr/>
-          <a:p/>
-        </p:txBody>
-      </p:sp>
-      <p:sp>
-        <p:nvSpPr>
-          <p:cNvPr id="8" name="Text 6"/>
-          <p:cNvSpPr txBox="1"/>
-          <p:nvPr/>
-        </p:nvSpPr>
-        <p:spPr>
-          <a:xfrm>
-            <a:off x="4597298" y="4370832"/>
-            <a:ext cx="2997098" cy="502920"/>
+            <a:off x="9265615" y="6400800"/>
+            <a:ext cx="2377440" cy="274320"/>
           </a:xfrm>
           <a:prstGeom prst="rect">
             <a:avLst/>
@@ -3447,169 +4279,21 @@
           <a:bodyPr wrap="square" lIns="0" tIns="0" rIns="0" bIns="0" rtlCol="0" anchor="ctr"/>
           <a:lstStyle/>
           <a:p>
-            <a:pPr indent="0" marL="0">
+            <a:pPr algn="r" indent="0" marL="0">
               <a:buNone/>
             </a:pPr>
             <a:r>
-              <a:rPr lang="en-US" sz="2400" b="1" dirty="0">
+              <a:rPr lang="en-US" sz="1000" dirty="0">
                 <a:solidFill>
-                  <a:srgbClr val="CADCFC"/>
-                </a:solidFill>
-                <a:latin typeface="Cambria" pitchFamily="34" charset="0"/>
-                <a:ea typeface="Cambria" pitchFamily="34" charset="-122"/>
-                <a:cs typeface="Cambria" pitchFamily="34" charset="-120"/>
-              </a:rPr>
-              <a:t>Two roles</a:t>
-            </a:r>
-            <a:endParaRPr lang="en-US" sz="2400" dirty="0"/>
-          </a:p>
-        </p:txBody>
-      </p:sp>
-      <p:sp>
-        <p:nvSpPr>
-          <p:cNvPr id="9" name="Text 7"/>
-          <p:cNvSpPr txBox="1"/>
-          <p:nvPr/>
-        </p:nvSpPr>
-        <p:spPr>
-          <a:xfrm>
-            <a:off x="4597298" y="4892040"/>
-            <a:ext cx="2997098" cy="685800"/>
-          </a:xfrm>
-          <a:prstGeom prst="rect">
-            <a:avLst/>
-          </a:prstGeom>
-          <a:noFill/>
-          <a:ln/>
-        </p:spPr>
-        <p:txBody>
-          <a:bodyPr wrap="square" lIns="0" tIns="0" rIns="0" bIns="0" rtlCol="0" anchor="ctr"/>
-          <a:lstStyle/>
-          <a:p>
-            <a:pPr indent="0" marL="0">
-              <a:buNone/>
-            </a:pPr>
-            <a:r>
-              <a:rPr lang="en-US" sz="1250" dirty="0">
-                <a:solidFill>
-                  <a:srgbClr val="FFFFFF"/>
+                  <a:srgbClr val="5B6472"/>
                 </a:solidFill>
                 <a:latin typeface="Calibri" pitchFamily="34" charset="0"/>
                 <a:ea typeface="Calibri" pitchFamily="34" charset="-122"/>
                 <a:cs typeface="Calibri" pitchFamily="34" charset="-120"/>
               </a:rPr>
-              <a:t>Room reads and asks; Screen drives the machine</a:t>
+              <a:t>Northline Care  ·  10</a:t>
             </a:r>
-            <a:endParaRPr lang="en-US" sz="1250" dirty="0"/>
-          </a:p>
-        </p:txBody>
-      </p:sp>
-      <p:sp>
-        <p:nvSpPr>
-          <p:cNvPr id="10" name="Shape 8"/>
-          <p:cNvSpPr/>
-          <p:nvPr/>
-        </p:nvSpPr>
-        <p:spPr>
-          <a:xfrm>
-            <a:off x="8188757" y="4206240"/>
-            <a:ext cx="3454298" cy="1463040"/>
-          </a:xfrm>
-          <a:prstGeom prst="roundRect">
-            <a:avLst>
-              <a:gd name="adj" fmla="val 5000"/>
-            </a:avLst>
-          </a:prstGeom>
-          <a:solidFill>
-            <a:srgbClr val="1B2350"/>
-          </a:solidFill>
-          <a:ln w="12700">
-            <a:solidFill>
-              <a:srgbClr val="1C7293"/>
-            </a:solidFill>
-            <a:prstDash val="solid"/>
-          </a:ln>
-        </p:spPr>
-        <p:txBody>
-          <a:bodyPr/>
-          <a:p/>
-        </p:txBody>
-      </p:sp>
-      <p:sp>
-        <p:nvSpPr>
-          <p:cNvPr id="11" name="Text 9"/>
-          <p:cNvSpPr txBox="1"/>
-          <p:nvPr/>
-        </p:nvSpPr>
-        <p:spPr>
-          <a:xfrm>
-            <a:off x="8417357" y="4370832"/>
-            <a:ext cx="2997098" cy="502920"/>
-          </a:xfrm>
-          <a:prstGeom prst="rect">
-            <a:avLst/>
-          </a:prstGeom>
-          <a:noFill/>
-          <a:ln/>
-        </p:spPr>
-        <p:txBody>
-          <a:bodyPr wrap="square" lIns="0" tIns="0" rIns="0" bIns="0" rtlCol="0" anchor="ctr"/>
-          <a:lstStyle/>
-          <a:p>
-            <a:pPr indent="0" marL="0">
-              <a:buNone/>
-            </a:pPr>
-            <a:r>
-              <a:rPr lang="en-US" sz="2400" b="1" dirty="0">
-                <a:solidFill>
-                  <a:srgbClr val="CADCFC"/>
-                </a:solidFill>
-                <a:latin typeface="Cambria" pitchFamily="34" charset="0"/>
-                <a:ea typeface="Cambria" pitchFamily="34" charset="-122"/>
-                <a:cs typeface="Cambria" pitchFamily="34" charset="-120"/>
-              </a:rPr>
-              <a:t>Two commands</a:t>
-            </a:r>
-            <a:endParaRPr lang="en-US" sz="2400" dirty="0"/>
-          </a:p>
-        </p:txBody>
-      </p:sp>
-      <p:sp>
-        <p:nvSpPr>
-          <p:cNvPr id="12" name="Text 10"/>
-          <p:cNvSpPr txBox="1"/>
-          <p:nvPr/>
-        </p:nvSpPr>
-        <p:spPr>
-          <a:xfrm>
-            <a:off x="8417357" y="4892040"/>
-            <a:ext cx="2997098" cy="685800"/>
-          </a:xfrm>
-          <a:prstGeom prst="rect">
-            <a:avLst/>
-          </a:prstGeom>
-          <a:noFill/>
-          <a:ln/>
-        </p:spPr>
-        <p:txBody>
-          <a:bodyPr wrap="square" lIns="0" tIns="0" rIns="0" bIns="0" rtlCol="0" anchor="ctr"/>
-          <a:lstStyle/>
-          <a:p>
-            <a:pPr indent="0" marL="0">
-              <a:buNone/>
-            </a:pPr>
-            <a:r>
-              <a:rPr lang="en-US" sz="1250" dirty="0">
-                <a:solidFill>
-                  <a:srgbClr val="FFFFFF"/>
-                </a:solidFill>
-                <a:latin typeface="Calibri" pitchFamily="34" charset="0"/>
-                <a:ea typeface="Calibri" pitchFamily="34" charset="-122"/>
-                <a:cs typeface="Calibri" pitchFamily="34" charset="-120"/>
-              </a:rPr>
-              <a:t>/pm-run and /deploy triage, all session</a:t>
-            </a:r>
-            <a:endParaRPr lang="en-US" sz="1250" dirty="0"/>
+            <a:endParaRPr lang="en-US" sz="1000" dirty="0"/>
           </a:p>
         </p:txBody>
       </p:sp>
@@ -3621,7 +4305,7 @@
 </p:sld>
 </file>
 
-<file path=ppt/slides/slide10.xml><?xml version="1.0" encoding="utf-8"?>
+<file path=ppt/slides/slide11.xml><?xml version="1.0" encoding="utf-8"?>
 <p:sld xmlns:a="http://schemas.openxmlformats.org/drawingml/2006/main" xmlns:r="http://schemas.openxmlformats.org/officeDocument/2006/relationships" xmlns:p="http://schemas.openxmlformats.org/presentationml/2006/main">
   <p:cSld name="Slide 10">
     <p:bg>
@@ -4870,7 +5554,7 @@
 </p:sld>
 </file>
 
-<file path=ppt/slides/slide11.xml><?xml version="1.0" encoding="utf-8"?>
+<file path=ppt/slides/slide12.xml><?xml version="1.0" encoding="utf-8"?>
 <p:sld xmlns:a="http://schemas.openxmlformats.org/drawingml/2006/main" xmlns:r="http://schemas.openxmlformats.org/officeDocument/2006/relationships" xmlns:p="http://schemas.openxmlformats.org/presentationml/2006/main">
   <p:cSld name="Slide 11">
     <p:bg>
@@ -5113,7 +5797,7 @@
 </p:sld>
 </file>
 
-<file path=ppt/slides/slide12.xml><?xml version="1.0" encoding="utf-8"?>
+<file path=ppt/slides/slide13.xml><?xml version="1.0" encoding="utf-8"?>
 <p:sld xmlns:a="http://schemas.openxmlformats.org/drawingml/2006/main" xmlns:r="http://schemas.openxmlformats.org/officeDocument/2006/relationships" xmlns:p="http://schemas.openxmlformats.org/presentationml/2006/main">
   <p:cSld name="Slide 12">
     <p:bg>
@@ -7353,7 +8037,7 @@
 </p:sld>
 </file>
 
-<file path=ppt/slides/slide13.xml><?xml version="1.0" encoding="utf-8"?>
+<file path=ppt/slides/slide14.xml><?xml version="1.0" encoding="utf-8"?>
 <p:sld xmlns:a="http://schemas.openxmlformats.org/drawingml/2006/main" xmlns:r="http://schemas.openxmlformats.org/officeDocument/2006/relationships" xmlns:p="http://schemas.openxmlformats.org/presentationml/2006/main">
   <p:cSld name="Slide 13">
     <p:bg>
@@ -7607,7 +8291,7 @@
 </p:sld>
 </file>
 
-<file path=ppt/slides/slide14.xml><?xml version="1.0" encoding="utf-8"?>
+<file path=ppt/slides/slide15.xml><?xml version="1.0" encoding="utf-8"?>
 <p:sld xmlns:a="http://schemas.openxmlformats.org/drawingml/2006/main" xmlns:r="http://schemas.openxmlformats.org/officeDocument/2006/relationships" xmlns:p="http://schemas.openxmlformats.org/presentationml/2006/main">
   <p:cSld name="Slide 14">
     <p:bg>
@@ -8482,15 +9166,14 @@
 </p:sld>
 </file>
 
-<file path=ppt/slides/slide15.xml><?xml version="1.0" encoding="utf-8"?>
-<p:sld xmlns:a="http://schemas.openxmlformats.org/drawingml/2006/main" xmlns:p="http://schemas.openxmlformats.org/presentationml/2006/main" xmlns:r="http://schemas.openxmlformats.org/officeDocument/2006/relationships">
-  <p:cSld>
+<file path=ppt/slides/slide2.xml><?xml version="1.0" encoding="utf-8"?>
+<p:sld xmlns:a="http://schemas.openxmlformats.org/drawingml/2006/main" xmlns:r="http://schemas.openxmlformats.org/officeDocument/2006/relationships" xmlns:p="http://schemas.openxmlformats.org/presentationml/2006/main">
+  <p:cSld name="Slide 1">
     <p:bg>
       <p:bgPr>
         <a:solidFill>
-          <a:srgbClr val="FFFFFF"/>
+          <a:srgbClr val="21295C"/>
         </a:solidFill>
-        <a:effectLst/>
       </p:bgPr>
     </p:bg>
     <p:spTree>
@@ -8499,1107 +9182,416 @@
         <p:cNvGrpSpPr/>
         <p:nvPr/>
       </p:nvGrpSpPr>
-      <p:grpSpPr/>
-      <p:sp>
-        <p:nvSpPr>
-          <p:cNvPr id="2" name="TextBox 1"/>
+      <p:grpSpPr>
+        <a:xfrm>
+          <a:off x="0" y="0"/>
+          <a:ext cx="0" cy="0"/>
+          <a:chOff x="0" y="0"/>
+          <a:chExt cx="0" cy="0"/>
+        </a:xfrm>
+      </p:grpSpPr>
+      <p:sp>
+        <p:nvSpPr>
+          <p:cNvPr id="2" name="Text 0"/>
           <p:cNvSpPr txBox="1"/>
           <p:nvPr/>
         </p:nvSpPr>
         <p:spPr>
           <a:xfrm>
-            <a:off x="548640" y="164592"/>
-            <a:ext cx="11094415" cy="274320"/>
+            <a:off x="548640" y="2148840"/>
+            <a:ext cx="11094415" cy="1371600"/>
           </a:xfrm>
           <a:prstGeom prst="rect">
             <a:avLst/>
           </a:prstGeom>
           <a:noFill/>
+          <a:ln/>
         </p:spPr>
         <p:txBody>
-          <a:bodyPr wrap="square" lIns="0" rIns="0" tIns="0" bIns="0">
-            <a:spAutoFit/>
-          </a:bodyPr>
+          <a:bodyPr wrap="square" lIns="0" tIns="0" rIns="0" bIns="0" rtlCol="0" anchor="ctr"/>
           <a:lstStyle/>
           <a:p>
+            <a:pPr algn="l" indent="0" marL="0">
+              <a:buNone/>
+            </a:pPr>
             <a:r>
-              <a:rPr sz="1200" b="1">
+              <a:rPr lang="en-US" sz="4400" b="1" dirty="0">
                 <a:solidFill>
-                  <a:srgbClr val="1C7293"/>
+                  <a:srgbClr val="FFFFFF"/>
                 </a:solidFill>
-                <a:latin typeface="Calibri"/>
+                <a:latin typeface="Cambria" pitchFamily="34" charset="0"/>
+                <a:ea typeface="Cambria" pitchFamily="34" charset="-122"/>
+                <a:cs typeface="Cambria" pitchFamily="34" charset="-120"/>
               </a:rPr>
-              <a:t>BEFORE WE START  ·  ABOUT 10 MINUTES</a:t>
+              <a:t>MOVING THE BOTTLENECK, LIVE</a:t>
             </a:r>
+            <a:endParaRPr lang="en-US" sz="4400" dirty="0"/>
           </a:p>
         </p:txBody>
       </p:sp>
       <p:sp>
         <p:nvSpPr>
-          <p:cNvPr id="3" name="TextBox 2"/>
+          <p:cNvPr id="3" name="Text 1"/>
           <p:cNvSpPr txBox="1"/>
           <p:nvPr/>
         </p:nvSpPr>
         <p:spPr>
           <a:xfrm>
-            <a:off x="548640" y="411480"/>
-            <a:ext cx="11094415" cy="822960"/>
+            <a:off x="548640" y="3246120"/>
+            <a:ext cx="11094415" cy="548640"/>
           </a:xfrm>
           <a:prstGeom prst="rect">
             <a:avLst/>
           </a:prstGeom>
           <a:noFill/>
+          <a:ln/>
         </p:spPr>
         <p:txBody>
-          <a:bodyPr wrap="square" lIns="0" rIns="0" tIns="0" bIns="0">
-            <a:spAutoFit/>
-          </a:bodyPr>
+          <a:bodyPr wrap="square" lIns="0" tIns="0" rIns="0" bIns="0" rtlCol="0" anchor="ctr"/>
           <a:lstStyle/>
           <a:p>
+            <a:pPr algn="l" indent="0" marL="0">
+              <a:buNone/>
+            </a:pPr>
             <a:r>
-              <a:rPr sz="3200" b="1">
+              <a:rPr lang="en-US" sz="1800" i="1" dirty="0">
                 <a:solidFill>
-                  <a:srgbClr val="1B1F27"/>
+                  <a:srgbClr val="CADCFC"/>
                 </a:solidFill>
-                <a:latin typeface="Cambria"/>
+                <a:latin typeface="Calibri" pitchFamily="34" charset="0"/>
+                <a:ea typeface="Calibri" pitchFamily="34" charset="-122"/>
+                <a:cs typeface="Calibri" pitchFamily="34" charset="-120"/>
               </a:rPr>
-              <a:t>Get set up</a:t>
+              <a:t>Northline Care — AI, operations, and the business model underneath it</a:t>
             </a:r>
+            <a:endParaRPr lang="en-US" sz="1800" dirty="0"/>
           </a:p>
         </p:txBody>
       </p:sp>
       <p:sp>
         <p:nvSpPr>
-          <p:cNvPr id="4" name="Rounded Rectangle 3"/>
+          <p:cNvPr id="4" name="Shape 2"/>
           <p:cNvSpPr/>
           <p:nvPr/>
         </p:nvSpPr>
         <p:spPr>
           <a:xfrm>
-            <a:off x="548640" y="1417320"/>
-            <a:ext cx="5318608" cy="1783080"/>
+            <a:off x="548640" y="4206240"/>
+            <a:ext cx="3454298" cy="1463040"/>
           </a:xfrm>
           <a:prstGeom prst="roundRect">
             <a:avLst>
-              <a:gd name="adj" fmla="val 3400"/>
+              <a:gd name="adj" fmla="val 5000"/>
             </a:avLst>
           </a:prstGeom>
           <a:solidFill>
-            <a:srgbClr val="F4F7FA"/>
+            <a:srgbClr val="1B2350"/>
           </a:solidFill>
-          <a:ln w="9525">
+          <a:ln w="12700">
             <a:solidFill>
-              <a:srgbClr val="D8E1EA"/>
+              <a:srgbClr val="1C7293"/>
             </a:solidFill>
+            <a:prstDash val="solid"/>
           </a:ln>
-          <a:effectLst/>
         </p:spPr>
-        <p:style>
-          <a:lnRef idx="1">
-            <a:schemeClr val="accent1"/>
-          </a:lnRef>
-          <a:fillRef idx="3">
-            <a:schemeClr val="accent1"/>
-          </a:fillRef>
-          <a:effectRef idx="2">
-            <a:schemeClr val="accent1"/>
-          </a:effectRef>
-          <a:fontRef idx="minor">
-            <a:schemeClr val="lt1"/>
-          </a:fontRef>
-        </p:style>
-        <p:txBody>
-          <a:bodyPr rtlCol="0" anchor="ctr"/>
-          <a:lstStyle/>
-          <a:p>
-            <a:pPr algn="ctr"/>
-          </a:p>
-        </p:txBody>
-      </p:sp>
-      <p:sp>
-        <p:nvSpPr>
-          <p:cNvPr id="5" name="TextBox 4"/>
+        <p:txBody>
+          <a:bodyPr/>
+          <a:p/>
+        </p:txBody>
+      </p:sp>
+      <p:sp>
+        <p:nvSpPr>
+          <p:cNvPr id="5" name="Text 3"/>
           <p:cNvSpPr txBox="1"/>
           <p:nvPr/>
         </p:nvSpPr>
         <p:spPr>
           <a:xfrm>
-            <a:off x="822960" y="1618488"/>
-            <a:ext cx="4769968" cy="365760"/>
+            <a:off x="777240" y="4370832"/>
+            <a:ext cx="2997098" cy="502920"/>
           </a:xfrm>
           <a:prstGeom prst="rect">
             <a:avLst/>
           </a:prstGeom>
           <a:noFill/>
+          <a:ln/>
         </p:spPr>
         <p:txBody>
-          <a:bodyPr wrap="square" lIns="0" rIns="0" tIns="0" bIns="0">
-            <a:spAutoFit/>
-          </a:bodyPr>
+          <a:bodyPr wrap="square" lIns="0" tIns="0" rIns="0" bIns="0" rtlCol="0" anchor="ctr"/>
           <a:lstStyle/>
           <a:p>
+            <a:pPr indent="0" marL="0">
+              <a:buNone/>
+            </a:pPr>
             <a:r>
-              <a:rPr sz="1700" b="1">
+              <a:rPr lang="en-US" sz="2400" b="1" dirty="0">
                 <a:solidFill>
-                  <a:srgbClr val="21295C"/>
+                  <a:srgbClr val="CADCFC"/>
                 </a:solidFill>
-                <a:latin typeface="Cambria"/>
+                <a:latin typeface="Cambria" pitchFamily="34" charset="0"/>
+                <a:ea typeface="Cambria" pitchFamily="34" charset="-122"/>
+                <a:cs typeface="Cambria" pitchFamily="34" charset="-120"/>
               </a:rPr>
-              <a:t>1. Claude Code, signed in</a:t>
+              <a:t>75 minutes</a:t>
             </a:r>
+            <a:endParaRPr lang="en-US" sz="2400" dirty="0"/>
           </a:p>
         </p:txBody>
       </p:sp>
       <p:sp>
         <p:nvSpPr>
-          <p:cNvPr id="6" name="TextBox 5"/>
+          <p:cNvPr id="6" name="Text 4"/>
           <p:cNvSpPr txBox="1"/>
           <p:nvPr/>
         </p:nvSpPr>
         <p:spPr>
           <a:xfrm>
-            <a:off x="822960" y="2029968"/>
-            <a:ext cx="4769968" cy="1078992"/>
+            <a:off x="777240" y="4892040"/>
+            <a:ext cx="2997098" cy="685800"/>
           </a:xfrm>
           <a:prstGeom prst="rect">
             <a:avLst/>
           </a:prstGeom>
           <a:noFill/>
+          <a:ln/>
         </p:spPr>
         <p:txBody>
-          <a:bodyPr wrap="square" lIns="0" rIns="0" tIns="0" bIns="0">
-            <a:spAutoFit/>
-          </a:bodyPr>
+          <a:bodyPr wrap="square" lIns="0" tIns="0" rIns="0" bIns="0" rtlCol="0" anchor="ctr"/>
           <a:lstStyle/>
           <a:p>
-            <a:pPr>
-              <a:spcAft>
-                <a:spcPts val="600"/>
-              </a:spcAft>
+            <a:pPr indent="0" marL="0">
+              <a:buNone/>
             </a:pPr>
             <a:r>
-              <a:rPr sz="1200">
+              <a:rPr lang="en-US" sz="1250" dirty="0">
                 <a:solidFill>
-                  <a:srgbClr val="5B6472"/>
+                  <a:srgbClr val="FFFFFF"/>
                 </a:solidFill>
-                <a:latin typeface="Calibri"/>
+                <a:latin typeface="Calibri" pitchFamily="34" charset="0"/>
+                <a:ea typeface="Calibri" pitchFamily="34" charset="-122"/>
+                <a:cs typeface="Calibri" pitchFamily="34" charset="-120"/>
               </a:rPr>
-              <a:t>Install the command-line tool and sign in with your Claude account. In a terminal, </a:t>
+              <a:t>paper case, live tools, a board meeting</a:t>
             </a:r>
-            <a:r>
-              <a:rPr sz="1200" b="1">
-                <a:solidFill>
-                  <a:srgbClr val="1C7293"/>
-                </a:solidFill>
-                <a:latin typeface="Consolas"/>
-              </a:rPr>
-              <a:t>claude --version</a:t>
-            </a:r>
-            <a:r>
-              <a:rPr sz="1200">
-                <a:solidFill>
-                  <a:srgbClr val="5B6472"/>
-                </a:solidFill>
-                <a:latin typeface="Calibri"/>
-              </a:rPr>
-              <a:t> should print a version.</a:t>
-            </a:r>
+            <a:endParaRPr lang="en-US" sz="1250" dirty="0"/>
           </a:p>
-          <a:p>
-            <a:pPr>
-              <a:spcAft>
-                <a:spcPts val="600"/>
-              </a:spcAft>
-            </a:pPr>
-            <a:r>
-              <a:rPr sz="1200">
-                <a:solidFill>
-                  <a:srgbClr val="5B6472"/>
-                </a:solidFill>
-                <a:latin typeface="Calibri"/>
-              </a:rPr>
-              <a:t>Windows: use the native installer, not npm. Use PowerShell for the commands below.</a:t>
-            </a:r>
-          </a:p>
-        </p:txBody>
-      </p:sp>
-      <p:sp>
-        <p:nvSpPr>
-          <p:cNvPr id="7" name="Rounded Rectangle 6"/>
+        </p:txBody>
+      </p:sp>
+      <p:sp>
+        <p:nvSpPr>
+          <p:cNvPr id="7" name="Shape 5"/>
           <p:cNvSpPr/>
           <p:nvPr/>
         </p:nvSpPr>
         <p:spPr>
           <a:xfrm>
-            <a:off x="6324448" y="1417320"/>
-            <a:ext cx="5318608" cy="1783080"/>
+            <a:off x="4368698" y="4206240"/>
+            <a:ext cx="3454298" cy="1463040"/>
           </a:xfrm>
           <a:prstGeom prst="roundRect">
             <a:avLst>
-              <a:gd name="adj" fmla="val 3400"/>
+              <a:gd name="adj" fmla="val 5000"/>
             </a:avLst>
           </a:prstGeom>
           <a:solidFill>
-            <a:srgbClr val="F4F7FA"/>
+            <a:srgbClr val="1B2350"/>
           </a:solidFill>
-          <a:ln w="9525">
+          <a:ln w="12700">
             <a:solidFill>
-              <a:srgbClr val="D8E1EA"/>
+              <a:srgbClr val="1C7293"/>
             </a:solidFill>
+            <a:prstDash val="solid"/>
           </a:ln>
-          <a:effectLst/>
         </p:spPr>
-        <p:style>
-          <a:lnRef idx="1">
-            <a:schemeClr val="accent1"/>
-          </a:lnRef>
-          <a:fillRef idx="3">
-            <a:schemeClr val="accent1"/>
-          </a:fillRef>
-          <a:effectRef idx="2">
-            <a:schemeClr val="accent1"/>
-          </a:effectRef>
-          <a:fontRef idx="minor">
-            <a:schemeClr val="lt1"/>
-          </a:fontRef>
-        </p:style>
-        <p:txBody>
-          <a:bodyPr rtlCol="0" anchor="ctr"/>
-          <a:lstStyle/>
-          <a:p>
-            <a:pPr algn="ctr"/>
-          </a:p>
-        </p:txBody>
-      </p:sp>
-      <p:sp>
-        <p:nvSpPr>
-          <p:cNvPr id="8" name="TextBox 7"/>
+        <p:txBody>
+          <a:bodyPr/>
+          <a:p/>
+        </p:txBody>
+      </p:sp>
+      <p:sp>
+        <p:nvSpPr>
+          <p:cNvPr id="8" name="Text 6"/>
           <p:cNvSpPr txBox="1"/>
           <p:nvPr/>
         </p:nvSpPr>
         <p:spPr>
           <a:xfrm>
-            <a:off x="6598768" y="1618488"/>
-            <a:ext cx="4769968" cy="365760"/>
+            <a:off x="4597298" y="4370832"/>
+            <a:ext cx="2997098" cy="502920"/>
           </a:xfrm>
           <a:prstGeom prst="rect">
             <a:avLst/>
           </a:prstGeom>
           <a:noFill/>
+          <a:ln/>
         </p:spPr>
         <p:txBody>
-          <a:bodyPr wrap="square" lIns="0" rIns="0" tIns="0" bIns="0">
-            <a:spAutoFit/>
-          </a:bodyPr>
+          <a:bodyPr wrap="square" lIns="0" tIns="0" rIns="0" bIns="0" rtlCol="0" anchor="ctr"/>
           <a:lstStyle/>
           <a:p>
+            <a:pPr indent="0" marL="0">
+              <a:buNone/>
+            </a:pPr>
             <a:r>
-              <a:rPr sz="1700" b="1">
+              <a:rPr lang="en-US" sz="2400" b="1" dirty="0">
                 <a:solidFill>
-                  <a:srgbClr val="21295C"/>
+                  <a:srgbClr val="CADCFC"/>
                 </a:solidFill>
-                <a:latin typeface="Cambria"/>
+                <a:latin typeface="Cambria" pitchFamily="34" charset="0"/>
+                <a:ea typeface="Cambria" pitchFamily="34" charset="-122"/>
+                <a:cs typeface="Cambria" pitchFamily="34" charset="-120"/>
               </a:rPr>
-              <a:t>2. The course folder</a:t>
+              <a:t>Two roles</a:t>
             </a:r>
+            <a:endParaRPr lang="en-US" sz="2400" dirty="0"/>
           </a:p>
         </p:txBody>
       </p:sp>
       <p:sp>
         <p:nvSpPr>
-          <p:cNvPr id="9" name="TextBox 8"/>
+          <p:cNvPr id="9" name="Text 7"/>
           <p:cNvSpPr txBox="1"/>
           <p:nvPr/>
         </p:nvSpPr>
         <p:spPr>
           <a:xfrm>
-            <a:off x="6598768" y="2029968"/>
-            <a:ext cx="4769968" cy="1078992"/>
+            <a:off x="4597298" y="4892040"/>
+            <a:ext cx="2997098" cy="685800"/>
           </a:xfrm>
           <a:prstGeom prst="rect">
             <a:avLst/>
           </a:prstGeom>
           <a:noFill/>
+          <a:ln/>
         </p:spPr>
         <p:txBody>
-          <a:bodyPr wrap="square" lIns="0" rIns="0" tIns="0" bIns="0">
-            <a:spAutoFit/>
-          </a:bodyPr>
+          <a:bodyPr wrap="square" lIns="0" tIns="0" rIns="0" bIns="0" rtlCol="0" anchor="ctr"/>
           <a:lstStyle/>
           <a:p>
-            <a:pPr>
-              <a:spcAft>
-                <a:spcPts val="600"/>
-              </a:spcAft>
+            <a:pPr indent="0" marL="0">
+              <a:buNone/>
             </a:pPr>
             <a:r>
-              <a:rPr sz="1200">
+              <a:rPr lang="en-US" sz="1250" dirty="0">
                 <a:solidFill>
-                  <a:srgbClr val="5B6472"/>
+                  <a:srgbClr val="FFFFFF"/>
                 </a:solidFill>
-                <a:latin typeface="Calibri"/>
+                <a:latin typeface="Calibri" pitchFamily="34" charset="0"/>
+                <a:ea typeface="Calibri" pitchFamily="34" charset="-122"/>
+                <a:cs typeface="Calibri" pitchFamily="34" charset="-120"/>
               </a:rPr>
-              <a:t>Open the link at the bottom, click </a:t>
+              <a:t>Room reads and asks; Screen drives the machine</a:t>
             </a:r>
-            <a:r>
-              <a:rPr sz="1200" b="1">
-                <a:solidFill>
-                  <a:srgbClr val="5B6472"/>
-                </a:solidFill>
-                <a:latin typeface="Calibri"/>
-              </a:rPr>
-              <a:t>Code → Download ZIP</a:t>
-            </a:r>
-            <a:r>
-              <a:rPr sz="1200">
-                <a:solidFill>
-                  <a:srgbClr val="5B6472"/>
-                </a:solidFill>
-                <a:latin typeface="Calibri"/>
-              </a:rPr>
-              <a:t>, and unzip it into your home folder. It should be called </a:t>
-            </a:r>
-            <a:r>
-              <a:rPr sz="1200" b="1">
-                <a:solidFill>
-                  <a:srgbClr val="1C7293"/>
-                </a:solidFill>
-                <a:latin typeface="Consolas"/>
-              </a:rPr>
-              <a:t>northline-course</a:t>
-            </a:r>
-            <a:r>
-              <a:rPr sz="1200">
-                <a:solidFill>
-                  <a:srgbClr val="5B6472"/>
-                </a:solidFill>
-                <a:latin typeface="Calibri"/>
-              </a:rPr>
-              <a:t>.</a:t>
-            </a:r>
+            <a:endParaRPr lang="en-US" sz="1250" dirty="0"/>
           </a:p>
-          <a:p>
-            <a:pPr>
-              <a:spcAft>
-                <a:spcPts val="600"/>
-              </a:spcAft>
-            </a:pPr>
-            <a:r>
-              <a:rPr sz="1200">
-                <a:solidFill>
-                  <a:srgbClr val="5B6472"/>
-                </a:solidFill>
-                <a:latin typeface="Calibri"/>
-              </a:rPr>
-              <a:t>Or, if you have git: </a:t>
-            </a:r>
-            <a:r>
-              <a:rPr sz="1200" b="1">
-                <a:solidFill>
-                  <a:srgbClr val="1C7293"/>
-                </a:solidFill>
-                <a:latin typeface="Consolas"/>
-              </a:rPr>
-              <a:t>git clone &lt;the link&gt;</a:t>
-            </a:r>
-          </a:p>
-        </p:txBody>
-      </p:sp>
-      <p:sp>
-        <p:nvSpPr>
-          <p:cNvPr id="10" name="Rounded Rectangle 9"/>
+        </p:txBody>
+      </p:sp>
+      <p:sp>
+        <p:nvSpPr>
+          <p:cNvPr id="10" name="Shape 8"/>
           <p:cNvSpPr/>
           <p:nvPr/>
         </p:nvSpPr>
         <p:spPr>
           <a:xfrm>
-            <a:off x="548640" y="3429000"/>
-            <a:ext cx="5318608" cy="1783080"/>
+            <a:off x="8188757" y="4206240"/>
+            <a:ext cx="3454298" cy="1463040"/>
           </a:xfrm>
           <a:prstGeom prst="roundRect">
             <a:avLst>
-              <a:gd name="adj" fmla="val 3400"/>
+              <a:gd name="adj" fmla="val 5000"/>
             </a:avLst>
           </a:prstGeom>
           <a:solidFill>
-            <a:srgbClr val="F4F7FA"/>
+            <a:srgbClr val="1B2350"/>
           </a:solidFill>
-          <a:ln w="9525">
+          <a:ln w="12700">
             <a:solidFill>
-              <a:srgbClr val="D8E1EA"/>
+              <a:srgbClr val="1C7293"/>
             </a:solidFill>
+            <a:prstDash val="solid"/>
           </a:ln>
-          <a:effectLst/>
         </p:spPr>
-        <p:style>
-          <a:lnRef idx="1">
-            <a:schemeClr val="accent1"/>
-          </a:lnRef>
-          <a:fillRef idx="3">
-            <a:schemeClr val="accent1"/>
-          </a:fillRef>
-          <a:effectRef idx="2">
-            <a:schemeClr val="accent1"/>
-          </a:effectRef>
-          <a:fontRef idx="minor">
-            <a:schemeClr val="lt1"/>
-          </a:fontRef>
-        </p:style>
-        <p:txBody>
-          <a:bodyPr rtlCol="0" anchor="ctr"/>
-          <a:lstStyle/>
-          <a:p>
-            <a:pPr algn="ctr"/>
-          </a:p>
-        </p:txBody>
-      </p:sp>
-      <p:sp>
-        <p:nvSpPr>
-          <p:cNvPr id="11" name="TextBox 10"/>
+        <p:txBody>
+          <a:bodyPr/>
+          <a:p/>
+        </p:txBody>
+      </p:sp>
+      <p:sp>
+        <p:nvSpPr>
+          <p:cNvPr id="11" name="Text 9"/>
           <p:cNvSpPr txBox="1"/>
           <p:nvPr/>
         </p:nvSpPr>
         <p:spPr>
           <a:xfrm>
-            <a:off x="822960" y="3630168"/>
-            <a:ext cx="4769968" cy="365760"/>
+            <a:off x="8417357" y="4370832"/>
+            <a:ext cx="2997098" cy="502920"/>
           </a:xfrm>
           <a:prstGeom prst="rect">
             <a:avLst/>
           </a:prstGeom>
           <a:noFill/>
+          <a:ln/>
         </p:spPr>
         <p:txBody>
-          <a:bodyPr wrap="square" lIns="0" rIns="0" tIns="0" bIns="0">
-            <a:spAutoFit/>
-          </a:bodyPr>
+          <a:bodyPr wrap="square" lIns="0" tIns="0" rIns="0" bIns="0" rtlCol="0" anchor="ctr"/>
           <a:lstStyle/>
           <a:p>
+            <a:pPr indent="0" marL="0">
+              <a:buNone/>
+            </a:pPr>
             <a:r>
-              <a:rPr sz="1700" b="1">
+              <a:rPr lang="en-US" sz="2400" b="1" dirty="0">
                 <a:solidFill>
-                  <a:srgbClr val="21295C"/>
+                  <a:srgbClr val="CADCFC"/>
                 </a:solidFill>
-                <a:latin typeface="Cambria"/>
+                <a:latin typeface="Cambria" pitchFamily="34" charset="0"/>
+                <a:ea typeface="Cambria" pitchFamily="34" charset="-122"/>
+                <a:cs typeface="Cambria" pitchFamily="34" charset="-120"/>
               </a:rPr>
-              <a:t>3. /setup</a:t>
+              <a:t>Two commands</a:t>
             </a:r>
+            <a:endParaRPr lang="en-US" sz="2400" dirty="0"/>
           </a:p>
         </p:txBody>
       </p:sp>
       <p:sp>
         <p:nvSpPr>
-          <p:cNvPr id="12" name="TextBox 11"/>
+          <p:cNvPr id="12" name="Text 10"/>
           <p:cNvSpPr txBox="1"/>
           <p:nvPr/>
         </p:nvSpPr>
         <p:spPr>
           <a:xfrm>
-            <a:off x="822960" y="4041648"/>
-            <a:ext cx="4769968" cy="1078992"/>
+            <a:off x="8417357" y="4892040"/>
+            <a:ext cx="2997098" cy="685800"/>
           </a:xfrm>
           <a:prstGeom prst="rect">
             <a:avLst/>
           </a:prstGeom>
           <a:noFill/>
+          <a:ln/>
         </p:spPr>
         <p:txBody>
-          <a:bodyPr wrap="square" lIns="0" rIns="0" tIns="0" bIns="0">
-            <a:spAutoFit/>
-          </a:bodyPr>
+          <a:bodyPr wrap="square" lIns="0" tIns="0" rIns="0" bIns="0" rtlCol="0" anchor="ctr"/>
           <a:lstStyle/>
           <a:p>
-            <a:pPr>
-              <a:spcAft>
-                <a:spcPts val="600"/>
-              </a:spcAft>
+            <a:pPr indent="0" marL="0">
+              <a:buNone/>
             </a:pPr>
             <a:r>
-              <a:rPr sz="1200">
-                <a:solidFill>
-                  <a:srgbClr val="5B6472"/>
-                </a:solidFill>
-                <a:latin typeface="Calibri"/>
-              </a:rPr>
-              <a:t>Terminal: </a:t>
-            </a:r>
-            <a:r>
-              <a:rPr sz="1200" b="1">
-                <a:solidFill>
-                  <a:srgbClr val="1C7293"/>
-                </a:solidFill>
-                <a:latin typeface="Consolas"/>
-              </a:rPr>
-              <a:t>cd ~/northline-course</a:t>
-            </a:r>
-            <a:r>
-              <a:rPr sz="1200">
-                <a:solidFill>
-                  <a:srgbClr val="5B6472"/>
-                </a:solidFill>
-                <a:latin typeface="Calibri"/>
-              </a:rPr>
-              <a:t> then </a:t>
-            </a:r>
-            <a:r>
-              <a:rPr sz="1200" b="1">
-                <a:solidFill>
-                  <a:srgbClr val="1C7293"/>
-                </a:solidFill>
-                <a:latin typeface="Consolas"/>
-              </a:rPr>
-              <a:t>claude</a:t>
-            </a:r>
-            <a:r>
-              <a:rPr sz="1200">
-                <a:solidFill>
-                  <a:srgbClr val="5B6472"/>
-                </a:solidFill>
-                <a:latin typeface="Calibri"/>
-              </a:rPr>
-              <a:t>. Type </a:t>
-            </a:r>
-            <a:r>
-              <a:rPr sz="1200" b="1">
-                <a:solidFill>
-                  <a:srgbClr val="1C7293"/>
-                </a:solidFill>
-                <a:latin typeface="Consolas"/>
-              </a:rPr>
-              <a:t>/setup</a:t>
-            </a:r>
-            <a:r>
-              <a:rPr sz="1200">
-                <a:solidFill>
-                  <a:srgbClr val="5B6472"/>
-                </a:solidFill>
-                <a:latin typeface="Calibri"/>
-              </a:rPr>
-              <a:t>. It installs uv, runs the checks, and prints a </a:t>
-            </a:r>
-            <a:r>
-              <a:rPr sz="1200" b="1">
-                <a:solidFill>
-                  <a:srgbClr val="1C7293"/>
-                </a:solidFill>
-                <a:latin typeface="Consolas"/>
-              </a:rPr>
-              <a:t>READY:</a:t>
-            </a:r>
-            <a:r>
-              <a:rPr sz="1200">
-                <a:solidFill>
-                  <a:srgbClr val="5B6472"/>
-                </a:solidFill>
-                <a:latin typeface="Calibri"/>
-              </a:rPr>
-              <a:t> line.</a:t>
-            </a:r>
-          </a:p>
-          <a:p>
-            <a:pPr>
-              <a:spcAft>
-                <a:spcPts val="600"/>
-              </a:spcAft>
-            </a:pPr>
-            <a:r>
-              <a:rPr sz="1200">
-                <a:solidFill>
-                  <a:srgbClr val="5B6472"/>
-                </a:solidFill>
-                <a:latin typeface="Calibri"/>
-              </a:rPr>
-              <a:t>Then quit, run </a:t>
-            </a:r>
-            <a:r>
-              <a:rPr sz="1200" b="1">
-                <a:solidFill>
-                  <a:srgbClr val="1C7293"/>
-                </a:solidFill>
-                <a:latin typeface="Consolas"/>
-              </a:rPr>
-              <a:t>claude</a:t>
-            </a:r>
-            <a:r>
-              <a:rPr sz="1200">
-                <a:solidFill>
-                  <a:srgbClr val="5B6472"/>
-                </a:solidFill>
-                <a:latin typeface="Calibri"/>
-              </a:rPr>
-              <a:t> again in the same folder, and approve the </a:t>
-            </a:r>
-            <a:r>
-              <a:rPr sz="1200" b="1">
-                <a:solidFill>
-                  <a:srgbClr val="1C7293"/>
-                </a:solidFill>
-                <a:latin typeface="Consolas"/>
-              </a:rPr>
-              <a:t>northline</a:t>
-            </a:r>
-            <a:r>
-              <a:rPr sz="1200">
-                <a:solidFill>
-                  <a:srgbClr val="5B6472"/>
-                </a:solidFill>
-                <a:latin typeface="Calibri"/>
-              </a:rPr>
-              <a:t> server when asked.</a:t>
-            </a:r>
-          </a:p>
-        </p:txBody>
-      </p:sp>
-      <p:sp>
-        <p:nvSpPr>
-          <p:cNvPr id="13" name="Rounded Rectangle 12"/>
-          <p:cNvSpPr/>
-          <p:nvPr/>
-        </p:nvSpPr>
-        <p:spPr>
-          <a:xfrm>
-            <a:off x="6324448" y="3429000"/>
-            <a:ext cx="5318608" cy="1783080"/>
-          </a:xfrm>
-          <a:prstGeom prst="roundRect">
-            <a:avLst>
-              <a:gd name="adj" fmla="val 3400"/>
-            </a:avLst>
-          </a:prstGeom>
-          <a:solidFill>
-            <a:srgbClr val="F4F7FA"/>
-          </a:solidFill>
-          <a:ln w="9525">
-            <a:solidFill>
-              <a:srgbClr val="D8E1EA"/>
-            </a:solidFill>
-          </a:ln>
-          <a:effectLst/>
-        </p:spPr>
-        <p:style>
-          <a:lnRef idx="1">
-            <a:schemeClr val="accent1"/>
-          </a:lnRef>
-          <a:fillRef idx="3">
-            <a:schemeClr val="accent1"/>
-          </a:fillRef>
-          <a:effectRef idx="2">
-            <a:schemeClr val="accent1"/>
-          </a:effectRef>
-          <a:fontRef idx="minor">
-            <a:schemeClr val="lt1"/>
-          </a:fontRef>
-        </p:style>
-        <p:txBody>
-          <a:bodyPr rtlCol="0" anchor="ctr"/>
-          <a:lstStyle/>
-          <a:p>
-            <a:pPr algn="ctr"/>
-          </a:p>
-        </p:txBody>
-      </p:sp>
-      <p:sp>
-        <p:nvSpPr>
-          <p:cNvPr id="14" name="TextBox 13"/>
-          <p:cNvSpPr txBox="1"/>
-          <p:nvPr/>
-        </p:nvSpPr>
-        <p:spPr>
-          <a:xfrm>
-            <a:off x="6598768" y="3630168"/>
-            <a:ext cx="4769968" cy="365760"/>
-          </a:xfrm>
-          <a:prstGeom prst="rect">
-            <a:avLst/>
-          </a:prstGeom>
-          <a:noFill/>
-        </p:spPr>
-        <p:txBody>
-          <a:bodyPr wrap="square" lIns="0" rIns="0" tIns="0" bIns="0">
-            <a:spAutoFit/>
-          </a:bodyPr>
-          <a:lstStyle/>
-          <a:p>
-            <a:r>
-              <a:rPr sz="1700" b="1">
-                <a:solidFill>
-                  <a:srgbClr val="21295C"/>
-                </a:solidFill>
-                <a:latin typeface="Cambria"/>
-              </a:rPr>
-              <a:t>4. The server, in a second window</a:t>
-            </a:r>
-          </a:p>
-        </p:txBody>
-      </p:sp>
-      <p:sp>
-        <p:nvSpPr>
-          <p:cNvPr id="15" name="TextBox 14"/>
-          <p:cNvSpPr txBox="1"/>
-          <p:nvPr/>
-        </p:nvSpPr>
-        <p:spPr>
-          <a:xfrm>
-            <a:off x="6598768" y="4041648"/>
-            <a:ext cx="4769968" cy="1078992"/>
-          </a:xfrm>
-          <a:prstGeom prst="rect">
-            <a:avLst/>
-          </a:prstGeom>
-          <a:noFill/>
-        </p:spPr>
-        <p:txBody>
-          <a:bodyPr wrap="square" lIns="0" rIns="0" tIns="0" bIns="0">
-            <a:spAutoFit/>
-          </a:bodyPr>
-          <a:lstStyle/>
-          <a:p>
-            <a:pPr>
-              <a:spcAft>
-                <a:spcPts val="600"/>
-              </a:spcAft>
-            </a:pPr>
-            <a:r>
-              <a:rPr sz="1200">
-                <a:solidFill>
-                  <a:srgbClr val="5B6472"/>
-                </a:solidFill>
-                <a:latin typeface="Calibri"/>
-              </a:rPr>
-              <a:t>New terminal window: </a:t>
-            </a:r>
-            <a:r>
-              <a:rPr sz="1200" b="1">
-                <a:solidFill>
-                  <a:srgbClr val="1C7293"/>
-                </a:solidFill>
-                <a:latin typeface="Consolas"/>
-              </a:rPr>
-              <a:t>cd ~/northline-course</a:t>
-            </a:r>
-            <a:r>
-              <a:rPr sz="1200">
-                <a:solidFill>
-                  <a:srgbClr val="5B6472"/>
-                </a:solidFill>
-                <a:latin typeface="Calibri"/>
-              </a:rPr>
-              <a:t> then </a:t>
-            </a:r>
-            <a:r>
-              <a:rPr sz="1200" b="1">
-                <a:solidFill>
-                  <a:srgbClr val="1C7293"/>
-                </a:solidFill>
-                <a:latin typeface="Consolas"/>
-              </a:rPr>
-              <a:t>uv run python -m northline.agent.server</a:t>
-            </a:r>
-            <a:r>
-              <a:rPr sz="1200">
-                <a:solidFill>
-                  <a:srgbClr val="5B6472"/>
-                </a:solidFill>
-                <a:latin typeface="Calibri"/>
-              </a:rPr>
-              <a:t>. Leave it open.</a:t>
-            </a:r>
-          </a:p>
-          <a:p>
-            <a:pPr>
-              <a:spcAft>
-                <a:spcPts val="600"/>
-              </a:spcAft>
-            </a:pPr>
-            <a:r>
-              <a:rPr sz="1200">
-                <a:solidFill>
-                  <a:srgbClr val="5B6472"/>
-                </a:solidFill>
-                <a:latin typeface="Calibri"/>
-              </a:rPr>
-              <a:t>Open </a:t>
-            </a:r>
-            <a:r>
-              <a:rPr sz="1200" b="1">
-                <a:solidFill>
-                  <a:srgbClr val="1C7293"/>
-                </a:solidFill>
-                <a:latin typeface="Consolas"/>
-              </a:rPr>
-              <a:t>127.0.0.1:8765</a:t>
-            </a:r>
-            <a:r>
-              <a:rPr sz="1200">
-                <a:solidFill>
-                  <a:srgbClr val="5B6472"/>
-                </a:solidFill>
-                <a:latin typeface="Calibri"/>
-              </a:rPr>
-              <a:t> and text the agent </a:t>
-            </a:r>
-            <a:r>
-              <a:rPr sz="1200" b="1">
-                <a:solidFill>
-                  <a:srgbClr val="5B6472"/>
-                </a:solidFill>
-                <a:latin typeface="Calibri"/>
-              </a:rPr>
-              <a:t>“my BP was 184/112”</a:t>
-            </a:r>
-            <a:r>
-              <a:rPr sz="1200">
-                <a:solidFill>
-                  <a:srgbClr val="5B6472"/>
-                </a:solidFill>
-                <a:latin typeface="Calibri"/>
-              </a:rPr>
-              <a:t>. Dashboard: </a:t>
-            </a:r>
-            <a:r>
-              <a:rPr sz="1200" b="1">
-                <a:solidFill>
-                  <a:srgbClr val="1C7293"/>
-                </a:solidFill>
-                <a:latin typeface="Consolas"/>
-              </a:rPr>
-              <a:t>127.0.0.1:8765/dashboard</a:t>
-            </a:r>
-          </a:p>
-        </p:txBody>
-      </p:sp>
-      <p:sp>
-        <p:nvSpPr>
-          <p:cNvPr id="16" name="Rounded Rectangle 15"/>
-          <p:cNvSpPr/>
-          <p:nvPr/>
-        </p:nvSpPr>
-        <p:spPr>
-          <a:xfrm>
-            <a:off x="548640" y="5440680"/>
-            <a:ext cx="11094415" cy="822960"/>
-          </a:xfrm>
-          <a:prstGeom prst="roundRect">
-            <a:avLst>
-              <a:gd name="adj" fmla="val 3400"/>
-            </a:avLst>
-          </a:prstGeom>
-          <a:solidFill>
-            <a:srgbClr val="065A82"/>
-          </a:solidFill>
-          <a:ln>
-            <a:noFill/>
-          </a:ln>
-          <a:effectLst/>
-        </p:spPr>
-        <p:style>
-          <a:lnRef idx="1">
-            <a:schemeClr val="accent1"/>
-          </a:lnRef>
-          <a:fillRef idx="3">
-            <a:schemeClr val="accent1"/>
-          </a:fillRef>
-          <a:effectRef idx="2">
-            <a:schemeClr val="accent1"/>
-          </a:effectRef>
-          <a:fontRef idx="minor">
-            <a:schemeClr val="lt1"/>
-          </a:fontRef>
-        </p:style>
-        <p:txBody>
-          <a:bodyPr rtlCol="0" anchor="ctr"/>
-          <a:lstStyle/>
-          <a:p>
-            <a:pPr algn="ctr"/>
-          </a:p>
-        </p:txBody>
-      </p:sp>
-      <p:sp>
-        <p:nvSpPr>
-          <p:cNvPr id="17" name="TextBox 16"/>
-          <p:cNvSpPr txBox="1"/>
-          <p:nvPr/>
-        </p:nvSpPr>
-        <p:spPr>
-          <a:xfrm>
-            <a:off x="868680" y="5568696"/>
-            <a:ext cx="7040880" cy="320040"/>
-          </a:xfrm>
-          <a:prstGeom prst="rect">
-            <a:avLst/>
-          </a:prstGeom>
-          <a:noFill/>
-        </p:spPr>
-        <p:txBody>
-          <a:bodyPr wrap="square" lIns="0" rIns="0" tIns="0" bIns="0">
-            <a:spAutoFit/>
-          </a:bodyPr>
-          <a:lstStyle/>
-          <a:p>
-            <a:r>
-              <a:rPr sz="1100" b="1">
-                <a:solidFill>
-                  <a:srgbClr val="CADCFC"/>
-                </a:solidFill>
-                <a:latin typeface="Calibri"/>
-              </a:rPr>
-              <a:t>The folder</a:t>
-            </a:r>
-          </a:p>
-        </p:txBody>
-      </p:sp>
-      <p:sp>
-        <p:nvSpPr>
-          <p:cNvPr id="18" name="TextBox 17"/>
-          <p:cNvSpPr txBox="1"/>
-          <p:nvPr/>
-        </p:nvSpPr>
-        <p:spPr>
-          <a:xfrm>
-            <a:off x="868680" y="5843016"/>
-            <a:ext cx="7040880" cy="411480"/>
-          </a:xfrm>
-          <a:prstGeom prst="rect">
-            <a:avLst/>
-          </a:prstGeom>
-          <a:noFill/>
-        </p:spPr>
-        <p:txBody>
-          <a:bodyPr wrap="square" lIns="0" rIns="0" tIns="0" bIns="0">
-            <a:spAutoFit/>
-          </a:bodyPr>
-          <a:lstStyle/>
-          <a:p>
-            <a:r>
-              <a:rPr sz="1800" b="1">
+              <a:rPr lang="en-US" sz="1250" dirty="0">
                 <a:solidFill>
                   <a:srgbClr val="FFFFFF"/>
                 </a:solidFill>
-                <a:latin typeface="Consolas"/>
+                <a:latin typeface="Calibri" pitchFamily="34" charset="0"/>
+                <a:ea typeface="Calibri" pitchFamily="34" charset="-122"/>
+                <a:cs typeface="Calibri" pitchFamily="34" charset="-120"/>
               </a:rPr>
-              <a:t>github.com/anthonymorrisjohnson/northline-course</a:t>
+              <a:t>/pm-run and /deploy triage, all session</a:t>
             </a:r>
-          </a:p>
-        </p:txBody>
-      </p:sp>
-      <p:sp>
-        <p:nvSpPr>
-          <p:cNvPr id="19" name="TextBox 18"/>
-          <p:cNvSpPr txBox="1"/>
-          <p:nvPr/>
-        </p:nvSpPr>
-        <p:spPr>
-          <a:xfrm>
-            <a:off x="8138160" y="5568696"/>
-            <a:ext cx="3200400" cy="320040"/>
-          </a:xfrm>
-          <a:prstGeom prst="rect">
-            <a:avLst/>
-          </a:prstGeom>
-          <a:noFill/>
-        </p:spPr>
-        <p:txBody>
-          <a:bodyPr wrap="square" lIns="0" rIns="0" tIns="0" bIns="0">
-            <a:spAutoFit/>
-          </a:bodyPr>
-          <a:lstStyle/>
-          <a:p>
-            <a:r>
-              <a:rPr sz="1100" b="1">
-                <a:solidFill>
-                  <a:srgbClr val="CADCFC"/>
-                </a:solidFill>
-                <a:latin typeface="Calibri"/>
-              </a:rPr>
-              <a:t>In the room</a:t>
-            </a:r>
-          </a:p>
-        </p:txBody>
-      </p:sp>
-      <p:sp>
-        <p:nvSpPr>
-          <p:cNvPr id="20" name="TextBox 19"/>
-          <p:cNvSpPr txBox="1"/>
-          <p:nvPr/>
-        </p:nvSpPr>
-        <p:spPr>
-          <a:xfrm>
-            <a:off x="8138160" y="5843016"/>
-            <a:ext cx="3200400" cy="411480"/>
-          </a:xfrm>
-          <a:prstGeom prst="rect">
-            <a:avLst/>
-          </a:prstGeom>
-          <a:noFill/>
-        </p:spPr>
-        <p:txBody>
-          <a:bodyPr wrap="square" lIns="0" rIns="0" tIns="0" bIns="0">
-            <a:spAutoFit/>
-          </a:bodyPr>
-          <a:lstStyle/>
-          <a:p>
-            <a:r>
-              <a:rPr sz="1500" b="1">
-                <a:solidFill>
-                  <a:srgbClr val="FFFFFF"/>
-                </a:solidFill>
-                <a:latin typeface="Consolas"/>
-              </a:rPr>
-              <a:t>/pm-run</a:t>
-            </a:r>
-            <a:r>
-              <a:rPr sz="1200">
-                <a:solidFill>
-                  <a:srgbClr val="CADCFC"/>
-                </a:solidFill>
-                <a:latin typeface="Calibri"/>
-              </a:rPr>
-              <a:t>   then   </a:t>
-            </a:r>
-            <a:r>
-              <a:rPr sz="1500" b="1">
-                <a:solidFill>
-                  <a:srgbClr val="FFFFFF"/>
-                </a:solidFill>
-                <a:latin typeface="Consolas"/>
-              </a:rPr>
-              <a:t>/deploy triage</a:t>
-            </a:r>
-          </a:p>
-        </p:txBody>
-      </p:sp>
-      <p:sp>
-        <p:nvSpPr>
-          <p:cNvPr id="21" name="TextBox 20"/>
-          <p:cNvSpPr txBox="1"/>
-          <p:nvPr/>
-        </p:nvSpPr>
-        <p:spPr>
-          <a:xfrm>
-            <a:off x="9265615" y="6400800"/>
-            <a:ext cx="2377440" cy="274320"/>
-          </a:xfrm>
-          <a:prstGeom prst="rect">
-            <a:avLst/>
-          </a:prstGeom>
-          <a:noFill/>
-        </p:spPr>
-        <p:txBody>
-          <a:bodyPr wrap="square" lIns="0" rIns="0" tIns="0" bIns="0">
-            <a:spAutoFit/>
-          </a:bodyPr>
-          <a:lstStyle/>
-          <a:p>
-            <a:pPr algn="r"/>
-            <a:r>
-              <a:rPr sz="1000">
-                <a:solidFill>
-                  <a:srgbClr val="5B6472"/>
-                </a:solidFill>
-                <a:latin typeface="Calibri"/>
-              </a:rPr>
-              <a:t>Northline Care  ·  1</a:t>
-            </a:r>
+            <a:endParaRPr lang="en-US" sz="1250" dirty="0"/>
           </a:p>
         </p:txBody>
       </p:sp>
@@ -9611,7 +9603,7 @@
 </p:sld>
 </file>
 
-<file path=ppt/slides/slide2.xml><?xml version="1.0" encoding="utf-8"?>
+<file path=ppt/slides/slide3.xml><?xml version="1.0" encoding="utf-8"?>
 <p:sld xmlns:a="http://schemas.openxmlformats.org/drawingml/2006/main" xmlns:r="http://schemas.openxmlformats.org/officeDocument/2006/relationships" xmlns:p="http://schemas.openxmlformats.org/presentationml/2006/main">
   <p:cSld name="Slide 2">
     <p:bg>
@@ -10026,7 +10018,7 @@
 </p:sld>
 </file>
 
-<file path=ppt/slides/slide3.xml><?xml version="1.0" encoding="utf-8"?>
+<file path=ppt/slides/slide4.xml><?xml version="1.0" encoding="utf-8"?>
 <p:sld xmlns:a="http://schemas.openxmlformats.org/drawingml/2006/main" xmlns:r="http://schemas.openxmlformats.org/officeDocument/2006/relationships" xmlns:p="http://schemas.openxmlformats.org/presentationml/2006/main">
   <p:cSld name="Slide 3">
     <p:bg>
@@ -10886,7 +10878,7 @@
 </p:sld>
 </file>
 
-<file path=ppt/slides/slide4.xml><?xml version="1.0" encoding="utf-8"?>
+<file path=ppt/slides/slide5.xml><?xml version="1.0" encoding="utf-8"?>
 <p:sld xmlns:a="http://schemas.openxmlformats.org/drawingml/2006/main" xmlns:r="http://schemas.openxmlformats.org/officeDocument/2006/relationships" xmlns:p="http://schemas.openxmlformats.org/presentationml/2006/main">
   <p:cSld name="Slide 4">
     <p:bg>
@@ -12416,7 +12408,7 @@
 </p:sld>
 </file>
 
-<file path=ppt/slides/slide5.xml><?xml version="1.0" encoding="utf-8"?>
+<file path=ppt/slides/slide6.xml><?xml version="1.0" encoding="utf-8"?>
 <p:sld xmlns:a="http://schemas.openxmlformats.org/drawingml/2006/main" xmlns:r="http://schemas.openxmlformats.org/officeDocument/2006/relationships" xmlns:p="http://schemas.openxmlformats.org/presentationml/2006/main">
   <p:cSld name="Slide 5">
     <p:bg>
@@ -13157,7 +13149,7 @@
 </p:sld>
 </file>
 
-<file path=ppt/slides/slide6.xml><?xml version="1.0" encoding="utf-8"?>
+<file path=ppt/slides/slide7.xml><?xml version="1.0" encoding="utf-8"?>
 <p:sld xmlns:a="http://schemas.openxmlformats.org/drawingml/2006/main" xmlns:r="http://schemas.openxmlformats.org/officeDocument/2006/relationships" xmlns:p="http://schemas.openxmlformats.org/presentationml/2006/main">
   <p:cSld name="Slide 6">
     <p:bg>
@@ -13816,7 +13808,7 @@
 </p:sld>
 </file>
 
-<file path=ppt/slides/slide7.xml><?xml version="1.0" encoding="utf-8"?>
+<file path=ppt/slides/slide8.xml><?xml version="1.0" encoding="utf-8"?>
 <p:sld xmlns:a="http://schemas.openxmlformats.org/drawingml/2006/main" xmlns:r="http://schemas.openxmlformats.org/officeDocument/2006/relationships" xmlns:p="http://schemas.openxmlformats.org/presentationml/2006/main">
   <p:cSld name="Slide 7">
     <p:bg>
@@ -16095,7 +16087,7 @@
 </p:sld>
 </file>
 
-<file path=ppt/slides/slide8.xml><?xml version="1.0" encoding="utf-8"?>
+<file path=ppt/slides/slide9.xml><?xml version="1.0" encoding="utf-8"?>
 <p:sld xmlns:a="http://schemas.openxmlformats.org/drawingml/2006/main" xmlns:r="http://schemas.openxmlformats.org/officeDocument/2006/relationships" xmlns:p="http://schemas.openxmlformats.org/presentationml/2006/main">
   <p:cSld name="Slide 8">
     <p:bg>
@@ -21693,249 +21685,6 @@
                 <a:cs typeface="Calibri" pitchFamily="34" charset="-120"/>
               </a:rPr>
               <a:t>Northline Care  ·  9</a:t>
-            </a:r>
-            <a:endParaRPr lang="en-US" sz="1000" dirty="0"/>
-          </a:p>
-        </p:txBody>
-      </p:sp>
-    </p:spTree>
-  </p:cSld>
-  <p:clrMapOvr>
-    <a:masterClrMapping/>
-  </p:clrMapOvr>
-</p:sld>
-</file>
-
-<file path=ppt/slides/slide9.xml><?xml version="1.0" encoding="utf-8"?>
-<p:sld xmlns:a="http://schemas.openxmlformats.org/drawingml/2006/main" xmlns:r="http://schemas.openxmlformats.org/officeDocument/2006/relationships" xmlns:p="http://schemas.openxmlformats.org/presentationml/2006/main">
-  <p:cSld name="Slide 9">
-    <p:bg>
-      <p:bgPr>
-        <a:solidFill>
-          <a:srgbClr val="FFFFFF"/>
-        </a:solidFill>
-      </p:bgPr>
-    </p:bg>
-    <p:spTree>
-      <p:nvGrpSpPr>
-        <p:cNvPr id="1" name=""/>
-        <p:cNvGrpSpPr/>
-        <p:nvPr/>
-      </p:nvGrpSpPr>
-      <p:grpSpPr>
-        <a:xfrm>
-          <a:off x="0" y="0"/>
-          <a:ext cx="0" cy="0"/>
-          <a:chOff x="0" y="0"/>
-          <a:chExt cx="0" cy="0"/>
-        </a:xfrm>
-      </p:grpSpPr>
-      <p:sp>
-        <p:nvSpPr>
-          <p:cNvPr id="2" name="Text 0"/>
-          <p:cNvSpPr txBox="1"/>
-          <p:nvPr/>
-        </p:nvSpPr>
-        <p:spPr>
-          <a:xfrm>
-            <a:off x="548640" y="164592"/>
-            <a:ext cx="11094415" cy="274320"/>
-          </a:xfrm>
-          <a:prstGeom prst="rect">
-            <a:avLst/>
-          </a:prstGeom>
-          <a:noFill/>
-          <a:ln/>
-        </p:spPr>
-        <p:txBody>
-          <a:bodyPr wrap="square" lIns="0" tIns="0" rIns="0" bIns="0" rtlCol="0" anchor="ctr"/>
-          <a:lstStyle/>
-          <a:p>
-            <a:pPr algn="l" indent="0" marL="0">
-              <a:buNone/>
-            </a:pPr>
-            <a:r>
-              <a:rPr lang="en-US" sz="1200" b="1" spc="200" kern="0" dirty="0">
-                <a:solidFill>
-                  <a:srgbClr val="1C7293"/>
-                </a:solidFill>
-                <a:latin typeface="Calibri" pitchFamily="34" charset="0"/>
-                <a:ea typeface="Calibri" pitchFamily="34" charset="-122"/>
-                <a:cs typeface="Calibri" pitchFamily="34" charset="-120"/>
-              </a:rPr>
-              <a:t>TREND, WEEKS 1-52</a:t>
-            </a:r>
-            <a:endParaRPr lang="en-US" sz="1200" dirty="0"/>
-          </a:p>
-        </p:txBody>
-      </p:sp>
-      <p:sp>
-        <p:nvSpPr>
-          <p:cNvPr id="3" name="Text 1"/>
-          <p:cNvSpPr txBox="1"/>
-          <p:nvPr/>
-        </p:nvSpPr>
-        <p:spPr>
-          <a:xfrm>
-            <a:off x="548640" y="411480"/>
-            <a:ext cx="11094415" cy="822960"/>
-          </a:xfrm>
-          <a:prstGeom prst="rect">
-            <a:avLst/>
-          </a:prstGeom>
-          <a:noFill/>
-          <a:ln/>
-        </p:spPr>
-        <p:txBody>
-          <a:bodyPr wrap="square" lIns="0" tIns="0" rIns="0" bIns="0" rtlCol="0" anchor="ctr"/>
-          <a:lstStyle/>
-          <a:p>
-            <a:pPr algn="l" indent="0" marL="0">
-              <a:buNone/>
-            </a:pPr>
-            <a:r>
-              <a:rPr lang="en-US" sz="3200" b="1" dirty="0">
-                <a:solidFill>
-                  <a:srgbClr val="1B1F27"/>
-                </a:solidFill>
-                <a:latin typeface="Cambria" pitchFamily="34" charset="0"/>
-                <a:ea typeface="Cambria" pitchFamily="34" charset="-122"/>
-                <a:cs typeface="Cambria" pitchFamily="34" charset="-120"/>
-              </a:rPr>
-              <a:t>AI lets you pivot fast</a:t>
-            </a:r>
-            <a:endParaRPr lang="en-US" sz="3200" dirty="0"/>
-          </a:p>
-        </p:txBody>
-      </p:sp>
-      <p:graphicFrame>
-        <p:nvGraphicFramePr>
-          <p:cNvPr id="4" name="Chart 0" descr=""/>
-          <p:cNvGraphicFramePr/>
-          <p:nvPr/>
-        </p:nvGraphicFramePr>
-        <p:xfrm>
-          <a:off x="548640" y="1508760"/>
-          <a:ext cx="11094415" cy="3840480"/>
-        </p:xfrm>
-        <a:graphic xmlns:a="http://schemas.openxmlformats.org/drawingml/2006/main">
-          <a:graphicData uri="http://schemas.openxmlformats.org/drawingml/2006/chart">
-            <c:chart xmlns:c="http://schemas.openxmlformats.org/drawingml/2006/chart" r:id="rId1"/>
-          </a:graphicData>
-        </a:graphic>
-      </p:graphicFrame>
-      <p:sp>
-        <p:nvSpPr>
-          <p:cNvPr id="5" name="Text 2"/>
-          <p:cNvSpPr txBox="1"/>
-          <p:nvPr/>
-        </p:nvSpPr>
-        <p:spPr>
-          <a:xfrm>
-            <a:off x="548640" y="5486400"/>
-            <a:ext cx="11094415" cy="292608"/>
-          </a:xfrm>
-          <a:prstGeom prst="rect">
-            <a:avLst/>
-          </a:prstGeom>
-          <a:noFill/>
-          <a:ln/>
-        </p:spPr>
-        <p:txBody>
-          <a:bodyPr wrap="square" lIns="0" tIns="0" rIns="0" bIns="0" rtlCol="0" anchor="ctr"/>
-          <a:lstStyle/>
-          <a:p>
-            <a:pPr indent="0" marL="0">
-              <a:buNone/>
-            </a:pPr>
-            <a:r>
-              <a:rPr lang="en-US" sz="1250" i="1" dirty="0">
-                <a:solidFill>
-                  <a:srgbClr val="5B6472"/>
-                </a:solidFill>
-                <a:latin typeface="Calibri" pitchFamily="34" charset="0"/>
-                <a:ea typeface="Calibri" pitchFamily="34" charset="-122"/>
-                <a:cs typeface="Calibri" pitchFamily="34" charset="-120"/>
-              </a:rPr>
-              <a:t>Median nurse response: 31.1h → 4.0h — but 90.0 urgent cases a week are now missed.</a:t>
-            </a:r>
-            <a:endParaRPr lang="en-US" sz="1250" dirty="0"/>
-          </a:p>
-        </p:txBody>
-      </p:sp>
-      <p:sp>
-        <p:nvSpPr>
-          <p:cNvPr id="6" name="Text 3"/>
-          <p:cNvSpPr txBox="1"/>
-          <p:nvPr/>
-        </p:nvSpPr>
-        <p:spPr>
-          <a:xfrm>
-            <a:off x="548640" y="5806440"/>
-            <a:ext cx="11094415" cy="292608"/>
-          </a:xfrm>
-          <a:prstGeom prst="rect">
-            <a:avLst/>
-          </a:prstGeom>
-          <a:noFill/>
-          <a:ln/>
-        </p:spPr>
-        <p:txBody>
-          <a:bodyPr wrap="square" lIns="0" tIns="0" rIns="0" bIns="0" rtlCol="0" anchor="ctr"/>
-          <a:lstStyle/>
-          <a:p>
-            <a:pPr indent="0" marL="0">
-              <a:buNone/>
-            </a:pPr>
-            <a:r>
-              <a:rPr lang="en-US" sz="1200" i="1" dirty="0">
-                <a:solidFill>
-                  <a:srgbClr val="1C7293"/>
-                </a:solidFill>
-                <a:latin typeface="Calibri" pitchFamily="34" charset="0"/>
-                <a:ea typeface="Calibri" pitchFamily="34" charset="-122"/>
-                <a:cs typeface="Calibri" pitchFamily="34" charset="-120"/>
-              </a:rPr>
-              <a:t>Numbers from a triage deployment made with the 190/115 decisions on this laptop; your room's numbers will differ. Show the live dashboard.</a:t>
-            </a:r>
-            <a:endParaRPr lang="en-US" sz="1200" dirty="0"/>
-          </a:p>
-        </p:txBody>
-      </p:sp>
-      <p:sp>
-        <p:nvSpPr>
-          <p:cNvPr id="7" name="Text 4"/>
-          <p:cNvSpPr txBox="1"/>
-          <p:nvPr/>
-        </p:nvSpPr>
-        <p:spPr>
-          <a:xfrm>
-            <a:off x="9265615" y="6400800"/>
-            <a:ext cx="2377440" cy="274320"/>
-          </a:xfrm>
-          <a:prstGeom prst="rect">
-            <a:avLst/>
-          </a:prstGeom>
-          <a:noFill/>
-          <a:ln/>
-        </p:spPr>
-        <p:txBody>
-          <a:bodyPr wrap="square" lIns="0" tIns="0" rIns="0" bIns="0" rtlCol="0" anchor="ctr"/>
-          <a:lstStyle/>
-          <a:p>
-            <a:pPr algn="r" indent="0" marL="0">
-              <a:buNone/>
-            </a:pPr>
-            <a:r>
-              <a:rPr lang="en-US" sz="1000" dirty="0">
-                <a:solidFill>
-                  <a:srgbClr val="5B6472"/>
-                </a:solidFill>
-                <a:latin typeface="Calibri" pitchFamily="34" charset="0"/>
-                <a:ea typeface="Calibri" pitchFamily="34" charset="-122"/>
-                <a:cs typeface="Calibri" pitchFamily="34" charset="-120"/>
-              </a:rPr>
-              <a:t>Northline Care  ·  10</a:t>
             </a:r>
             <a:endParaRPr lang="en-US" sz="1000" dirty="0"/>
           </a:p>

--- a/slides/deck.pptx
+++ b/slides/deck.pptx
@@ -3279,7 +3279,7 @@
         <p:spPr>
           <a:xfrm>
             <a:off x="548640" y="1554480"/>
-            <a:ext cx="3535680" cy="2743200"/>
+            <a:ext cx="3535680" cy="2560320"/>
           </a:xfrm>
           <a:prstGeom prst="roundRect">
             <a:avLst>
@@ -3381,7 +3381,7 @@
                 </a:solidFill>
                 <a:latin typeface="Cambria"/>
               </a:rPr>
-              <a:t>Claude Code</a:t>
+              <a:t>Open Claude Code</a:t>
             </a:r>
           </a:p>
         </p:txBody>
@@ -3395,7 +3395,7 @@
         <p:spPr>
           <a:xfrm>
             <a:off x="822960" y="2834640"/>
-            <a:ext cx="2987040" cy="1371600"/>
+            <a:ext cx="2987040" cy="1188720"/>
           </a:xfrm>
           <a:prstGeom prst="rect">
             <a:avLst/>
@@ -3420,7 +3420,7 @@
                 </a:solidFill>
                 <a:latin typeface="Calibri"/>
               </a:rPr>
-              <a:t>Install it and sign in.</a:t>
+              <a:t>The desktop app. Sign in if it asks.</a:t>
             </a:r>
           </a:p>
           <a:p>
@@ -3436,7 +3436,25 @@
                 </a:solidFill>
                 <a:latin typeface="Calibri"/>
               </a:rPr>
-              <a:t>Check: type </a:t>
+              <a:t>Click </a:t>
+            </a:r>
+            <a:r>
+              <a:rPr sz="1400" b="1">
+                <a:solidFill>
+                  <a:srgbClr val="5B6472"/>
+                </a:solidFill>
+                <a:latin typeface="Calibri"/>
+              </a:rPr>
+              <a:t>New project</a:t>
+            </a:r>
+            <a:r>
+              <a:rPr sz="1400">
+                <a:solidFill>
+                  <a:srgbClr val="5B6472"/>
+                </a:solidFill>
+                <a:latin typeface="Calibri"/>
+              </a:rPr>
+              <a:t>, make a new empty folder, and name it </a:t>
             </a:r>
             <a:r>
               <a:rPr sz="1300" b="1">
@@ -3445,7 +3463,7 @@
                 </a:solidFill>
                 <a:latin typeface="Consolas"/>
               </a:rPr>
-              <a:t>claude --version</a:t>
+              <a:t>northline</a:t>
             </a:r>
             <a:r>
               <a:rPr sz="1400">
@@ -3454,23 +3472,7 @@
                 </a:solidFill>
                 <a:latin typeface="Calibri"/>
               </a:rPr>
-              <a:t> in a terminal.</a:t>
-            </a:r>
-          </a:p>
-          <a:p>
-            <a:pPr>
-              <a:spcAft>
-                <a:spcPts val="800"/>
-              </a:spcAft>
-            </a:pPr>
-            <a:r>
-              <a:rPr sz="1100">
-                <a:solidFill>
-                  <a:srgbClr val="5B6472"/>
-                </a:solidFill>
-                <a:latin typeface="Calibri"/>
-              </a:rPr>
-              <a:t>Windows: use the native installer, not npm.</a:t>
+              <a:t>.</a:t>
             </a:r>
           </a:p>
         </p:txBody>
@@ -3484,7 +3486,7 @@
         <p:spPr>
           <a:xfrm>
             <a:off x="4328160" y="1554480"/>
-            <a:ext cx="3535680" cy="2743200"/>
+            <a:ext cx="3535680" cy="2560320"/>
           </a:xfrm>
           <a:prstGeom prst="roundRect">
             <a:avLst>
@@ -3586,7 +3588,7 @@
                 </a:solidFill>
                 <a:latin typeface="Cambria"/>
               </a:rPr>
-              <a:t>The folder</a:t>
+              <a:t>Paste the line below</a:t>
             </a:r>
           </a:p>
         </p:txBody>
@@ -3600,7 +3602,7 @@
         <p:spPr>
           <a:xfrm>
             <a:off x="4602480" y="2834640"/>
-            <a:ext cx="2987040" cy="1371600"/>
+            <a:ext cx="2987040" cy="1188720"/>
           </a:xfrm>
           <a:prstGeom prst="rect">
             <a:avLst/>
@@ -3625,25 +3627,7 @@
                 </a:solidFill>
                 <a:latin typeface="Calibri"/>
               </a:rPr>
-              <a:t>Open the link below, click </a:t>
-            </a:r>
-            <a:r>
-              <a:rPr sz="1400" b="1">
-                <a:solidFill>
-                  <a:srgbClr val="5B6472"/>
-                </a:solidFill>
-                <a:latin typeface="Calibri"/>
-              </a:rPr>
-              <a:t>Code → Download ZIP</a:t>
-            </a:r>
-            <a:r>
-              <a:rPr sz="1400">
-                <a:solidFill>
-                  <a:srgbClr val="5B6472"/>
-                </a:solidFill>
-                <a:latin typeface="Calibri"/>
-              </a:rPr>
-              <a:t>.</a:t>
+              <a:t>Claude downloads the course and unpacks it into your folder.</a:t>
             </a:r>
           </a:p>
           <a:p>
@@ -3659,7 +3643,7 @@
                 </a:solidFill>
                 <a:latin typeface="Calibri"/>
               </a:rPr>
-              <a:t>Unzip it into your home folder.</a:t>
+              <a:t>When it says it is done, close the project and open it again.</a:t>
             </a:r>
           </a:p>
         </p:txBody>
@@ -3673,7 +3657,7 @@
         <p:spPr>
           <a:xfrm>
             <a:off x="8107680" y="1554480"/>
-            <a:ext cx="3535680" cy="2743200"/>
+            <a:ext cx="3535680" cy="2560320"/>
           </a:xfrm>
           <a:prstGeom prst="roundRect">
             <a:avLst>
@@ -3789,7 +3773,7 @@
         <p:spPr>
           <a:xfrm>
             <a:off x="8382000" y="2834640"/>
-            <a:ext cx="2987040" cy="1371600"/>
+            <a:ext cx="2987040" cy="1188720"/>
           </a:xfrm>
           <a:prstGeom prst="rect">
             <a:avLst/>
@@ -3814,7 +3798,7 @@
                 </a:solidFill>
                 <a:latin typeface="Calibri"/>
               </a:rPr>
-              <a:t>In a terminal: </a:t>
+              <a:t>Type </a:t>
             </a:r>
             <a:r>
               <a:rPr sz="1300" b="1">
@@ -3823,7 +3807,16 @@
                 </a:solidFill>
                 <a:latin typeface="Consolas"/>
               </a:rPr>
-              <a:t>cd ~/northline-course</a:t>
+              <a:t>/setup</a:t>
+            </a:r>
+            <a:r>
+              <a:rPr sz="1400">
+                <a:solidFill>
+                  <a:srgbClr val="5B6472"/>
+                </a:solidFill>
+                <a:latin typeface="Calibri"/>
+              </a:rPr>
+              <a:t>. Do what it says.</a:t>
             </a:r>
           </a:p>
           <a:p>
@@ -3839,50 +3832,7 @@
                 </a:solidFill>
                 <a:latin typeface="Calibri"/>
               </a:rPr>
-              <a:t>then </a:t>
-            </a:r>
-            <a:r>
-              <a:rPr sz="1300" b="1">
-                <a:solidFill>
-                  <a:srgbClr val="1C7293"/>
-                </a:solidFill>
-                <a:latin typeface="Consolas"/>
-              </a:rPr>
-              <a:t>claude</a:t>
-            </a:r>
-            <a:r>
-              <a:rPr sz="1400">
-                <a:solidFill>
-                  <a:srgbClr val="5B6472"/>
-                </a:solidFill>
-                <a:latin typeface="Calibri"/>
-              </a:rPr>
-              <a:t>, then type </a:t>
-            </a:r>
-            <a:r>
-              <a:rPr sz="1300" b="1">
-                <a:solidFill>
-                  <a:srgbClr val="1C7293"/>
-                </a:solidFill>
-                <a:latin typeface="Consolas"/>
-              </a:rPr>
-              <a:t>/setup</a:t>
-            </a:r>
-          </a:p>
-          <a:p>
-            <a:pPr>
-              <a:spcAft>
-                <a:spcPts val="800"/>
-              </a:spcAft>
-            </a:pPr>
-            <a:r>
-              <a:rPr sz="1400">
-                <a:solidFill>
-                  <a:srgbClr val="5B6472"/>
-                </a:solidFill>
-                <a:latin typeface="Calibri"/>
-              </a:rPr>
-              <a:t>Do what it says. Stop at </a:t>
+              <a:t>Stop when you see </a:t>
             </a:r>
             <a:r>
               <a:rPr sz="1300" b="1">
@@ -3913,8 +3863,8 @@
         </p:nvSpPr>
         <p:spPr>
           <a:xfrm>
-            <a:off x="548640" y="4754880"/>
-            <a:ext cx="11094415" cy="1005840"/>
+            <a:off x="548640" y="4480560"/>
+            <a:ext cx="11094415" cy="1234440"/>
           </a:xfrm>
           <a:prstGeom prst="roundRect">
             <a:avLst>
@@ -3959,7 +3909,7 @@
         </p:nvSpPr>
         <p:spPr>
           <a:xfrm>
-            <a:off x="868680" y="4882896"/>
+            <a:off x="868680" y="4608576"/>
             <a:ext cx="10454320" cy="320040"/>
           </a:xfrm>
           <a:prstGeom prst="rect">
@@ -3980,7 +3930,7 @@
                 </a:solidFill>
                 <a:latin typeface="Calibri"/>
               </a:rPr>
-              <a:t>The folder</a:t>
+              <a:t>Paste this into Claude Code (step 2)</a:t>
             </a:r>
           </a:p>
         </p:txBody>
@@ -3993,8 +3943,8 @@
         </p:nvSpPr>
         <p:spPr>
           <a:xfrm>
-            <a:off x="868680" y="5157216"/>
-            <a:ext cx="10454320" cy="457200"/>
+            <a:off x="868680" y="4901184"/>
+            <a:ext cx="10454320" cy="822960"/>
           </a:xfrm>
           <a:prstGeom prst="rect">
             <a:avLst/>
@@ -4008,13 +3958,13 @@
           <a:lstStyle/>
           <a:p>
             <a:r>
-              <a:rPr sz="2200" b="1">
+              <a:rPr sz="1600" b="1">
                 <a:solidFill>
                   <a:srgbClr val="FFFFFF"/>
                 </a:solidFill>
                 <a:latin typeface="Consolas"/>
               </a:rPr>
-              <a:t>github.com/anthonymorrisjohnson/northline-course</a:t>
+              <a:t>Download github.com/anthonymorrisjohnson/northline-course as a ZIP, unzip it so the files sit directly in this folder, then delete the zip.</a:t>
             </a:r>
           </a:p>
         </p:txBody>

--- a/slides/deck.pptx
+++ b/slides/deck.pptx
@@ -3759,7 +3759,7 @@
                 </a:solidFill>
                 <a:latin typeface="Cambria"/>
               </a:rPr>
-              <a:t>/setup</a:t>
+              <a:t>/northline-setup</a:t>
             </a:r>
           </a:p>
         </p:txBody>
@@ -3807,7 +3807,7 @@
                 </a:solidFill>
                 <a:latin typeface="Consolas"/>
               </a:rPr>
-              <a:t>/setup</a:t>
+              <a:t>/northline-setup</a:t>
             </a:r>
             <a:r>
               <a:rPr sz="1400">

--- a/slides/deck.pptx
+++ b/slides/deck.pptx
@@ -2483,7 +2483,7 @@
           <a:p>
             <a:r>
               <a:rPr lang="en-US" dirty="0"/>
-              <a:t>four decisions, one at a time, voted by the room during /deploy triage. Each has a Northline default; say so, and don't let the room take all four without a vote.</a:t>
+              <a:t>four decisions, one at a time, voted by the room during /northline-deploy triage. Each has a Northline default; say so, and don't let the room take all four without a vote.</a:t>
             </a:r>
             <a:endParaRPr lang="en-US" dirty="0"/>
           </a:p>
@@ -8783,7 +8783,7 @@
                 <a:ea typeface="Cambria" pitchFamily="34" charset="-122"/>
                 <a:cs typeface="Cambria" pitchFamily="34" charset="-120"/>
               </a:rPr>
-              <a:t>/new-experience</a:t>
+              <a:t>/northline-new-experience</a:t>
             </a:r>
             <a:endParaRPr lang="en-US" sz="1500" dirty="0"/>
           </a:p>
@@ -9539,7 +9539,7 @@
                 <a:ea typeface="Calibri" pitchFamily="34" charset="-122"/>
                 <a:cs typeface="Calibri" pitchFamily="34" charset="-120"/>
               </a:rPr>
-              <a:t>/pm-run and /deploy triage, all session</a:t>
+              <a:t>/northline-pm-run and /northline-deploy triage, all session</a:t>
             </a:r>
             <a:endParaRPr lang="en-US" sz="1250" dirty="0"/>
           </a:p>
@@ -12227,7 +12227,7 @@
                 <a:ea typeface="Cambria" pitchFamily="34" charset="-122"/>
                 <a:cs typeface="Cambria" pitchFamily="34" charset="-120"/>
               </a:rPr>
-              <a:t>/expand or /deploy</a:t>
+              <a:t>/northline-expand or /northline-deploy</a:t>
             </a:r>
             <a:endParaRPr lang="en-US" sz="1300" dirty="0"/>
           </a:p>

--- a/slides/deck.pptx
+++ b/slides/deck.pptx
@@ -3375,13 +3375,13 @@
           <a:lstStyle/>
           <a:p>
             <a:r>
-              <a:rPr sz="2000" b="1">
+              <a:rPr sz="1900" b="1">
                 <a:solidFill>
                   <a:srgbClr val="21295C"/>
                 </a:solidFill>
                 <a:latin typeface="Cambria"/>
               </a:rPr>
-              <a:t>Open Claude Code</a:t>
+              <a:t>Claude Code</a:t>
             </a:r>
           </a:p>
         </p:txBody>
@@ -3420,7 +3420,16 @@
                 </a:solidFill>
                 <a:latin typeface="Calibri"/>
               </a:rPr>
-              <a:t>The desktop app. Sign in if it asks.</a:t>
+              <a:t>Install it and sign in. Check: </a:t>
+            </a:r>
+            <a:r>
+              <a:rPr sz="1300" b="1">
+                <a:solidFill>
+                  <a:srgbClr val="1C7293"/>
+                </a:solidFill>
+                <a:latin typeface="Consolas"/>
+              </a:rPr>
+              <a:t>claude --version</a:t>
             </a:r>
           </a:p>
           <a:p>
@@ -3430,49 +3439,13 @@
               </a:spcAft>
             </a:pPr>
             <a:r>
-              <a:rPr sz="1400">
+              <a:rPr sz="1100">
                 <a:solidFill>
                   <a:srgbClr val="5B6472"/>
                 </a:solidFill>
                 <a:latin typeface="Calibri"/>
               </a:rPr>
-              <a:t>Click </a:t>
-            </a:r>
-            <a:r>
-              <a:rPr sz="1400" b="1">
-                <a:solidFill>
-                  <a:srgbClr val="5B6472"/>
-                </a:solidFill>
-                <a:latin typeface="Calibri"/>
-              </a:rPr>
-              <a:t>New project</a:t>
-            </a:r>
-            <a:r>
-              <a:rPr sz="1400">
-                <a:solidFill>
-                  <a:srgbClr val="5B6472"/>
-                </a:solidFill>
-                <a:latin typeface="Calibri"/>
-              </a:rPr>
-              <a:t>, make a new empty folder, and name it </a:t>
-            </a:r>
-            <a:r>
-              <a:rPr sz="1300" b="1">
-                <a:solidFill>
-                  <a:srgbClr val="1C7293"/>
-                </a:solidFill>
-                <a:latin typeface="Consolas"/>
-              </a:rPr>
-              <a:t>northline</a:t>
-            </a:r>
-            <a:r>
-              <a:rPr sz="1400">
-                <a:solidFill>
-                  <a:srgbClr val="5B6472"/>
-                </a:solidFill>
-                <a:latin typeface="Calibri"/>
-              </a:rPr>
-              <a:t>.</a:t>
+              <a:t>The Code tab in the Claude desktop app, or claude in a terminal. Not New project.</a:t>
             </a:r>
           </a:p>
         </p:txBody>
@@ -3582,13 +3555,13 @@
           <a:lstStyle/>
           <a:p>
             <a:r>
-              <a:rPr sz="2000" b="1">
+              <a:rPr sz="1900" b="1">
                 <a:solidFill>
                   <a:srgbClr val="21295C"/>
                 </a:solidFill>
                 <a:latin typeface="Cambria"/>
               </a:rPr>
-              <a:t>Paste the line below</a:t>
+              <a:t>The folder</a:t>
             </a:r>
           </a:p>
         </p:txBody>
@@ -3627,7 +3600,25 @@
                 </a:solidFill>
                 <a:latin typeface="Calibri"/>
               </a:rPr>
-              <a:t>Claude downloads the course and unpacks it into your folder.</a:t>
+              <a:t>Open the link below, click </a:t>
+            </a:r>
+            <a:r>
+              <a:rPr sz="1400" b="1">
+                <a:solidFill>
+                  <a:srgbClr val="5B6472"/>
+                </a:solidFill>
+                <a:latin typeface="Calibri"/>
+              </a:rPr>
+              <a:t>Code → Download ZIP</a:t>
+            </a:r>
+            <a:r>
+              <a:rPr sz="1400">
+                <a:solidFill>
+                  <a:srgbClr val="5B6472"/>
+                </a:solidFill>
+                <a:latin typeface="Calibri"/>
+              </a:rPr>
+              <a:t>.</a:t>
             </a:r>
           </a:p>
           <a:p>
@@ -3643,7 +3634,7 @@
                 </a:solidFill>
                 <a:latin typeface="Calibri"/>
               </a:rPr>
-              <a:t>When it says it is done, close the project and open it again.</a:t>
+              <a:t>Unzip it into your home folder.</a:t>
             </a:r>
           </a:p>
         </p:txBody>
@@ -3753,7 +3744,7 @@
           <a:lstStyle/>
           <a:p>
             <a:r>
-              <a:rPr sz="2000" b="1">
+              <a:rPr sz="1900" b="1">
                 <a:solidFill>
                   <a:srgbClr val="21295C"/>
                 </a:solidFill>
@@ -3798,7 +3789,7 @@
                 </a:solidFill>
                 <a:latin typeface="Calibri"/>
               </a:rPr>
-              <a:t>Type </a:t>
+              <a:t>Open the folder in Code, or in a terminal: </a:t>
             </a:r>
             <a:r>
               <a:rPr sz="1300" b="1">
@@ -3807,16 +3798,7 @@
                 </a:solidFill>
                 <a:latin typeface="Consolas"/>
               </a:rPr>
-              <a:t>/northline-setup</a:t>
-            </a:r>
-            <a:r>
-              <a:rPr sz="1400">
-                <a:solidFill>
-                  <a:srgbClr val="5B6472"/>
-                </a:solidFill>
-                <a:latin typeface="Calibri"/>
-              </a:rPr>
-              <a:t>. Do what it says.</a:t>
+              <a:t>cd ~/northline-course</a:t>
             </a:r>
           </a:p>
           <a:p>
@@ -3832,7 +3814,50 @@
                 </a:solidFill>
                 <a:latin typeface="Calibri"/>
               </a:rPr>
-              <a:t>Stop when you see </a:t>
+              <a:t>then </a:t>
+            </a:r>
+            <a:r>
+              <a:rPr sz="1300" b="1">
+                <a:solidFill>
+                  <a:srgbClr val="1C7293"/>
+                </a:solidFill>
+                <a:latin typeface="Consolas"/>
+              </a:rPr>
+              <a:t>claude</a:t>
+            </a:r>
+            <a:r>
+              <a:rPr sz="1400">
+                <a:solidFill>
+                  <a:srgbClr val="5B6472"/>
+                </a:solidFill>
+                <a:latin typeface="Calibri"/>
+              </a:rPr>
+              <a:t>, then </a:t>
+            </a:r>
+            <a:r>
+              <a:rPr sz="1300" b="1">
+                <a:solidFill>
+                  <a:srgbClr val="1C7293"/>
+                </a:solidFill>
+                <a:latin typeface="Consolas"/>
+              </a:rPr>
+              <a:t>/northline-setup</a:t>
+            </a:r>
+          </a:p>
+          <a:p>
+            <a:pPr>
+              <a:spcAft>
+                <a:spcPts val="800"/>
+              </a:spcAft>
+            </a:pPr>
+            <a:r>
+              <a:rPr sz="1400">
+                <a:solidFill>
+                  <a:srgbClr val="5B6472"/>
+                </a:solidFill>
+                <a:latin typeface="Calibri"/>
+              </a:rPr>
+              <a:t>Do what it says. Stop at </a:t>
             </a:r>
             <a:r>
               <a:rPr sz="1300" b="1">
@@ -3864,7 +3889,7 @@
         <p:spPr>
           <a:xfrm>
             <a:off x="548640" y="4480560"/>
-            <a:ext cx="11094415" cy="1234440"/>
+            <a:ext cx="11094415" cy="1005840"/>
           </a:xfrm>
           <a:prstGeom prst="roundRect">
             <a:avLst>
@@ -3930,7 +3955,7 @@
                 </a:solidFill>
                 <a:latin typeface="Calibri"/>
               </a:rPr>
-              <a:t>Paste this into Claude Code (step 2)</a:t>
+              <a:t>The folder</a:t>
             </a:r>
           </a:p>
         </p:txBody>
@@ -3943,8 +3968,8 @@
         </p:nvSpPr>
         <p:spPr>
           <a:xfrm>
-            <a:off x="868680" y="4901184"/>
-            <a:ext cx="10454320" cy="822960"/>
+            <a:off x="868680" y="4882896"/>
+            <a:ext cx="10454320" cy="457200"/>
           </a:xfrm>
           <a:prstGeom prst="rect">
             <a:avLst/>
@@ -3958,13 +3983,13 @@
           <a:lstStyle/>
           <a:p>
             <a:r>
-              <a:rPr sz="1600" b="1">
+              <a:rPr sz="2200" b="1">
                 <a:solidFill>
                   <a:srgbClr val="FFFFFF"/>
                 </a:solidFill>
                 <a:latin typeface="Consolas"/>
               </a:rPr>
-              <a:t>Download github.com/anthonymorrisjohnson/northline-course as a ZIP, unzip it so the files sit directly in this folder, then delete the zip.</a:t>
+              <a:t>github.com/anthonymorrisjohnson/northline-course</a:t>
             </a:r>
           </a:p>
         </p:txBody>

--- a/slides/deck.pptx
+++ b/slides/deck.pptx
@@ -2043,7 +2043,7 @@
           <a:p>
             <a:r>
               <a:rPr lang="en-US" dirty="0"/>
-              <a:t>hold this one line. It is the reason the four decisions on slide 5 have no universal right answer — only a market that is or isn't willing to accept them.</a:t>
+              <a:t>hold this one line. It is the reason the four decisions on slide 6 have no universal right answer — only a market that is or isn't willing to accept them.</a:t>
             </a:r>
             <a:endParaRPr lang="en-US" dirty="0"/>
           </a:p>
@@ -3381,7 +3381,7 @@
                 </a:solidFill>
                 <a:latin typeface="Cambria"/>
               </a:rPr>
-              <a:t>Claude Code</a:t>
+              <a:t>The Claude app</a:t>
             </a:r>
           </a:p>
         </p:txBody>
@@ -3420,16 +3420,7 @@
                 </a:solidFill>
                 <a:latin typeface="Calibri"/>
               </a:rPr>
-              <a:t>Install it and sign in. Check: </a:t>
-            </a:r>
-            <a:r>
-              <a:rPr sz="1300" b="1">
-                <a:solidFill>
-                  <a:srgbClr val="1C7293"/>
-                </a:solidFill>
-                <a:latin typeface="Consolas"/>
-              </a:rPr>
-              <a:t>claude --version</a:t>
+              <a:t>Install the Claude desktop app and sign in.</a:t>
             </a:r>
           </a:p>
           <a:p>
@@ -3439,13 +3430,31 @@
               </a:spcAft>
             </a:pPr>
             <a:r>
-              <a:rPr sz="1100">
+              <a:rPr sz="1400">
                 <a:solidFill>
                   <a:srgbClr val="5B6472"/>
                 </a:solidFill>
                 <a:latin typeface="Calibri"/>
               </a:rPr>
-              <a:t>The Code tab in the Claude desktop app, or claude in a terminal. Not New project.</a:t>
+              <a:t>Open the </a:t>
+            </a:r>
+            <a:r>
+              <a:rPr sz="1300" b="1">
+                <a:solidFill>
+                  <a:srgbClr val="5B6472"/>
+                </a:solidFill>
+                <a:latin typeface="Consolas"/>
+              </a:rPr>
+              <a:t>Code</a:t>
+            </a:r>
+            <a:r>
+              <a:rPr sz="1400">
+                <a:solidFill>
+                  <a:srgbClr val="5B6472"/>
+                </a:solidFill>
+                <a:latin typeface="Calibri"/>
+              </a:rPr>
+              <a:t> tab. Not New project.</a:t>
             </a:r>
           </a:p>
         </p:txBody>
@@ -3789,16 +3798,25 @@
                 </a:solidFill>
                 <a:latin typeface="Calibri"/>
               </a:rPr>
-              <a:t>Open the folder in Code, or in a terminal: </a:t>
+              <a:t>In the Code tab, open the </a:t>
             </a:r>
             <a:r>
               <a:rPr sz="1300" b="1">
                 <a:solidFill>
-                  <a:srgbClr val="1C7293"/>
+                  <a:srgbClr val="5B6472"/>
                 </a:solidFill>
                 <a:latin typeface="Consolas"/>
               </a:rPr>
-              <a:t>cd ~/northline-course</a:t>
+              <a:t>northline-course</a:t>
+            </a:r>
+            <a:r>
+              <a:rPr sz="1400">
+                <a:solidFill>
+                  <a:srgbClr val="5B6472"/>
+                </a:solidFill>
+                <a:latin typeface="Calibri"/>
+              </a:rPr>
+              <a:t> folder.</a:t>
             </a:r>
           </a:p>
           <a:p>
@@ -3814,16 +3832,16 @@
                 </a:solidFill>
                 <a:latin typeface="Calibri"/>
               </a:rPr>
-              <a:t>then </a:t>
+              <a:t>Type </a:t>
             </a:r>
             <a:r>
               <a:rPr sz="1300" b="1">
                 <a:solidFill>
-                  <a:srgbClr val="1C7293"/>
+                  <a:srgbClr val="5B6472"/>
                 </a:solidFill>
                 <a:latin typeface="Consolas"/>
               </a:rPr>
-              <a:t>claude</a:t>
+              <a:t>/northline-setup</a:t>
             </a:r>
             <a:r>
               <a:rPr sz="1400">
@@ -3832,16 +3850,7 @@
                 </a:solidFill>
                 <a:latin typeface="Calibri"/>
               </a:rPr>
-              <a:t>, then </a:t>
-            </a:r>
-            <a:r>
-              <a:rPr sz="1300" b="1">
-                <a:solidFill>
-                  <a:srgbClr val="1C7293"/>
-                </a:solidFill>
-                <a:latin typeface="Consolas"/>
-              </a:rPr>
-              <a:t>/northline-setup</a:t>
+              <a:t> in the chat.</a:t>
             </a:r>
           </a:p>
           <a:p>
@@ -3862,7 +3871,7 @@
             <a:r>
               <a:rPr sz="1300" b="1">
                 <a:solidFill>
-                  <a:srgbClr val="1C7293"/>
+                  <a:srgbClr val="5B6472"/>
                 </a:solidFill>
                 <a:latin typeface="Consolas"/>
               </a:rPr>
@@ -8637,7 +8646,7 @@
                 <a:ea typeface="Cambria" pitchFamily="34" charset="-122"/>
                 <a:cs typeface="Cambria" pitchFamily="34" charset="-120"/>
               </a:rPr>
-              <a:t>/setup</a:t>
+              <a:t>/northline-setup</a:t>
             </a:r>
             <a:endParaRPr lang="en-US" sz="1500" dirty="0"/>
           </a:p>
@@ -12440,7 +12449,7 @@
                 <a:ea typeface="Calibri" pitchFamily="34" charset="-122"/>
                 <a:cs typeface="Calibri" pitchFamily="34" charset="-120"/>
               </a:rPr>
-              <a:t>/DEPLOY TRIAGE</a:t>
+              <a:t>/NORTHLINE-DEPLOY TRIAGE</a:t>
             </a:r>
             <a:endParaRPr lang="en-US" sz="1200" dirty="0"/>
           </a:p>
